--- a/Curso Gas B/11 - UNE 60670 - Diseno y construccion/11 - UNE 60670 - Diseno y construccion - Vídeo 2.pptx
+++ b/Curso Gas B/11 - UNE 60670 - Diseno y construccion/11 - UNE 60670 - Diseno y construccion - Vídeo 2.pptx
@@ -25,6 +25,7 @@
     <p:sldId id="273" r:id="rId25"/>
     <p:sldId id="274" r:id="rId26"/>
     <p:sldId id="275" r:id="rId27"/>
+    <p:sldId id="276" r:id="rId28"/>
   </p:sldIdLst>
   <p:sldSz cx="12191695" cy="6858000" type="screen4x3"/>
   <p:notesSz cx="6858000" cy="9144000"/>
@@ -596,12 +597,12 @@
           <a:lstStyle/>
           <a:p>
             <a:r>
-              <a:t>N1: ¿Hay que señalizar el tubo?</a:t>
-            </a:r>
-          </a:p>
-          <a:p>
-            <a:r>
-              <a:t>N2: Sí, y por una razón muy práctica de seguridad. En la zona común, al menos una vez, y cerca de la llave de montante, el tubo se marca con la palabra gas o con una franja amarilla bien visible. ¿Para qué? Para que nadie taladre a ciegas y pinche el tubo pensando que era otra cosa. Es avisar: aquí hay gas, cuidado. Y aprovecho para un error clásico de examen: para tuberías vistas no se puede usar polietileno, el pe e. El polietileno es ese plástico de las tuberías enterradas; puesto al sol se degrada, se vuelve quebradizo y acaba fugando. Así que el polietileno es para enterrado, nunca visto. En vistas usas metal, como acero o cobre. Grábate esto: polietileno a la vista, jamás.</a:t>
+              <a:t>N1: ¿Y si no puedo dejar los tres centímetros?</a:t>
+            </a:r>
+          </a:p>
+          <a:p>
+            <a:r>
+              <a:t>N2: Entonces puedes acercar el tubo, pero solo si lo aíslas en ese tramo. El aislamiento sirve para que, aunque estén cerca, el gas y la luz o el agua no se afecten. ¿Con qué se aísla? Con una coquilla aislante, una caña de PVC, o una cinta autovulcanizante o termoretráctil, colocada como diga el fabricante. Pero ojo, esa protección no vale cualquiera: tiene que aguantar un aislamiento eléctrico de al menos cuatrocientos voltios y resistir temperaturas de menos quince a más ochenta grados. Y si el tramo va por el exterior, además tiene que estar protegida contra el sol. O sea, la coquilla no es decorativa, tiene sus números que cumplir. Ejemplo típico: el tubo de gas tiene que cruzarse con un cable eléctrico y no hay hueco para los tres centímetros; le pones la coquilla que cumple esos cuatrocientos voltios y ya puedes acercarlo.</a:t>
             </a:r>
           </a:p>
         </p:txBody>
@@ -671,12 +672,12 @@
           <a:lstStyle/>
           <a:p>
             <a:r>
-              <a:t>N1: ¿Por qué se mete un tubo dentro de una vaina?</a:t>
-            </a:r>
-          </a:p>
-          <a:p>
-            <a:r>
-              <a:t>N2: Por cuatro motivos, y conviene tenerlos separados porque cada uno tiene sus reglas. El primero, protección mecánica: cuando el tubo puede recibir un golpe, por ejemplo en un garaje donde pasan coches, se envaina para blindarlo. El segundo, ventilación: cuando el tubo cruza sitios donde una fuga se podría acumular, como un semisótano, un falso techo, una cámara cerrada o una vivienda ajena, se envaina para que, si hay escape, se airee hacia fuera y no se quede dentro. El tercero, para dar acceso a los armarios empotrados de regulación o contadores. Y el cuarto, cuando el tubo va por el suelo o el subsuelo. Truco de examen: si te preguntan por qué se envaina aquí, identifica primero cuál de estos cuatro casos es, porque de eso dependen el material y las condiciones. Cada motivo, su tratamiento.</a:t>
+              <a:t>N1: ¿Hay que señalizar el tubo?</a:t>
+            </a:r>
+          </a:p>
+          <a:p>
+            <a:r>
+              <a:t>N2: Sí, y por una razón muy práctica de seguridad. En la zona común, al menos una vez, y cerca de la llave de montante, el tubo se marca con la palabra gas o con una franja amarilla bien visible. ¿Para qué? Para que nadie taladre a ciegas y pinche el tubo pensando que era otra cosa. Es avisar: aquí hay gas, cuidado. Y aprovecho para un error clásico de examen: para tuberías vistas no se puede usar polietileno, el pe e. El polietileno es ese plástico de las tuberías enterradas; puesto al sol se degrada, se vuelve quebradizo y acaba fugando. Así que el polietileno es para enterrado, nunca visto. En vistas usas metal, como acero o cobre. Grábate esto: polietileno a la vista, jamás.</a:t>
             </a:r>
           </a:p>
         </p:txBody>
@@ -746,12 +747,12 @@
           <a:lstStyle/>
           <a:p>
             <a:r>
-              <a:t>N1: ¿Por qué es especial un semisótano?</a:t>
-            </a:r>
-          </a:p>
-          <a:p>
-            <a:r>
-              <a:t>N2: Porque un semisótano es una trampa para el gas: si hay una fuga, el gas se queda acumulado ahí abajo. Por eso, como regla general, el tubo se envaina al cruzarlo. Pero hay una puerta abierta, con condiciones estrictas: solo si el gas es más ligero que el aire, como el gas natural, si va a poca presión, cincuenta milibares o menos, y si el semisótano está muy bien ventilado. La lógica es preciosa: el gas natural, al ser ligero, sube y se escapa por las rejillas de arriba; por eso al butano y al propano, que son más pesados que el aire y se van al suelo, esta excepción no les vale. ¿Qué es estar bien ventilado? Dos rejillas en paredes opuestas, separadas al menos dos metros en horizontal y dos metros en altura, y con una superficie de rejilla de diez centímetros cuadrados por cada metro cuadrado de suelo, con un mínimo de doscientos centímetros cuadrados. Esa es la fórmula: superficie igual a diez por el área del suelo, y nunca menos de doscientos.</a:t>
+              <a:t>N1: ¿Por qué se mete un tubo dentro de una vaina?</a:t>
+            </a:r>
+          </a:p>
+          <a:p>
+            <a:r>
+              <a:t>N2: Por cuatro motivos, y conviene tenerlos separados porque cada uno tiene sus reglas. El primero, protección mecánica: cuando el tubo puede recibir un golpe, por ejemplo en un garaje donde pasan coches, se envaina para blindarlo. El segundo, ventilación: cuando el tubo cruza sitios donde una fuga se podría acumular, como un semisótano, un falso techo, una cámara cerrada o una vivienda ajena, se envaina para que, si hay escape, se airee hacia fuera y no se quede dentro. El tercero, para dar acceso a los armarios empotrados de regulación o contadores. Y el cuarto, cuando el tubo va por el suelo o el subsuelo. Truco de examen: si te preguntan por qué se envaina aquí, identifica primero cuál de estos cuatro casos es, porque de eso dependen el material y las condiciones. Cada motivo, su tratamiento.</a:t>
             </a:r>
           </a:p>
         </p:txBody>
@@ -821,12 +822,12 @@
           <a:lstStyle/>
           <a:p>
             <a:r>
-              <a:t>N1: ¿De qué material tiene que ser la vaina?</a:t>
-            </a:r>
-          </a:p>
-          <a:p>
-            <a:r>
-              <a:t>N2: Depende del para qué, y hay un patrón muy claro en la tabla. Para protección mecánica y para ventilación en semisótano, la vaina es metálica sí o sí, porque ahí necesitas resistencia de verdad: acero u otro material igual de fuerte. En los demás casos, o sea ventilación normal, acceso a armarios y suelo o subsuelo, sí admites plástico rígido, como pe uve ce, polietileno o polipropileno, siempre que aguante la forma sin aplastarse. Eso de aguantar la forma tiene nombre técnico, rigidez anular, y se traduce en que el material no se doble más de la cuenta. Además, en todos los casos marcados con asterisco en la norma, la vaina tiene que ser estanca, que no se cuele nada. Y una regla que cae: si una misma vaina hace dos trabajos a la vez, por ejemplo proteger y ventilar, tiene que cumplir lo más exigente de los dos. Metal donde hay que resistir; plástico rígido donde solo hay que envolver.</a:t>
+              <a:t>N1: ¿Por qué es especial un semisótano?</a:t>
+            </a:r>
+          </a:p>
+          <a:p>
+            <a:r>
+              <a:t>N2: Porque un semisótano es una trampa para el gas: si hay una fuga, el gas se queda acumulado ahí abajo. Por eso, como regla general, el tubo se envaina al cruzarlo. Pero hay una puerta abierta, con condiciones estrictas: solo si el gas es más ligero que el aire, como el gas natural, si va a poca presión, cincuenta milibares o menos, y si el semisótano está muy bien ventilado. La lógica es preciosa: el gas natural, al ser ligero, sube y se escapa por las rejillas de arriba; por eso al butano y al propano, que son más pesados que el aire y se van al suelo, esta excepción no les vale. ¿Qué es estar bien ventilado? Dos rejillas en paredes opuestas, separadas al menos dos metros en horizontal y dos metros en altura, y con una superficie de rejilla de diez centímetros cuadrados por cada metro cuadrado de suelo, con un mínimo de doscientos centímetros cuadrados. Esa es la fórmula: superficie igual a diez por el área del suelo, y nunca menos de doscientos.</a:t>
             </a:r>
           </a:p>
         </p:txBody>
@@ -896,12 +897,12 @@
           <a:lstStyle/>
           <a:p>
             <a:r>
-              <a:t>N1: Si la vaina es para ventilar, ¿cómo funciona exactamente?</a:t>
-            </a:r>
-          </a:p>
-          <a:p>
-            <a:r>
-              <a:t>N2: Piénsala como un tubo dentro de un tubo que respira. La idea es que si el tubo de gas tiene una fuga dentro de una zona ciega, como un semisótano o una cámara, ese escape tenga que salir obligatoriamente fuera, no quedarse dentro. Por eso la vaina de ventilación es continua y estanca en todo su recorrido, y sus dos bocas comunican con el exterior: una hace de entrada de aire y la otra de salida, y así se barre cualquier fuga hacia la calle. Si solo puede salir por una boca, la otra se sella pegada al tubo. Y hay una regla que se pregunta mucho y que la norma reforzó: siempre se sella el extremo de la vaina que da a un local sin ventilación, para que la fuga no se cuele justo en ese local cerrado. En resumen: la vaina de ventilación coge la fuga y la echa fuera, nunca la mete dentro.</a:t>
+              <a:t>N1: ¿De qué material tiene que ser la vaina?</a:t>
+            </a:r>
+          </a:p>
+          <a:p>
+            <a:r>
+              <a:t>N2: Depende del para qué, y hay un patrón muy claro en la tabla. Para protección mecánica y para ventilación en semisótano, la vaina es metálica sí o sí, porque ahí necesitas resistencia de verdad: acero u otro material igual de fuerte. En los demás casos, o sea ventilación normal, acceso a armarios y suelo o subsuelo, sí admites plástico rígido, como pe uve ce, polietileno o polipropileno, siempre que aguante la forma sin aplastarse. Eso de aguantar la forma tiene nombre técnico, rigidez anular, y se traduce en que el material no se doble más de la cuenta. Además, en todos los casos marcados con asterisco en la norma, la vaina tiene que ser estanca, que no se cuele nada. Y una regla que cae: si una misma vaina hace dos trabajos a la vez, por ejemplo proteger y ventilar, tiene que cumplir lo más exigente de los dos. Metal donde hay que resistir; plástico rígido donde solo hay que envolver.</a:t>
             </a:r>
           </a:p>
         </p:txBody>
@@ -971,12 +972,12 @@
           <a:lstStyle/>
           <a:p>
             <a:r>
-              <a:t>N1: ¿Vaina y conducto son lo mismo?</a:t>
-            </a:r>
-          </a:p>
-          <a:p>
-            <a:r>
-              <a:t>N2: Se parecen, porque los dos protegen o ventilan el tubo, pero hay una diferencia práctica. La vaina va ceñida al tubo, abrazándolo, y no lleva registros, es decir, no tiene tapas para meter la mano. El conducto es más holgado, va más suelto alrededor del tubo, y sí puede llevar registros para poder mantener la tubería sin destaparla del todo; eso sí, esos registros tienen que ser estancos y accesibles. Y un detalle importante que cae en examen: un conducto de ventilación del gas no cuenta como ventilación del local, ni sirve para pasar por él ningún otro servicio ajeno al gas. Es solo para el gas. Regla mental: vaina, ajustada y cerrada; conducto, holgado y con registros, pero exclusivo del gas.</a:t>
+              <a:t>N1: Si la vaina es para ventilar, ¿cómo funciona exactamente?</a:t>
+            </a:r>
+          </a:p>
+          <a:p>
+            <a:r>
+              <a:t>N2: Piénsala como un tubo dentro de un tubo que respira. La idea es que si el tubo de gas tiene una fuga dentro de una zona ciega, como un semisótano o una cámara, ese escape tenga que salir obligatoriamente fuera, no quedarse dentro. Por eso la vaina de ventilación es continua y estanca en todo su recorrido, y sus dos bocas comunican con el exterior: una hace de entrada de aire y la otra de salida, y así se barre cualquier fuga hacia la calle. Si solo puede salir por una boca, la otra se sella pegada al tubo. Y hay una regla que se pregunta mucho y que la norma reforzó: siempre se sella el extremo de la vaina que da a un local sin ventilación, para que la fuga no se cuele justo en ese local cerrado. En resumen: la vaina de ventilación coge la fuga y la echa fuera, nunca la mete dentro.</a:t>
             </a:r>
           </a:p>
         </p:txBody>
@@ -1046,12 +1047,12 @@
           <a:lstStyle/>
           <a:p>
             <a:r>
-              <a:t>N1: ¿Y cuando el tubo va enterrado o empotrado?</a:t>
-            </a:r>
-          </a:p>
-          <a:p>
-            <a:r>
-              <a:t>N2: Vamos con las dos. Enterrada es la que va por el subsuelo, siempre por fuera del edificio, y se hace siguiendo otra norma específica de tuberías enterradas, con su protección contra la corrosión. La empotrada es la excepción tasada: solo se permite para rodear un obstáculo o para conectar con un cajetín o armario, y como máximo cuarenta centímetros, salvo cuando va hacia un conjunto de regulación o contadores, que puede llegar a dos metros y medio. Dentro del tramo empotrado no puede haber ninguna unión mecánica, o sea nada de roscas escondidas que un día tengas que apretar y no puedas. Si el tubo es de acero o cobre, se protege como si fuera enterrado: se limpia, se le da una imprimación y se envuelve con doble capa de cinta anticorrosión con un cincuenta por ciento de solape. Y antes de tapar, siempre prueba de estanquidad: lo que se tapa, se comprueba antes. Regla: empotrar, lo justo y bien protegido.</a:t>
+              <a:t>N1: ¿Vaina y conducto son lo mismo?</a:t>
+            </a:r>
+          </a:p>
+          <a:p>
+            <a:r>
+              <a:t>N2: Se parecen, porque los dos protegen o ventilan el tubo, pero hay una diferencia práctica. La vaina va ceñida al tubo, abrazándolo, y no lleva registros, es decir, no tiene tapas para meter la mano. El conducto es más holgado, va más suelto alrededor del tubo, y sí puede llevar registros para poder mantener la tubería sin destaparla del todo; eso sí, esos registros tienen que ser estancos y accesibles. Y un detalle importante que cae en examen: un conducto de ventilación del gas no cuenta como ventilación del local, ni sirve para pasar por él ningún otro servicio ajeno al gas. Es solo para el gas. Regla mental: vaina, ajustada y cerrada; conducto, holgado y con registros, pero exclusivo del gas.</a:t>
             </a:r>
           </a:p>
         </p:txBody>
@@ -1121,12 +1122,12 @@
           <a:lstStyle/>
           <a:p>
             <a:r>
-              <a:t>N1: ¿Cambia algo si el gas va a más presión?</a:t>
-            </a:r>
-          </a:p>
-          <a:p>
-            <a:r>
-              <a:t>N2: Cambia, y con lógica. Cuando la presión es alta, entre dos y cinco bar, una fuga es más peligrosa porque sale más gas y con más fuerza. Así que la norma quiere ese tubo fuera del edificio siempre que se pueda: por la fachada, por un patio de ventilación o por zonas al aire libre. Solo se mete dentro cuando es inevitable, por ejemplo si el conjunto de regulación tiene que ir por dentro, o si pasa por una centralización de contadores o una sala de máquinas. Y en esos casos, por regla general, va envainado. Hay una excepción puntual: dentro de esa misma sala de máquinas o centralización que alimenta ese regulador, o dentro del local no doméstico donde están los aparatos, no hace falta vaina. La idea a recordar: cuanta más presión, más lejos de dentro de la casa.</a:t>
+              <a:t>N1: ¿Y cuando el tubo va enterrado o empotrado?</a:t>
+            </a:r>
+          </a:p>
+          <a:p>
+            <a:r>
+              <a:t>N2: Vamos con las dos. Enterrada es la que va por el subsuelo, siempre por fuera del edificio, y se hace siguiendo otra norma específica de tuberías enterradas, con su protección contra la corrosión. La empotrada es la excepción tasada: solo se permite para rodear un obstáculo o para conectar con un cajetín o armario, y como máximo cuarenta centímetros, salvo cuando va hacia un conjunto de regulación o contadores, que puede llegar a dos metros y medio. Dentro del tramo empotrado no puede haber ninguna unión mecánica, o sea nada de roscas escondidas que un día tengas que apretar y no puedas. Si el tubo es de acero o cobre, se protege como si fuera enterrado: se limpia, se le da una imprimación y se envuelve con doble capa de cinta anticorrosión con un cincuenta por ciento de solape. Y antes de tapar, siempre prueba de estanquidad: lo que se tapa, se comprueba antes. Regla: empotrar, lo justo y bien protegido.</a:t>
             </a:r>
           </a:p>
         </p:txBody>
@@ -1196,12 +1197,12 @@
           <a:lstStyle/>
           <a:p>
             <a:r>
-              <a:t>N1: ¿Por qué hay que sellar las tuberías del armario de contadores?</a:t>
-            </a:r>
-          </a:p>
-          <a:p>
-            <a:r>
-              <a:t>N2: Por una razón muy concreta: un armario de contadores o de regulación puede tener una fuga pequeña, y si el tubo que sale de ahí va empotrado o envainado hacia dentro del edificio, esa fuga podría viajar por el hueco del tubo y colarse en una vivienda. Para taponar ese camino, se sellan las tuberías de entrada y de salida. La regla práctica es fácil: si el tubo entra en la obra o en una vaina, sella los dos puntos, la vaina contra el recinto y el tubo contra la vaina, para que no quede ningún resquicio por donde el gas se escape hacia dentro. En armarios semiempotrados basta con sellar la parte empotrada; en los adosados donde el tubo entra directo al edificio, también se sella. ¿Con qué? Con juntas de goma específicas o con pastas sellantes, como silicona, que aguanten estancas con el tiempo. Sellar es cerrarle el pasaporte a la fuga.</a:t>
+              <a:t>N1: ¿Cambia algo si el gas va a más presión?</a:t>
+            </a:r>
+          </a:p>
+          <a:p>
+            <a:r>
+              <a:t>N2: Cambia, y con lógica. Cuando la presión es alta, entre dos y cinco bar, una fuga es más peligrosa porque sale más gas y con más fuerza. Así que la norma quiere ese tubo fuera del edificio siempre que se pueda: por la fachada, por un patio de ventilación o por zonas al aire libre. Solo se mete dentro cuando es inevitable, por ejemplo si el conjunto de regulación tiene que ir por dentro, o si pasa por una centralización de contadores o una sala de máquinas. Y en esos casos, por regla general, va envainado. Hay una excepción puntual: dentro de esa misma sala de máquinas o centralización que alimenta ese regulador, o dentro del local no doméstico donde están los aparatos, no hace falta vaina. La idea a recordar: cuanta más presión, más lejos de dentro de la casa.</a:t>
             </a:r>
           </a:p>
         </p:txBody>
@@ -1271,12 +1272,12 @@
           <a:lstStyle/>
           <a:p>
             <a:r>
-              <a:t>N1: Todo este trazado, ¿queda registrado en algún sitio?</a:t>
-            </a:r>
-          </a:p>
-          <a:p>
-            <a:r>
-              <a:t>N2: Sí, y esto es importante para no tener sustos con el inspector. El recorrido del tubo se documenta con su croquis o esquema en el certificado de instalación, el modelo I erre ge, que firma la empresa instaladora habilitada y se entrega a la distribuidora. Y hay una regla que enlaza con lo que hemos visto: todo lo que se tapa, o sea lo empotrado y lo envainado, se prueba de estanquidad antes de cerrarlo, y esa prueba respalda el certificado. ¿Por qué tanto papel? Porque para el inspector, lo que no está probado y documentado no existe. Si dentro de esa pared hay un tramo que nadie comprobó ni dibujó, es como si no lo hubieras hecho bien. Así que dibuja el trazado, prueba antes de tapar y firma solo lo que de verdad está montado y comprobado.</a:t>
+              <a:t>N1: ¿Por qué hay que sellar las tuberías del armario de contadores?</a:t>
+            </a:r>
+          </a:p>
+          <a:p>
+            <a:r>
+              <a:t>N2: Por una razón muy concreta: un armario de contadores o de regulación puede tener una fuga pequeña, y si el tubo que sale de ahí va empotrado o envainado hacia dentro del edificio, esa fuga podría viajar por el hueco del tubo y colarse en una vivienda. Para taponar ese camino, se sellan las tuberías de entrada y de salida. La regla práctica es fácil: si el tubo entra en la obra o en una vaina, sella los dos puntos, la vaina contra el recinto y el tubo contra la vaina, para que no quede ningún resquicio por donde el gas se escape hacia dentro. En armarios semiempotrados basta con sellar la parte empotrada; en los adosados donde el tubo entra directo al edificio, también se sella. ¿Con qué? Con juntas de goma específicas o con pastas sellantes, como silicona, que aguanten estancas con el tiempo. Sellar es cerrarle el pasaporte a la fuga.</a:t>
             </a:r>
           </a:p>
         </p:txBody>
@@ -1421,6 +1422,81 @@
           <a:lstStyle/>
           <a:p>
             <a:r>
+              <a:t>N1: Todo este trazado, ¿queda registrado en algún sitio?</a:t>
+            </a:r>
+          </a:p>
+          <a:p>
+            <a:r>
+              <a:t>N2: Sí, y esto es importante para no tener sustos con el inspector. El recorrido del tubo se documenta con su croquis o esquema en el certificado de instalación, el modelo I erre ge, que firma la empresa instaladora habilitada y se entrega a la distribuidora. Y hay una regla que enlaza con lo que hemos visto: todo lo que se tapa, o sea lo empotrado y lo envainado, se prueba de estanquidad antes de cerrarlo, y esa prueba respalda el certificado. ¿Por qué tanto papel? Porque para el inspector, lo que no está probado y documentado no existe. Si dentro de esa pared hay un tramo que nadie comprobó ni dibujó, es como si no lo hubieras hecho bien. Así que dibuja el trazado, prueba antes de tapar y firma solo lo que de verdad está montado y comprobado.</a:t>
+            </a:r>
+          </a:p>
+        </p:txBody>
+      </p:sp>
+      <p:sp>
+        <p:nvSpPr>
+          <p:cNvPr id="4" name="Slide Number Placeholder 3"/>
+          <p:cNvSpPr>
+            <a:spLocks noGrp="1"/>
+          </p:cNvSpPr>
+          <p:nvPr>
+            <p:ph type="sldNum" idx="5" sz="quarter"/>
+          </p:nvPr>
+        </p:nvSpPr>
+        <p:spPr/>
+      </p:sp>
+    </p:spTree>
+  </p:cSld>
+  <p:clrMapOvr>
+    <a:masterClrMapping/>
+  </p:clrMapOvr>
+</p:notes>
+</file>
+
+<file path=ppt/notesSlides/notesSlide21.xml><?xml version="1.0" encoding="utf-8"?>
+<p:notes xmlns:a="http://schemas.openxmlformats.org/drawingml/2006/main" xmlns:p="http://schemas.openxmlformats.org/presentationml/2006/main" xmlns:r="http://schemas.openxmlformats.org/officeDocument/2006/relationships">
+  <p:cSld>
+    <p:spTree>
+      <p:nvGrpSpPr>
+        <p:cNvPr id="1" name=""/>
+        <p:cNvGrpSpPr/>
+        <p:nvPr/>
+      </p:nvGrpSpPr>
+      <p:grpSpPr>
+        <a:xfrm>
+          <a:off x="0" y="0"/>
+          <a:ext cx="0" cy="0"/>
+          <a:chOff x="0" y="0"/>
+          <a:chExt cx="0" cy="0"/>
+        </a:xfrm>
+      </p:grpSpPr>
+      <p:sp>
+        <p:nvSpPr>
+          <p:cNvPr id="2" name="Slide Image Placeholder 1"/>
+          <p:cNvSpPr>
+            <a:spLocks noGrp="1"/>
+          </p:cNvSpPr>
+          <p:nvPr>
+            <p:ph type="sldImg" idx="2"/>
+          </p:nvPr>
+        </p:nvSpPr>
+        <p:spPr/>
+      </p:sp>
+      <p:sp>
+        <p:nvSpPr>
+          <p:cNvPr id="3" name="Notes Placeholder 2"/>
+          <p:cNvSpPr>
+            <a:spLocks noGrp="1"/>
+          </p:cNvSpPr>
+          <p:nvPr>
+            <p:ph type="body" idx="3" sz="quarter"/>
+          </p:nvPr>
+        </p:nvSpPr>
+        <p:spPr/>
+        <p:txBody>
+          <a:bodyPr/>
+          <a:lstStyle/>
+          <a:p>
+            <a:r>
               <a:t>N1: Menudo bloque. ¿Cómo lo ato todo?</a:t>
             </a:r>
           </a:p>
@@ -1504,16 +1580,7 @@
         <p:txBody>
           <a:bodyPr/>
           <a:lstStyle/>
-          <a:p>
-            <a:r>
-              <a:t>N1: ¿De cuántas maneras puede ir un tubo de gas?</a:t>
-            </a:r>
-          </a:p>
-          <a:p>
-            <a:r>
-              <a:t>N2: De cuatro, y todas responden a una misma idea de fondo: poder reparar el tubo sin tener que picar la pared. Vamos una a una. Vista es la que se ve en todo su recorrido, la ideal, porque la tienes delante para revisarla; también cuenta como vista la que va tapada por registros que se pueden abrir y están ventilados. Envainada es la que va dentro de otro tubo protector, la vaina o conducto. Enterrada es la que va directamente en el subsuelo, siempre por fuera del edificio. Y empotrada es la que va metida directamente en la pared, a pelo, sin vaina. Ojo a la diferencia fina, que se pregunta muchísimo: envainada lleva un tubo protector alrededor; empotrada va directa en la obra sin nada. No son lo mismo. Lo ideal siempre es vista o envainada, porque son accesibles; empotrada es la excepción y está muy limitada.</a:t>
-            </a:r>
-          </a:p>
+          <a:p/>
         </p:txBody>
       </p:sp>
       <p:sp>
@@ -1581,12 +1648,12 @@
           <a:lstStyle/>
           <a:p>
             <a:r>
-              <a:t>N1: Entonces, ¿cuál es la norma general de por dónde llevar el tubo?</a:t>
-            </a:r>
-          </a:p>
-          <a:p>
-            <a:r>
-              <a:t>N2: La norma quiere que el tubo se pueda reparar o sustituir en cualquier momento sin destrozar la casa. Por eso, como criterio general, las tuberías van vistas o envainadas, que son las accesibles; solo van enterradas los tramos que tengan que ir por fuera. La empotrada se deja para casos muy contados que veremos luego. Además, hay una regla de por dónde discurre cada instalación: la instalación común, la que sirve a todo el edificio, va por zonas comunitarias, como la fachada, el patio o la caja de escalera; la individual, la de cada vivienda, va por zonas comunes o por dentro de la propia vivienda a la que sirve. Y un detalle práctico: cada vez que un tubo atraviesa un muro o una pared, se protege con un pasamuros, que es como un manguito que evita que el tubo roce con la obra. Si en algún tramo no puedes cumplir estas condiciones, la solución es envainarlo.</a:t>
+              <a:t>N1: ¿De cuántas maneras puede ir un tubo de gas?</a:t>
+            </a:r>
+          </a:p>
+          <a:p>
+            <a:r>
+              <a:t>N2: De cuatro, y todas responden a una misma idea de fondo: poder reparar el tubo sin tener que picar la pared. Vamos una a una. Vista es la que se ve en todo su recorrido, la ideal, porque la tienes delante para revisarla; también cuenta como vista la que va tapada por registros que se pueden abrir y están ventilados. Envainada es la que va dentro de otro tubo protector, la vaina o conducto. Enterrada es la que va directamente en el subsuelo, siempre por fuera del edificio. Y empotrada es la que va metida directamente en la pared, a pelo, sin vaina. Ojo a la diferencia fina, que se pregunta muchísimo: envainada lleva un tubo protector alrededor; empotrada va directa en la obra sin nada. No son lo mismo. Lo ideal siempre es vista o envainada, porque son accesibles; empotrada es la excepción y está muy limitada.</a:t>
             </a:r>
           </a:p>
         </p:txBody>
@@ -1656,12 +1723,12 @@
           <a:lstStyle/>
           <a:p>
             <a:r>
-              <a:t>N1: ¿Hay sitios por donde el gas no puede pasar nunca?</a:t>
-            </a:r>
-          </a:p>
-          <a:p>
-            <a:r>
-              <a:t>N2: Sí, y esta lista es pregunta segura, así que apréndetela con un truco muy simple: por donde suba fuego, humo, basura o electricidad gorda, el gas no pasa. En concreto: nada de huecos de ascensores o montacargas, porque el mecanismo podría aplastar o cortar el tubo; nada de locales con transformadores eléctricos de potencia, porque una chispa junto al gas es una explosión; nada de chimeneas ni conductos de humos; nada de bajantes de basura; y nada de conductos o rejillas de ventilación, salvo un caso muy concreto. Y añade una más: el tubo no puede ir metido dentro de los forjados, o sea dentro del suelo o el techo que separa las viviendas. La lógica es siempre la misma: alejar el gas de todo lo que pueda encenderlo, dañarlo o dificultar cerrarlo en una emergencia. Saltarse esta lista es firmar la instalación que un día explica un incendio.</a:t>
+              <a:t>N1: Entonces, ¿cuál es la norma general de por dónde llevar el tubo?</a:t>
+            </a:r>
+          </a:p>
+          <a:p>
+            <a:r>
+              <a:t>N2: La norma quiere que el tubo se pueda reparar o sustituir en cualquier momento sin destrozar la casa. Por eso, como criterio general, las tuberías van vistas o envainadas, que son las accesibles; solo van enterradas los tramos que tengan que ir por fuera. La empotrada se deja para casos muy contados que veremos luego. Además, hay una regla de por dónde discurre cada instalación: la instalación común, la que sirve a todo el edificio, va por zonas comunitarias, como la fachada, el patio o la caja de escalera; la individual, la de cada vivienda, va por zonas comunes o por dentro de la propia vivienda a la que sirve. Y un detalle práctico: cada vez que un tubo atraviesa un muro o una pared, se protege con un pasamuros, que es como un manguito que evita que el tubo roce con la obra. Si en algún tramo no puedes cumplir estas condiciones, la solución es envainarlo.</a:t>
             </a:r>
           </a:p>
         </p:txBody>
@@ -1731,12 +1798,12 @@
           <a:lstStyle/>
           <a:p>
             <a:r>
-              <a:t>N1: ¿Y lo de los combustibles líquidos? ¿No decías que estaba prohibido?</a:t>
-            </a:r>
-          </a:p>
-          <a:p>
-            <a:r>
-              <a:t>N2: Prohibido en general, sí, pero con una excepción que conviene entender. Los combustibles líquidos se clasifican por lo fácil que es encenderlos. Los de clase C son los que se inflaman a cincuenta y cinco grados o más, es decir, cuesta mucho prenderlos: el gasoil de calefacción entra en este grupo. Como son menos peligrosos que la gasolina, la norma permite que el gas pase por un cuarto con un depósito de gasoil, pero con dos condiciones: que el depósito sea pequeño, de hasta mil litros, y que se cumplan las distancias y la ventilación que exige la reglamentación de instalaciones petrolíferas. Con clase A o B, más volátiles, o con depósitos de más de mil litros, prohibido total. Resumen: gasoil pequeño y bien ventilado, se puede; gasolina o depósitos grandes, ni hablar.</a:t>
+              <a:t>N1: ¿Hay sitios por donde el gas no puede pasar nunca?</a:t>
+            </a:r>
+          </a:p>
+          <a:p>
+            <a:r>
+              <a:t>N2: Sí, y esta lista es pregunta segura, así que apréndetela con un truco muy simple: por donde suba fuego, humo, basura o electricidad gorda, el gas no pasa. En concreto: nada de huecos de ascensores o montacargas, porque el mecanismo podría aplastar o cortar el tubo; nada de locales con transformadores eléctricos de potencia, porque una chispa junto al gas es una explosión; nada de chimeneas ni conductos de humos; nada de bajantes de basura; y nada de conductos o rejillas de ventilación, salvo un caso muy concreto. Y añade una más: el tubo no puede ir metido dentro de los forjados, o sea dentro del suelo o el techo que separa las viviendas. La lógica es siempre la misma: alejar el gas de todo lo que pueda encenderlo, dañarlo o dificultar cerrarlo en una emergencia. Saltarse esta lista es firmar la instalación que un día explica un incendio.</a:t>
             </a:r>
           </a:p>
         </p:txBody>
@@ -1806,12 +1873,12 @@
           <a:lstStyle/>
           <a:p>
             <a:r>
-              <a:t>N1: Cuando el tubo va visto, ¿cómo se sujeta?</a:t>
-            </a:r>
-          </a:p>
-          <a:p>
-            <a:r>
-              <a:t>N2: Con abrazaderas o soportes firmes anclados a la construcción, pero con tres condiciones importantes. Uno, tienen que ser desmontables, para poder quitar el tubo el día que haga falta. Dos, tienen que quedar aislados del tubo, sin metal contra metal, para que no aparezca corrosión. Y tres, tienen que permitir que el tubo dilate, porque con el calor el metal se alarga y si lo aprietas a muerte, se tensa y sufre. ¿Cada cuánto pones un soporte? Depende del grosor: cuanto más grueso el tubo, más peso aguanta y más distancia puedes dejar entre sujeciones; y en los tramos verticales puedes separar un poco más que en los horizontales. Los que van por fuera, además, protegidos contra la corrosión y contra el sol. La idea: que el tubo quede firme, alineado y sin apoyarse ni rozar con nada.</a:t>
+              <a:t>N1: ¿Y lo de los combustibles líquidos? ¿No decías que estaba prohibido?</a:t>
+            </a:r>
+          </a:p>
+          <a:p>
+            <a:r>
+              <a:t>N2: Prohibido en general, sí, pero con una excepción que conviene entender. Los combustibles líquidos se clasifican por lo fácil que es encenderlos. Los de clase C son los que se inflaman a cincuenta y cinco grados o más, es decir, cuesta mucho prenderlos: el gasoil de calefacción entra en este grupo. Como son menos peligrosos que la gasolina, la norma permite que el gas pase por un cuarto con un depósito de gasoil, pero con dos condiciones: que el depósito sea pequeño, de hasta mil litros, y que se cumplan las distancias y la ventilación que exige la reglamentación de instalaciones petrolíferas. Con clase A o B, más volátiles, o con depósitos de más de mil litros, prohibido total. Resumen: gasoil pequeño y bien ventilado, se puede; gasolina o depósitos grandes, ni hablar.</a:t>
             </a:r>
           </a:p>
         </p:txBody>
@@ -1881,12 +1948,12 @@
           <a:lstStyle/>
           <a:p>
             <a:r>
-              <a:t>N1: ¿Qué distancia tiene que guardar con la luz o el agua?</a:t>
-            </a:r>
-          </a:p>
-          <a:p>
-            <a:r>
-              <a:t>N2: Dos treses muy fáciles de recordar: tres centímetros a cualquier otro servicio, sea la luz, el agua, el vapor o una chimenea, tanto si va en paralelo como si lo cruza; y tres centímetros al suelo. Y se mide de superficie a superficie, no de centro a centro del tubo. Pero lo más importante es la regla de oro que hay detrás: el tubo de gas nunca toca nada, ni otra tubería ni la estructura metálica del edificio. ¿Por qué? Porque cuando dos metales distintos se tocan, se crea una pequeña pila eléctrica, lo que se llama par galvánico, y eso corroe el tubo poco a poco hasta que aparece una picadura que un día será una fuga. Así que separa, no apoyes y no dejes que roce. Si por lo que sea no llegas a esos tres centímetros, hay una salida que vemos ahora mismo.</a:t>
+              <a:t>N1: Cuando el tubo va visto, ¿cómo se sujeta?</a:t>
+            </a:r>
+          </a:p>
+          <a:p>
+            <a:r>
+              <a:t>N2: Con abrazaderas o soportes firmes anclados a la construcción, pero con tres condiciones importantes. Uno, tienen que ser desmontables, para poder quitar el tubo el día que haga falta. Dos, tienen que quedar aislados del tubo, sin metal contra metal, para que no aparezca corrosión. Y tres, tienen que permitir que el tubo dilate, porque con el calor el metal se alarga y si lo aprietas a muerte, se tensa y sufre. ¿Cada cuánto pones un soporte? Depende del grosor: cuanto más grueso el tubo, más peso aguanta y más distancia puedes dejar entre sujeciones; y en los tramos verticales puedes separar un poco más que en los horizontales. Los que van por fuera, además, protegidos contra la corrosión y contra el sol. La idea: que el tubo quede firme, alineado y sin apoyarse ni rozar con nada.</a:t>
             </a:r>
           </a:p>
         </p:txBody>
@@ -1956,12 +2023,12 @@
           <a:lstStyle/>
           <a:p>
             <a:r>
-              <a:t>N1: ¿Y si no puedo dejar los tres centímetros?</a:t>
-            </a:r>
-          </a:p>
-          <a:p>
-            <a:r>
-              <a:t>N2: Entonces puedes acercar el tubo, pero solo si lo aíslas en ese tramo. El aislamiento sirve para que, aunque estén cerca, el gas y la luz o el agua no se afecten. ¿Con qué se aísla? Con una coquilla aislante, una caña de PVC, o una cinta autovulcanizante o termoretráctil, colocada como diga el fabricante. Pero ojo, esa protección no vale cualquiera: tiene que aguantar un aislamiento eléctrico de al menos cuatrocientos voltios y resistir temperaturas de menos quince a más ochenta grados. Y si el tramo va por el exterior, además tiene que estar protegida contra el sol. O sea, la coquilla no es decorativa, tiene sus números que cumplir. Ejemplo típico: el tubo de gas tiene que cruzarse con un cable eléctrico y no hay hueco para los tres centímetros; le pones la coquilla que cumple esos cuatrocientos voltios y ya puedes acercarlo.</a:t>
+              <a:t>N1: ¿Qué distancia tiene que guardar con la luz o el agua?</a:t>
+            </a:r>
+          </a:p>
+          <a:p>
+            <a:r>
+              <a:t>N2: Dos treses muy fáciles de recordar: tres centímetros a cualquier otro servicio, sea la luz, el agua, el vapor o una chimenea, tanto si va en paralelo como si lo cruza; y tres centímetros al suelo. Y se mide de superficie a superficie, no de centro a centro del tubo. Pero lo más importante es la regla de oro que hay detrás: el tubo de gas nunca toca nada, ni otra tubería ni la estructura metálica del edificio. ¿Por qué? Porque cuando dos metales distintos se tocan, se crea una pequeña pila eléctrica, lo que se llama par galvánico, y eso corroe el tubo poco a poco hasta que aparece una picadura que un día será una fuga. Así que separa, no apoyes y no dejes que roce. Si por lo que sea no llegas a esos tres centímetros, hay una salida que vemos ahora mismo.</a:t>
             </a:r>
           </a:p>
         </p:txBody>
@@ -5036,7 +5103,7 @@
             <a:r>
               <a:rPr sz="1400" b="1" i="0">
                 <a:solidFill>
-                  <a:srgbClr val="CADCFC"/>
+                  <a:srgbClr val="F4A24C"/>
                 </a:solidFill>
                 <a:latin typeface="Montserrat"/>
               </a:rPr>
@@ -5047,13 +5114,57 @@
       </p:sp>
       <p:sp>
         <p:nvSpPr>
-          <p:cNvPr id="4" name="TextBox 3"/>
+          <p:cNvPr id="4" name="Rounded Rectangle 3"/>
+          <p:cNvSpPr/>
+          <p:nvPr/>
+        </p:nvSpPr>
+        <p:spPr>
+          <a:xfrm>
+            <a:off x="868680" y="2057400"/>
+            <a:ext cx="1463040" cy="82296"/>
+          </a:xfrm>
+          <a:prstGeom prst="roundRect">
+            <a:avLst/>
+          </a:prstGeom>
+          <a:solidFill>
+            <a:srgbClr val="E8801A"/>
+          </a:solidFill>
+          <a:ln>
+            <a:noFill/>
+          </a:ln>
+          <a:effectLst/>
+        </p:spPr>
+        <p:style>
+          <a:lnRef idx="1">
+            <a:schemeClr val="accent1"/>
+          </a:lnRef>
+          <a:fillRef idx="3">
+            <a:schemeClr val="accent1"/>
+          </a:fillRef>
+          <a:effectRef idx="2">
+            <a:schemeClr val="accent1"/>
+          </a:effectRef>
+          <a:fontRef idx="minor">
+            <a:schemeClr val="lt1"/>
+          </a:fontRef>
+        </p:style>
+        <p:txBody>
+          <a:bodyPr rtlCol="0" anchor="ctr"/>
+          <a:lstStyle/>
+          <a:p>
+            <a:pPr algn="ctr"/>
+          </a:p>
+        </p:txBody>
+      </p:sp>
+      <p:sp>
+        <p:nvSpPr>
+          <p:cNvPr id="5" name="TextBox 4"/>
           <p:cNvSpPr txBox="1"/>
           <p:nvPr/>
         </p:nvSpPr>
         <p:spPr>
           <a:xfrm>
-            <a:off x="822960" y="2194560"/>
+            <a:off x="822960" y="2286000"/>
             <a:ext cx="10515600" cy="2011680"/>
           </a:xfrm>
           <a:prstGeom prst="rect">
@@ -5092,7 +5203,7 @@
       </p:sp>
       <p:sp>
         <p:nvSpPr>
-          <p:cNvPr id="5" name="TextBox 4"/>
+          <p:cNvPr id="6" name="TextBox 5"/>
           <p:cNvSpPr txBox="1"/>
           <p:nvPr/>
         </p:nvSpPr>
@@ -5216,7 +5327,7 @@
                 </a:solidFill>
                 <a:latin typeface="Montserrat"/>
               </a:rPr>
-              <a:t>010 / 020</a:t>
+              <a:t>010 / 021</a:t>
             </a:r>
           </a:p>
         </p:txBody>
@@ -5264,7 +5375,7 @@
         <p:spPr>
           <a:xfrm>
             <a:off x="822960" y="457200"/>
-            <a:ext cx="8229600" cy="365760"/>
+            <a:ext cx="10058400" cy="365760"/>
           </a:xfrm>
           <a:prstGeom prst="rect">
             <a:avLst/>
@@ -5278,13 +5389,13 @@
           <a:lstStyle/>
           <a:p>
             <a:r>
-              <a:rPr sz="1200" b="1" i="0">
-                <a:solidFill>
-                  <a:srgbClr val="64748B"/>
-                </a:solidFill>
-                <a:latin typeface="Montserrat"/>
-              </a:rPr>
-              <a:t>APARTADO 4.3 · SEÑALIZACIÓN</a:t>
+              <a:rPr sz="1300" b="1" i="0">
+                <a:solidFill>
+                  <a:srgbClr val="E8801A"/>
+                </a:solidFill>
+                <a:latin typeface="Montserrat"/>
+              </a:rPr>
+              <a:t>APARTADO 4.3 · EXCEPCIÓN DE LOS 3 CM</a:t>
             </a:r>
           </a:p>
         </p:txBody>
@@ -5312,26 +5423,70 @@
           <a:lstStyle/>
           <a:p>
             <a:r>
-              <a:rPr sz="2700" b="1" i="0">
+              <a:rPr sz="2800" b="1" i="0">
                 <a:solidFill>
                   <a:srgbClr val="1E2761"/>
                 </a:solidFill>
                 <a:latin typeface="Montserrat"/>
               </a:rPr>
-              <a:t>Señaliza y olvídate del PE visto</a:t>
-            </a:r>
-          </a:p>
-        </p:txBody>
-      </p:sp>
-      <p:sp>
-        <p:nvSpPr>
-          <p:cNvPr id="7" name="TextBox 6"/>
+              <a:t>Si no llegas, aísla el tubo</a:t>
+            </a:r>
+          </a:p>
+        </p:txBody>
+      </p:sp>
+      <p:sp>
+        <p:nvSpPr>
+          <p:cNvPr id="7" name="Rounded Rectangle 6"/>
+          <p:cNvSpPr/>
+          <p:nvPr/>
+        </p:nvSpPr>
+        <p:spPr>
+          <a:xfrm>
+            <a:off x="868680" y="1627632"/>
+            <a:ext cx="2011680" cy="73152"/>
+          </a:xfrm>
+          <a:prstGeom prst="roundRect">
+            <a:avLst/>
+          </a:prstGeom>
+          <a:solidFill>
+            <a:srgbClr val="E8801A"/>
+          </a:solidFill>
+          <a:ln>
+            <a:noFill/>
+          </a:ln>
+          <a:effectLst/>
+        </p:spPr>
+        <p:style>
+          <a:lnRef idx="1">
+            <a:schemeClr val="accent1"/>
+          </a:lnRef>
+          <a:fillRef idx="3">
+            <a:schemeClr val="accent1"/>
+          </a:fillRef>
+          <a:effectRef idx="2">
+            <a:schemeClr val="accent1"/>
+          </a:effectRef>
+          <a:fontRef idx="minor">
+            <a:schemeClr val="lt1"/>
+          </a:fontRef>
+        </p:style>
+        <p:txBody>
+          <a:bodyPr rtlCol="0" anchor="ctr"/>
+          <a:lstStyle/>
+          <a:p>
+            <a:pPr algn="ctr"/>
+          </a:p>
+        </p:txBody>
+      </p:sp>
+      <p:sp>
+        <p:nvSpPr>
+          <p:cNvPr id="8" name="TextBox 7"/>
           <p:cNvSpPr txBox="1"/>
           <p:nvPr/>
         </p:nvSpPr>
         <p:spPr>
           <a:xfrm>
-            <a:off x="822960" y="1920240"/>
+            <a:off x="822960" y="1965960"/>
             <a:ext cx="4983480" cy="4206240"/>
           </a:xfrm>
           <a:prstGeom prst="rect">
@@ -5347,17 +5502,17 @@
           <a:p>
             <a:pPr>
               <a:spcAft>
-                <a:spcPts val="1000"/>
+                <a:spcPts val="1100"/>
               </a:spcAft>
             </a:pPr>
             <a:r>
               <a:rPr sz="1600" b="1" i="0">
                 <a:solidFill>
-                  <a:srgbClr val="2E3A80"/>
-                </a:solidFill>
-                <a:latin typeface="Montserrat"/>
-              </a:rPr>
-              <a:t>•  </a:t>
+                  <a:srgbClr val="E8801A"/>
+                </a:solidFill>
+                <a:latin typeface="Montserrat"/>
+              </a:rPr>
+              <a:t>▸  </a:t>
             </a:r>
             <a:r>
               <a:rPr sz="1600" b="0" i="0">
@@ -5366,23 +5521,23 @@
                 </a:solidFill>
                 <a:latin typeface="Montserrat"/>
               </a:rPr>
-              <a:t>Señal 'gas' o franja amarilla</a:t>
+              <a:t>Coquilla, caña de PVC o cinta</a:t>
             </a:r>
           </a:p>
           <a:p>
             <a:pPr>
               <a:spcAft>
-                <a:spcPts val="1000"/>
+                <a:spcPts val="1100"/>
               </a:spcAft>
             </a:pPr>
             <a:r>
               <a:rPr sz="1600" b="1" i="0">
                 <a:solidFill>
-                  <a:srgbClr val="2E3A80"/>
-                </a:solidFill>
-                <a:latin typeface="Montserrat"/>
-              </a:rPr>
-              <a:t>•  </a:t>
+                  <a:srgbClr val="E8801A"/>
+                </a:solidFill>
+                <a:latin typeface="Montserrat"/>
+              </a:rPr>
+              <a:t>▸  </a:t>
             </a:r>
             <a:r>
               <a:rPr sz="1600" b="0" i="0">
@@ -5391,23 +5546,23 @@
                 </a:solidFill>
                 <a:latin typeface="Montserrat"/>
               </a:rPr>
-              <a:t>Al menos una vez en zona común</a:t>
+              <a:t>Aislamiento mínimo de 400 voltios</a:t>
             </a:r>
           </a:p>
           <a:p>
             <a:pPr>
               <a:spcAft>
-                <a:spcPts val="1000"/>
+                <a:spcPts val="1100"/>
               </a:spcAft>
             </a:pPr>
             <a:r>
               <a:rPr sz="1600" b="1" i="0">
                 <a:solidFill>
-                  <a:srgbClr val="2E3A80"/>
-                </a:solidFill>
-                <a:latin typeface="Montserrat"/>
-              </a:rPr>
-              <a:t>•  </a:t>
+                  <a:srgbClr val="E8801A"/>
+                </a:solidFill>
+                <a:latin typeface="Montserrat"/>
+              </a:rPr>
+              <a:t>▸  </a:t>
             </a:r>
             <a:r>
               <a:rPr sz="1600" b="0" i="0">
@@ -5416,14 +5571,14 @@
                 </a:solidFill>
                 <a:latin typeface="Montserrat"/>
               </a:rPr>
-              <a:t>Polietileno visto: jamás</a:t>
-            </a:r>
-          </a:p>
-        </p:txBody>
-      </p:sp>
-      <p:sp>
-        <p:nvSpPr>
-          <p:cNvPr id="8" name="imgph" descr="IMGQ:yellow gas pipe marking label"/>
+              <a:t>Aguantar de −15 a +80 °C</a:t>
+            </a:r>
+          </a:p>
+        </p:txBody>
+      </p:sp>
+      <p:sp>
+        <p:nvSpPr>
+          <p:cNvPr id="9" name="imgph" descr="IMGQ:foam pipe insulation sleeve"/>
           <p:cNvSpPr/>
           <p:nvPr/>
         </p:nvSpPr>
@@ -5469,7 +5624,7 @@
       </p:sp>
       <p:sp>
         <p:nvSpPr>
-          <p:cNvPr id="9" name="TextBox 8"/>
+          <p:cNvPr id="10" name="TextBox 9"/>
           <p:cNvSpPr txBox="1"/>
           <p:nvPr/>
         </p:nvSpPr>
@@ -5509,7 +5664,7 @@
                 </a:solidFill>
                 <a:latin typeface="Montserrat"/>
               </a:rPr>
-              <a:t>yellow gas pipe marking label</a:t>
+              <a:t>foam pipe insulation sleeve</a:t>
             </a:r>
           </a:p>
         </p:txBody>
@@ -5606,7 +5761,7 @@
                 </a:solidFill>
                 <a:latin typeface="Montserrat"/>
               </a:rPr>
-              <a:t>011 / 020</a:t>
+              <a:t>011 / 021</a:t>
             </a:r>
           </a:p>
         </p:txBody>
@@ -5654,7 +5809,7 @@
         <p:spPr>
           <a:xfrm>
             <a:off x="822960" y="457200"/>
-            <a:ext cx="8229600" cy="365760"/>
+            <a:ext cx="10058400" cy="365760"/>
           </a:xfrm>
           <a:prstGeom prst="rect">
             <a:avLst/>
@@ -5668,13 +5823,13 @@
           <a:lstStyle/>
           <a:p>
             <a:r>
-              <a:rPr sz="1200" b="1" i="0">
-                <a:solidFill>
-                  <a:srgbClr val="64748B"/>
-                </a:solidFill>
-                <a:latin typeface="Montserrat"/>
-              </a:rPr>
-              <a:t>APARTADO 4.4 · VAINAS Y CONDUCTOS</a:t>
+              <a:rPr sz="1300" b="1" i="0">
+                <a:solidFill>
+                  <a:srgbClr val="E8801A"/>
+                </a:solidFill>
+                <a:latin typeface="Montserrat"/>
+              </a:rPr>
+              <a:t>APARTADO 4.3 · SEÑALIZACIÓN</a:t>
             </a:r>
           </a:p>
         </p:txBody>
@@ -5702,26 +5857,70 @@
           <a:lstStyle/>
           <a:p>
             <a:r>
-              <a:rPr sz="2700" b="1" i="0">
+              <a:rPr sz="2800" b="1" i="0">
                 <a:solidFill>
                   <a:srgbClr val="1E2761"/>
                 </a:solidFill>
                 <a:latin typeface="Montserrat"/>
               </a:rPr>
-              <a:t>La vaina tiene cuatro 'para qué'</a:t>
-            </a:r>
-          </a:p>
-        </p:txBody>
-      </p:sp>
-      <p:sp>
-        <p:nvSpPr>
-          <p:cNvPr id="7" name="TextBox 6"/>
+              <a:t>Señaliza y olvídate del PE visto</a:t>
+            </a:r>
+          </a:p>
+        </p:txBody>
+      </p:sp>
+      <p:sp>
+        <p:nvSpPr>
+          <p:cNvPr id="7" name="Rounded Rectangle 6"/>
+          <p:cNvSpPr/>
+          <p:nvPr/>
+        </p:nvSpPr>
+        <p:spPr>
+          <a:xfrm>
+            <a:off x="868680" y="1627632"/>
+            <a:ext cx="2011680" cy="73152"/>
+          </a:xfrm>
+          <a:prstGeom prst="roundRect">
+            <a:avLst/>
+          </a:prstGeom>
+          <a:solidFill>
+            <a:srgbClr val="E8801A"/>
+          </a:solidFill>
+          <a:ln>
+            <a:noFill/>
+          </a:ln>
+          <a:effectLst/>
+        </p:spPr>
+        <p:style>
+          <a:lnRef idx="1">
+            <a:schemeClr val="accent1"/>
+          </a:lnRef>
+          <a:fillRef idx="3">
+            <a:schemeClr val="accent1"/>
+          </a:fillRef>
+          <a:effectRef idx="2">
+            <a:schemeClr val="accent1"/>
+          </a:effectRef>
+          <a:fontRef idx="minor">
+            <a:schemeClr val="lt1"/>
+          </a:fontRef>
+        </p:style>
+        <p:txBody>
+          <a:bodyPr rtlCol="0" anchor="ctr"/>
+          <a:lstStyle/>
+          <a:p>
+            <a:pPr algn="ctr"/>
+          </a:p>
+        </p:txBody>
+      </p:sp>
+      <p:sp>
+        <p:nvSpPr>
+          <p:cNvPr id="8" name="TextBox 7"/>
           <p:cNvSpPr txBox="1"/>
           <p:nvPr/>
         </p:nvSpPr>
         <p:spPr>
           <a:xfrm>
-            <a:off x="822960" y="1920240"/>
+            <a:off x="822960" y="1965960"/>
             <a:ext cx="4983480" cy="4206240"/>
           </a:xfrm>
           <a:prstGeom prst="rect">
@@ -5737,17 +5936,17 @@
           <a:p>
             <a:pPr>
               <a:spcAft>
-                <a:spcPts val="1000"/>
+                <a:spcPts val="1100"/>
               </a:spcAft>
             </a:pPr>
             <a:r>
               <a:rPr sz="1600" b="1" i="0">
                 <a:solidFill>
-                  <a:srgbClr val="2E3A80"/>
-                </a:solidFill>
-                <a:latin typeface="Montserrat"/>
-              </a:rPr>
-              <a:t>•  </a:t>
+                  <a:srgbClr val="E8801A"/>
+                </a:solidFill>
+                <a:latin typeface="Montserrat"/>
+              </a:rPr>
+              <a:t>▸  </a:t>
             </a:r>
             <a:r>
               <a:rPr sz="1600" b="0" i="0">
@@ -5756,23 +5955,23 @@
                 </a:solidFill>
                 <a:latin typeface="Montserrat"/>
               </a:rPr>
-              <a:t>1. Protección mecánica (golpes)</a:t>
+              <a:t>Señal 'gas' o franja amarilla</a:t>
             </a:r>
           </a:p>
           <a:p>
             <a:pPr>
               <a:spcAft>
-                <a:spcPts val="1000"/>
+                <a:spcPts val="1100"/>
               </a:spcAft>
             </a:pPr>
             <a:r>
               <a:rPr sz="1600" b="1" i="0">
                 <a:solidFill>
-                  <a:srgbClr val="2E3A80"/>
-                </a:solidFill>
-                <a:latin typeface="Montserrat"/>
-              </a:rPr>
-              <a:t>•  </a:t>
+                  <a:srgbClr val="E8801A"/>
+                </a:solidFill>
+                <a:latin typeface="Montserrat"/>
+              </a:rPr>
+              <a:t>▸  </a:t>
             </a:r>
             <a:r>
               <a:rPr sz="1600" b="0" i="0">
@@ -5781,23 +5980,23 @@
                 </a:solidFill>
                 <a:latin typeface="Montserrat"/>
               </a:rPr>
-              <a:t>2. Ventilación (semisótanos, cámaras)</a:t>
+              <a:t>Al menos una vez en zona común</a:t>
             </a:r>
           </a:p>
           <a:p>
             <a:pPr>
               <a:spcAft>
-                <a:spcPts val="1000"/>
+                <a:spcPts val="1100"/>
               </a:spcAft>
             </a:pPr>
             <a:r>
               <a:rPr sz="1600" b="1" i="0">
                 <a:solidFill>
-                  <a:srgbClr val="2E3A80"/>
-                </a:solidFill>
-                <a:latin typeface="Montserrat"/>
-              </a:rPr>
-              <a:t>•  </a:t>
+                  <a:srgbClr val="E8801A"/>
+                </a:solidFill>
+                <a:latin typeface="Montserrat"/>
+              </a:rPr>
+              <a:t>▸  </a:t>
             </a:r>
             <a:r>
               <a:rPr sz="1600" b="0" i="0">
@@ -5806,39 +6005,14 @@
                 </a:solidFill>
                 <a:latin typeface="Montserrat"/>
               </a:rPr>
-              <a:t>3. Acceso a armarios empotrados</a:t>
-            </a:r>
-          </a:p>
-          <a:p>
-            <a:pPr>
-              <a:spcAft>
-                <a:spcPts val="1000"/>
-              </a:spcAft>
-            </a:pPr>
-            <a:r>
-              <a:rPr sz="1600" b="1" i="0">
-                <a:solidFill>
-                  <a:srgbClr val="2E3A80"/>
-                </a:solidFill>
-                <a:latin typeface="Montserrat"/>
-              </a:rPr>
-              <a:t>•  </a:t>
-            </a:r>
-            <a:r>
-              <a:rPr sz="1600" b="0" i="0">
-                <a:solidFill>
-                  <a:srgbClr val="1B2330"/>
-                </a:solidFill>
-                <a:latin typeface="Montserrat"/>
-              </a:rPr>
-              <a:t>4. Tuberías en suelo o subsuelo</a:t>
-            </a:r>
-          </a:p>
-        </p:txBody>
-      </p:sp>
-      <p:sp>
-        <p:nvSpPr>
-          <p:cNvPr id="8" name="imgph" descr="IMGQ:gas pipe inside protective steel conduit"/>
+              <a:t>Polietileno visto: jamás</a:t>
+            </a:r>
+          </a:p>
+        </p:txBody>
+      </p:sp>
+      <p:sp>
+        <p:nvSpPr>
+          <p:cNvPr id="9" name="imgph" descr="IMGQ:yellow gas pipe marking label"/>
           <p:cNvSpPr/>
           <p:nvPr/>
         </p:nvSpPr>
@@ -5884,7 +6058,7 @@
       </p:sp>
       <p:sp>
         <p:nvSpPr>
-          <p:cNvPr id="9" name="TextBox 8"/>
+          <p:cNvPr id="10" name="TextBox 9"/>
           <p:cNvSpPr txBox="1"/>
           <p:nvPr/>
         </p:nvSpPr>
@@ -5924,7 +6098,7 @@
                 </a:solidFill>
                 <a:latin typeface="Montserrat"/>
               </a:rPr>
-              <a:t>gas pipe inside protective steel conduit</a:t>
+              <a:t>yellow gas pipe marking label</a:t>
             </a:r>
           </a:p>
         </p:txBody>
@@ -6021,7 +6195,7 @@
                 </a:solidFill>
                 <a:latin typeface="Montserrat"/>
               </a:rPr>
-              <a:t>012 / 020</a:t>
+              <a:t>012 / 021</a:t>
             </a:r>
           </a:p>
         </p:txBody>
@@ -6069,7 +6243,7 @@
         <p:spPr>
           <a:xfrm>
             <a:off x="822960" y="457200"/>
-            <a:ext cx="8229600" cy="365760"/>
+            <a:ext cx="10058400" cy="365760"/>
           </a:xfrm>
           <a:prstGeom prst="rect">
             <a:avLst/>
@@ -6083,13 +6257,13 @@
           <a:lstStyle/>
           <a:p>
             <a:r>
-              <a:rPr sz="1200" b="1" i="0">
-                <a:solidFill>
-                  <a:srgbClr val="64748B"/>
-                </a:solidFill>
-                <a:latin typeface="Montserrat"/>
-              </a:rPr>
-              <a:t>APARTADO 4.4.1.2 · VENTILACIÓN</a:t>
+              <a:rPr sz="1300" b="1" i="0">
+                <a:solidFill>
+                  <a:srgbClr val="E8801A"/>
+                </a:solidFill>
+                <a:latin typeface="Montserrat"/>
+              </a:rPr>
+              <a:t>APARTADO 4.4 · VAINAS Y CONDUCTOS</a:t>
             </a:r>
           </a:p>
         </p:txBody>
@@ -6117,26 +6291,70 @@
           <a:lstStyle/>
           <a:p>
             <a:r>
-              <a:rPr sz="2700" b="1" i="0">
+              <a:rPr sz="2800" b="1" i="0">
                 <a:solidFill>
                   <a:srgbClr val="1E2761"/>
                 </a:solidFill>
                 <a:latin typeface="Montserrat"/>
               </a:rPr>
-              <a:t>El semisótano, solo gases ligeros</a:t>
-            </a:r>
-          </a:p>
-        </p:txBody>
-      </p:sp>
-      <p:sp>
-        <p:nvSpPr>
-          <p:cNvPr id="7" name="TextBox 6"/>
+              <a:t>La vaina tiene cuatro 'para qué'</a:t>
+            </a:r>
+          </a:p>
+        </p:txBody>
+      </p:sp>
+      <p:sp>
+        <p:nvSpPr>
+          <p:cNvPr id="7" name="Rounded Rectangle 6"/>
+          <p:cNvSpPr/>
+          <p:nvPr/>
+        </p:nvSpPr>
+        <p:spPr>
+          <a:xfrm>
+            <a:off x="868680" y="1627632"/>
+            <a:ext cx="2011680" cy="73152"/>
+          </a:xfrm>
+          <a:prstGeom prst="roundRect">
+            <a:avLst/>
+          </a:prstGeom>
+          <a:solidFill>
+            <a:srgbClr val="E8801A"/>
+          </a:solidFill>
+          <a:ln>
+            <a:noFill/>
+          </a:ln>
+          <a:effectLst/>
+        </p:spPr>
+        <p:style>
+          <a:lnRef idx="1">
+            <a:schemeClr val="accent1"/>
+          </a:lnRef>
+          <a:fillRef idx="3">
+            <a:schemeClr val="accent1"/>
+          </a:fillRef>
+          <a:effectRef idx="2">
+            <a:schemeClr val="accent1"/>
+          </a:effectRef>
+          <a:fontRef idx="minor">
+            <a:schemeClr val="lt1"/>
+          </a:fontRef>
+        </p:style>
+        <p:txBody>
+          <a:bodyPr rtlCol="0" anchor="ctr"/>
+          <a:lstStyle/>
+          <a:p>
+            <a:pPr algn="ctr"/>
+          </a:p>
+        </p:txBody>
+      </p:sp>
+      <p:sp>
+        <p:nvSpPr>
+          <p:cNvPr id="8" name="TextBox 7"/>
           <p:cNvSpPr txBox="1"/>
           <p:nvPr/>
         </p:nvSpPr>
         <p:spPr>
           <a:xfrm>
-            <a:off x="822960" y="1920240"/>
+            <a:off x="822960" y="1965960"/>
             <a:ext cx="4983480" cy="4206240"/>
           </a:xfrm>
           <a:prstGeom prst="rect">
@@ -6152,17 +6370,17 @@
           <a:p>
             <a:pPr>
               <a:spcAft>
-                <a:spcPts val="1000"/>
+                <a:spcPts val="1100"/>
               </a:spcAft>
             </a:pPr>
             <a:r>
               <a:rPr sz="1600" b="1" i="0">
                 <a:solidFill>
-                  <a:srgbClr val="2E3A80"/>
-                </a:solidFill>
-                <a:latin typeface="Montserrat"/>
-              </a:rPr>
-              <a:t>•  </a:t>
+                  <a:srgbClr val="E8801A"/>
+                </a:solidFill>
+                <a:latin typeface="Montserrat"/>
+              </a:rPr>
+              <a:t>▸  </a:t>
             </a:r>
             <a:r>
               <a:rPr sz="1600" b="0" i="0">
@@ -6171,23 +6389,23 @@
                 </a:solidFill>
                 <a:latin typeface="Montserrat"/>
               </a:rPr>
-              <a:t>Solo gas más ligero que el aire</a:t>
+              <a:t>1. Protección mecánica (golpes)</a:t>
             </a:r>
           </a:p>
           <a:p>
             <a:pPr>
               <a:spcAft>
-                <a:spcPts val="1000"/>
+                <a:spcPts val="1100"/>
               </a:spcAft>
             </a:pPr>
             <a:r>
               <a:rPr sz="1600" b="1" i="0">
                 <a:solidFill>
-                  <a:srgbClr val="2E3A80"/>
-                </a:solidFill>
-                <a:latin typeface="Montserrat"/>
-              </a:rPr>
-              <a:t>•  </a:t>
+                  <a:srgbClr val="E8801A"/>
+                </a:solidFill>
+                <a:latin typeface="Montserrat"/>
+              </a:rPr>
+              <a:t>▸  </a:t>
             </a:r>
             <a:r>
               <a:rPr sz="1600" b="0" i="0">
@@ -6196,23 +6414,23 @@
                 </a:solidFill>
                 <a:latin typeface="Montserrat"/>
               </a:rPr>
-              <a:t>A 50 mbar o menos</a:t>
+              <a:t>2. Ventilación (semisótanos, cámaras)</a:t>
             </a:r>
           </a:p>
           <a:p>
             <a:pPr>
               <a:spcAft>
-                <a:spcPts val="1000"/>
+                <a:spcPts val="1100"/>
               </a:spcAft>
             </a:pPr>
             <a:r>
               <a:rPr sz="1600" b="1" i="0">
                 <a:solidFill>
-                  <a:srgbClr val="2E3A80"/>
-                </a:solidFill>
-                <a:latin typeface="Montserrat"/>
-              </a:rPr>
-              <a:t>•  </a:t>
+                  <a:srgbClr val="E8801A"/>
+                </a:solidFill>
+                <a:latin typeface="Montserrat"/>
+              </a:rPr>
+              <a:t>▸  </a:t>
             </a:r>
             <a:r>
               <a:rPr sz="1600" b="0" i="0">
@@ -6221,14 +6439,39 @@
                 </a:solidFill>
                 <a:latin typeface="Montserrat"/>
               </a:rPr>
-              <a:t>S = 10 · A, mínimo 200 cm²</a:t>
-            </a:r>
-          </a:p>
-        </p:txBody>
-      </p:sp>
-      <p:sp>
-        <p:nvSpPr>
-          <p:cNvPr id="8" name="imgph" descr="IMGQ:basement ventilation grille on wall"/>
+              <a:t>3. Acceso a armarios empotrados</a:t>
+            </a:r>
+          </a:p>
+          <a:p>
+            <a:pPr>
+              <a:spcAft>
+                <a:spcPts val="1100"/>
+              </a:spcAft>
+            </a:pPr>
+            <a:r>
+              <a:rPr sz="1600" b="1" i="0">
+                <a:solidFill>
+                  <a:srgbClr val="E8801A"/>
+                </a:solidFill>
+                <a:latin typeface="Montserrat"/>
+              </a:rPr>
+              <a:t>▸  </a:t>
+            </a:r>
+            <a:r>
+              <a:rPr sz="1600" b="0" i="0">
+                <a:solidFill>
+                  <a:srgbClr val="1B2330"/>
+                </a:solidFill>
+                <a:latin typeface="Montserrat"/>
+              </a:rPr>
+              <a:t>4. Tuberías en suelo o subsuelo</a:t>
+            </a:r>
+          </a:p>
+        </p:txBody>
+      </p:sp>
+      <p:sp>
+        <p:nvSpPr>
+          <p:cNvPr id="9" name="imgph" descr="IMGQ:gas pipe inside protective steel conduit"/>
           <p:cNvSpPr/>
           <p:nvPr/>
         </p:nvSpPr>
@@ -6274,7 +6517,7 @@
       </p:sp>
       <p:sp>
         <p:nvSpPr>
-          <p:cNvPr id="9" name="TextBox 8"/>
+          <p:cNvPr id="10" name="TextBox 9"/>
           <p:cNvSpPr txBox="1"/>
           <p:nvPr/>
         </p:nvSpPr>
@@ -6314,7 +6557,7 @@
                 </a:solidFill>
                 <a:latin typeface="Montserrat"/>
               </a:rPr>
-              <a:t>basement ventilation grille on wall</a:t>
+              <a:t>gas pipe inside protective steel conduit</a:t>
             </a:r>
           </a:p>
         </p:txBody>
@@ -6411,7 +6654,7 @@
                 </a:solidFill>
                 <a:latin typeface="Montserrat"/>
               </a:rPr>
-              <a:t>013 / 020</a:t>
+              <a:t>013 / 021</a:t>
             </a:r>
           </a:p>
         </p:txBody>
@@ -6459,7 +6702,7 @@
         <p:spPr>
           <a:xfrm>
             <a:off x="822960" y="457200"/>
-            <a:ext cx="8229600" cy="365760"/>
+            <a:ext cx="10058400" cy="365760"/>
           </a:xfrm>
           <a:prstGeom prst="rect">
             <a:avLst/>
@@ -6473,13 +6716,13 @@
           <a:lstStyle/>
           <a:p>
             <a:r>
-              <a:rPr sz="1200" b="1" i="0">
-                <a:solidFill>
-                  <a:srgbClr val="64748B"/>
-                </a:solidFill>
-                <a:latin typeface="Montserrat"/>
-              </a:rPr>
-              <a:t>APARTADO 4.4.2 · TABLA 6</a:t>
+              <a:rPr sz="1300" b="1" i="0">
+                <a:solidFill>
+                  <a:srgbClr val="E8801A"/>
+                </a:solidFill>
+                <a:latin typeface="Montserrat"/>
+              </a:rPr>
+              <a:t>APARTADO 4.4.1.2 · VENTILACIÓN</a:t>
             </a:r>
           </a:p>
         </p:txBody>
@@ -6507,26 +6750,70 @@
           <a:lstStyle/>
           <a:p>
             <a:r>
-              <a:rPr sz="2700" b="1" i="0">
+              <a:rPr sz="2800" b="1" i="0">
                 <a:solidFill>
                   <a:srgbClr val="1E2761"/>
                 </a:solidFill>
                 <a:latin typeface="Montserrat"/>
               </a:rPr>
-              <a:t>Metal siempre, plástico a veces</a:t>
-            </a:r>
-          </a:p>
-        </p:txBody>
-      </p:sp>
-      <p:sp>
-        <p:nvSpPr>
-          <p:cNvPr id="7" name="TextBox 6"/>
+              <a:t>El semisótano, solo gases ligeros</a:t>
+            </a:r>
+          </a:p>
+        </p:txBody>
+      </p:sp>
+      <p:sp>
+        <p:nvSpPr>
+          <p:cNvPr id="7" name="Rounded Rectangle 6"/>
+          <p:cNvSpPr/>
+          <p:nvPr/>
+        </p:nvSpPr>
+        <p:spPr>
+          <a:xfrm>
+            <a:off x="868680" y="1627632"/>
+            <a:ext cx="2011680" cy="73152"/>
+          </a:xfrm>
+          <a:prstGeom prst="roundRect">
+            <a:avLst/>
+          </a:prstGeom>
+          <a:solidFill>
+            <a:srgbClr val="E8801A"/>
+          </a:solidFill>
+          <a:ln>
+            <a:noFill/>
+          </a:ln>
+          <a:effectLst/>
+        </p:spPr>
+        <p:style>
+          <a:lnRef idx="1">
+            <a:schemeClr val="accent1"/>
+          </a:lnRef>
+          <a:fillRef idx="3">
+            <a:schemeClr val="accent1"/>
+          </a:fillRef>
+          <a:effectRef idx="2">
+            <a:schemeClr val="accent1"/>
+          </a:effectRef>
+          <a:fontRef idx="minor">
+            <a:schemeClr val="lt1"/>
+          </a:fontRef>
+        </p:style>
+        <p:txBody>
+          <a:bodyPr rtlCol="0" anchor="ctr"/>
+          <a:lstStyle/>
+          <a:p>
+            <a:pPr algn="ctr"/>
+          </a:p>
+        </p:txBody>
+      </p:sp>
+      <p:sp>
+        <p:nvSpPr>
+          <p:cNvPr id="8" name="TextBox 7"/>
           <p:cNvSpPr txBox="1"/>
           <p:nvPr/>
         </p:nvSpPr>
         <p:spPr>
           <a:xfrm>
-            <a:off x="822960" y="1920240"/>
+            <a:off x="822960" y="1965960"/>
             <a:ext cx="4983480" cy="4206240"/>
           </a:xfrm>
           <a:prstGeom prst="rect">
@@ -6542,17 +6829,17 @@
           <a:p>
             <a:pPr>
               <a:spcAft>
-                <a:spcPts val="1000"/>
+                <a:spcPts val="1100"/>
               </a:spcAft>
             </a:pPr>
             <a:r>
               <a:rPr sz="1600" b="1" i="0">
                 <a:solidFill>
-                  <a:srgbClr val="2E3A80"/>
-                </a:solidFill>
-                <a:latin typeface="Montserrat"/>
-              </a:rPr>
-              <a:t>•  </a:t>
+                  <a:srgbClr val="E8801A"/>
+                </a:solidFill>
+                <a:latin typeface="Montserrat"/>
+              </a:rPr>
+              <a:t>▸  </a:t>
             </a:r>
             <a:r>
               <a:rPr sz="1600" b="0" i="0">
@@ -6561,23 +6848,23 @@
                 </a:solidFill>
                 <a:latin typeface="Montserrat"/>
               </a:rPr>
-              <a:t>Mecánica y semisótano: metal sí o sí</a:t>
+              <a:t>Solo gas más ligero que el aire</a:t>
             </a:r>
           </a:p>
           <a:p>
             <a:pPr>
               <a:spcAft>
-                <a:spcPts val="1000"/>
+                <a:spcPts val="1100"/>
               </a:spcAft>
             </a:pPr>
             <a:r>
               <a:rPr sz="1600" b="1" i="0">
                 <a:solidFill>
-                  <a:srgbClr val="2E3A80"/>
-                </a:solidFill>
-                <a:latin typeface="Montserrat"/>
-              </a:rPr>
-              <a:t>•  </a:t>
+                  <a:srgbClr val="E8801A"/>
+                </a:solidFill>
+                <a:latin typeface="Montserrat"/>
+              </a:rPr>
+              <a:t>▸  </a:t>
             </a:r>
             <a:r>
               <a:rPr sz="1600" b="0" i="0">
@@ -6586,23 +6873,23 @@
                 </a:solidFill>
                 <a:latin typeface="Montserrat"/>
               </a:rPr>
-              <a:t>Resto de casos: plástico rígido admitido</a:t>
+              <a:t>A 50 mbar o menos</a:t>
             </a:r>
           </a:p>
           <a:p>
             <a:pPr>
               <a:spcAft>
-                <a:spcPts val="1000"/>
+                <a:spcPts val="1100"/>
               </a:spcAft>
             </a:pPr>
             <a:r>
               <a:rPr sz="1600" b="1" i="0">
                 <a:solidFill>
-                  <a:srgbClr val="2E3A80"/>
-                </a:solidFill>
-                <a:latin typeface="Montserrat"/>
-              </a:rPr>
-              <a:t>•  </a:t>
+                  <a:srgbClr val="E8801A"/>
+                </a:solidFill>
+                <a:latin typeface="Montserrat"/>
+              </a:rPr>
+              <a:t>▸  </a:t>
             </a:r>
             <a:r>
               <a:rPr sz="1600" b="0" i="0">
@@ -6611,14 +6898,14 @@
                 </a:solidFill>
                 <a:latin typeface="Montserrat"/>
               </a:rPr>
-              <a:t>Donde lleva asterisco: estanca</a:t>
-            </a:r>
-          </a:p>
-        </p:txBody>
-      </p:sp>
-      <p:sp>
-        <p:nvSpPr>
-          <p:cNvPr id="8" name="imgph" descr="IMGQ:steel metal conduit pipe"/>
+              <a:t>S = 10 · A, mínimo 200 cm²</a:t>
+            </a:r>
+          </a:p>
+        </p:txBody>
+      </p:sp>
+      <p:sp>
+        <p:nvSpPr>
+          <p:cNvPr id="9" name="imgph" descr="IMGQ:basement ventilation grille on wall"/>
           <p:cNvSpPr/>
           <p:nvPr/>
         </p:nvSpPr>
@@ -6664,7 +6951,7 @@
       </p:sp>
       <p:sp>
         <p:nvSpPr>
-          <p:cNvPr id="9" name="TextBox 8"/>
+          <p:cNvPr id="10" name="TextBox 9"/>
           <p:cNvSpPr txBox="1"/>
           <p:nvPr/>
         </p:nvSpPr>
@@ -6704,7 +6991,7 @@
                 </a:solidFill>
                 <a:latin typeface="Montserrat"/>
               </a:rPr>
-              <a:t>steel metal conduit pipe</a:t>
+              <a:t>basement ventilation grille on wall</a:t>
             </a:r>
           </a:p>
         </p:txBody>
@@ -6801,7 +7088,7 @@
                 </a:solidFill>
                 <a:latin typeface="Montserrat"/>
               </a:rPr>
-              <a:t>014 / 020</a:t>
+              <a:t>014 / 021</a:t>
             </a:r>
           </a:p>
         </p:txBody>
@@ -6849,7 +7136,7 @@
         <p:spPr>
           <a:xfrm>
             <a:off x="822960" y="457200"/>
-            <a:ext cx="8229600" cy="365760"/>
+            <a:ext cx="10058400" cy="365760"/>
           </a:xfrm>
           <a:prstGeom prst="rect">
             <a:avLst/>
@@ -6863,13 +7150,13 @@
           <a:lstStyle/>
           <a:p>
             <a:r>
-              <a:rPr sz="1200" b="1" i="0">
-                <a:solidFill>
-                  <a:srgbClr val="64748B"/>
-                </a:solidFill>
-                <a:latin typeface="Montserrat"/>
-              </a:rPr>
-              <a:t>APARTADO 4.4.3 · VAINA DE VENTILACIÓN</a:t>
+              <a:rPr sz="1300" b="1" i="0">
+                <a:solidFill>
+                  <a:srgbClr val="E8801A"/>
+                </a:solidFill>
+                <a:latin typeface="Montserrat"/>
+              </a:rPr>
+              <a:t>APARTADO 4.4.2 · TABLA 6</a:t>
             </a:r>
           </a:p>
         </p:txBody>
@@ -6897,26 +7184,70 @@
           <a:lstStyle/>
           <a:p>
             <a:r>
-              <a:rPr sz="2700" b="1" i="0">
+              <a:rPr sz="2800" b="1" i="0">
                 <a:solidFill>
                   <a:srgbClr val="1E2761"/>
                 </a:solidFill>
                 <a:latin typeface="Montserrat"/>
               </a:rPr>
-              <a:t>Un tubo que respira hacia fuera</a:t>
-            </a:r>
-          </a:p>
-        </p:txBody>
-      </p:sp>
-      <p:sp>
-        <p:nvSpPr>
-          <p:cNvPr id="7" name="TextBox 6"/>
+              <a:t>Metal siempre, plástico a veces</a:t>
+            </a:r>
+          </a:p>
+        </p:txBody>
+      </p:sp>
+      <p:sp>
+        <p:nvSpPr>
+          <p:cNvPr id="7" name="Rounded Rectangle 6"/>
+          <p:cNvSpPr/>
+          <p:nvPr/>
+        </p:nvSpPr>
+        <p:spPr>
+          <a:xfrm>
+            <a:off x="868680" y="1627632"/>
+            <a:ext cx="2011680" cy="73152"/>
+          </a:xfrm>
+          <a:prstGeom prst="roundRect">
+            <a:avLst/>
+          </a:prstGeom>
+          <a:solidFill>
+            <a:srgbClr val="E8801A"/>
+          </a:solidFill>
+          <a:ln>
+            <a:noFill/>
+          </a:ln>
+          <a:effectLst/>
+        </p:spPr>
+        <p:style>
+          <a:lnRef idx="1">
+            <a:schemeClr val="accent1"/>
+          </a:lnRef>
+          <a:fillRef idx="3">
+            <a:schemeClr val="accent1"/>
+          </a:fillRef>
+          <a:effectRef idx="2">
+            <a:schemeClr val="accent1"/>
+          </a:effectRef>
+          <a:fontRef idx="minor">
+            <a:schemeClr val="lt1"/>
+          </a:fontRef>
+        </p:style>
+        <p:txBody>
+          <a:bodyPr rtlCol="0" anchor="ctr"/>
+          <a:lstStyle/>
+          <a:p>
+            <a:pPr algn="ctr"/>
+          </a:p>
+        </p:txBody>
+      </p:sp>
+      <p:sp>
+        <p:nvSpPr>
+          <p:cNvPr id="8" name="TextBox 7"/>
           <p:cNvSpPr txBox="1"/>
           <p:nvPr/>
         </p:nvSpPr>
         <p:spPr>
           <a:xfrm>
-            <a:off x="822960" y="1920240"/>
+            <a:off x="822960" y="1965960"/>
             <a:ext cx="4983480" cy="4206240"/>
           </a:xfrm>
           <a:prstGeom prst="rect">
@@ -6932,17 +7263,17 @@
           <a:p>
             <a:pPr>
               <a:spcAft>
-                <a:spcPts val="1000"/>
+                <a:spcPts val="1100"/>
               </a:spcAft>
             </a:pPr>
             <a:r>
               <a:rPr sz="1600" b="1" i="0">
                 <a:solidFill>
-                  <a:srgbClr val="2E3A80"/>
-                </a:solidFill>
-                <a:latin typeface="Montserrat"/>
-              </a:rPr>
-              <a:t>•  </a:t>
+                  <a:srgbClr val="E8801A"/>
+                </a:solidFill>
+                <a:latin typeface="Montserrat"/>
+              </a:rPr>
+              <a:t>▸  </a:t>
             </a:r>
             <a:r>
               <a:rPr sz="1600" b="0" i="0">
@@ -6951,23 +7282,23 @@
                 </a:solidFill>
                 <a:latin typeface="Montserrat"/>
               </a:rPr>
-              <a:t>Continua y estanca</a:t>
+              <a:t>Mecánica y semisótano: metal sí o sí</a:t>
             </a:r>
           </a:p>
           <a:p>
             <a:pPr>
               <a:spcAft>
-                <a:spcPts val="1000"/>
+                <a:spcPts val="1100"/>
               </a:spcAft>
             </a:pPr>
             <a:r>
               <a:rPr sz="1600" b="1" i="0">
                 <a:solidFill>
-                  <a:srgbClr val="2E3A80"/>
-                </a:solidFill>
-                <a:latin typeface="Montserrat"/>
-              </a:rPr>
-              <a:t>•  </a:t>
+                  <a:srgbClr val="E8801A"/>
+                </a:solidFill>
+                <a:latin typeface="Montserrat"/>
+              </a:rPr>
+              <a:t>▸  </a:t>
             </a:r>
             <a:r>
               <a:rPr sz="1600" b="0" i="0">
@@ -6976,23 +7307,23 @@
                 </a:solidFill>
                 <a:latin typeface="Montserrat"/>
               </a:rPr>
-              <a:t>Sus dos bocas, al exterior</a:t>
+              <a:t>Resto de casos: plástico rígido admitido</a:t>
             </a:r>
           </a:p>
           <a:p>
             <a:pPr>
               <a:spcAft>
-                <a:spcPts val="1000"/>
+                <a:spcPts val="1100"/>
               </a:spcAft>
             </a:pPr>
             <a:r>
               <a:rPr sz="1600" b="1" i="0">
                 <a:solidFill>
-                  <a:srgbClr val="2E3A80"/>
-                </a:solidFill>
-                <a:latin typeface="Montserrat"/>
-              </a:rPr>
-              <a:t>•  </a:t>
+                  <a:srgbClr val="E8801A"/>
+                </a:solidFill>
+                <a:latin typeface="Montserrat"/>
+              </a:rPr>
+              <a:t>▸  </a:t>
             </a:r>
             <a:r>
               <a:rPr sz="1600" b="0" i="0">
@@ -7001,14 +7332,14 @@
                 </a:solidFill>
                 <a:latin typeface="Montserrat"/>
               </a:rPr>
-              <a:t>Sella el extremo a local sin ventilar</a:t>
-            </a:r>
-          </a:p>
-        </p:txBody>
-      </p:sp>
-      <p:sp>
-        <p:nvSpPr>
-          <p:cNvPr id="8" name="imgph" descr="IMGQ:pipe vent outlet on exterior wall"/>
+              <a:t>Donde lleva asterisco: estanca</a:t>
+            </a:r>
+          </a:p>
+        </p:txBody>
+      </p:sp>
+      <p:sp>
+        <p:nvSpPr>
+          <p:cNvPr id="9" name="imgph" descr="IMGQ:steel metal conduit pipe"/>
           <p:cNvSpPr/>
           <p:nvPr/>
         </p:nvSpPr>
@@ -7054,7 +7385,7 @@
       </p:sp>
       <p:sp>
         <p:nvSpPr>
-          <p:cNvPr id="9" name="TextBox 8"/>
+          <p:cNvPr id="10" name="TextBox 9"/>
           <p:cNvSpPr txBox="1"/>
           <p:nvPr/>
         </p:nvSpPr>
@@ -7094,7 +7425,7 @@
                 </a:solidFill>
                 <a:latin typeface="Montserrat"/>
               </a:rPr>
-              <a:t>pipe vent outlet on exterior wall</a:t>
+              <a:t>steel metal conduit pipe</a:t>
             </a:r>
           </a:p>
         </p:txBody>
@@ -7191,7 +7522,7 @@
                 </a:solidFill>
                 <a:latin typeface="Montserrat"/>
               </a:rPr>
-              <a:t>015 / 020</a:t>
+              <a:t>015 / 021</a:t>
             </a:r>
           </a:p>
         </p:txBody>
@@ -7239,7 +7570,7 @@
         <p:spPr>
           <a:xfrm>
             <a:off x="822960" y="457200"/>
-            <a:ext cx="8229600" cy="365760"/>
+            <a:ext cx="10058400" cy="365760"/>
           </a:xfrm>
           <a:prstGeom prst="rect">
             <a:avLst/>
@@ -7253,13 +7584,13 @@
           <a:lstStyle/>
           <a:p>
             <a:r>
-              <a:rPr sz="1200" b="1" i="0">
-                <a:solidFill>
-                  <a:srgbClr val="64748B"/>
-                </a:solidFill>
-                <a:latin typeface="Montserrat"/>
-              </a:rPr>
-              <a:t>APARTADO 4.4 · MATICES</a:t>
+              <a:rPr sz="1300" b="1" i="0">
+                <a:solidFill>
+                  <a:srgbClr val="E8801A"/>
+                </a:solidFill>
+                <a:latin typeface="Montserrat"/>
+              </a:rPr>
+              <a:t>APARTADO 4.4.3 · VAINA DE VENTILACIÓN</a:t>
             </a:r>
           </a:p>
         </p:txBody>
@@ -7287,26 +7618,70 @@
           <a:lstStyle/>
           <a:p>
             <a:r>
-              <a:rPr sz="2700" b="1" i="0">
+              <a:rPr sz="2800" b="1" i="0">
                 <a:solidFill>
                   <a:srgbClr val="1E2761"/>
                 </a:solidFill>
                 <a:latin typeface="Montserrat"/>
               </a:rPr>
-              <a:t>Vaina y conducto no son iguales</a:t>
-            </a:r>
-          </a:p>
-        </p:txBody>
-      </p:sp>
-      <p:sp>
-        <p:nvSpPr>
-          <p:cNvPr id="7" name="TextBox 6"/>
+              <a:t>Un tubo que respira hacia fuera</a:t>
+            </a:r>
+          </a:p>
+        </p:txBody>
+      </p:sp>
+      <p:sp>
+        <p:nvSpPr>
+          <p:cNvPr id="7" name="Rounded Rectangle 6"/>
+          <p:cNvSpPr/>
+          <p:nvPr/>
+        </p:nvSpPr>
+        <p:spPr>
+          <a:xfrm>
+            <a:off x="868680" y="1627632"/>
+            <a:ext cx="2011680" cy="73152"/>
+          </a:xfrm>
+          <a:prstGeom prst="roundRect">
+            <a:avLst/>
+          </a:prstGeom>
+          <a:solidFill>
+            <a:srgbClr val="E8801A"/>
+          </a:solidFill>
+          <a:ln>
+            <a:noFill/>
+          </a:ln>
+          <a:effectLst/>
+        </p:spPr>
+        <p:style>
+          <a:lnRef idx="1">
+            <a:schemeClr val="accent1"/>
+          </a:lnRef>
+          <a:fillRef idx="3">
+            <a:schemeClr val="accent1"/>
+          </a:fillRef>
+          <a:effectRef idx="2">
+            <a:schemeClr val="accent1"/>
+          </a:effectRef>
+          <a:fontRef idx="minor">
+            <a:schemeClr val="lt1"/>
+          </a:fontRef>
+        </p:style>
+        <p:txBody>
+          <a:bodyPr rtlCol="0" anchor="ctr"/>
+          <a:lstStyle/>
+          <a:p>
+            <a:pPr algn="ctr"/>
+          </a:p>
+        </p:txBody>
+      </p:sp>
+      <p:sp>
+        <p:nvSpPr>
+          <p:cNvPr id="8" name="TextBox 7"/>
           <p:cNvSpPr txBox="1"/>
           <p:nvPr/>
         </p:nvSpPr>
         <p:spPr>
           <a:xfrm>
-            <a:off x="822960" y="1920240"/>
+            <a:off x="822960" y="1965960"/>
             <a:ext cx="4983480" cy="4206240"/>
           </a:xfrm>
           <a:prstGeom prst="rect">
@@ -7322,17 +7697,17 @@
           <a:p>
             <a:pPr>
               <a:spcAft>
-                <a:spcPts val="1000"/>
+                <a:spcPts val="1100"/>
               </a:spcAft>
             </a:pPr>
             <a:r>
               <a:rPr sz="1600" b="1" i="0">
                 <a:solidFill>
-                  <a:srgbClr val="2E3A80"/>
-                </a:solidFill>
-                <a:latin typeface="Montserrat"/>
-              </a:rPr>
-              <a:t>•  </a:t>
+                  <a:srgbClr val="E8801A"/>
+                </a:solidFill>
+                <a:latin typeface="Montserrat"/>
+              </a:rPr>
+              <a:t>▸  </a:t>
             </a:r>
             <a:r>
               <a:rPr sz="1600" b="0" i="0">
@@ -7341,23 +7716,23 @@
                 </a:solidFill>
                 <a:latin typeface="Montserrat"/>
               </a:rPr>
-              <a:t>Vaina: ceñida al tubo, sin registros</a:t>
+              <a:t>Continua y estanca</a:t>
             </a:r>
           </a:p>
           <a:p>
             <a:pPr>
               <a:spcAft>
-                <a:spcPts val="1000"/>
+                <a:spcPts val="1100"/>
               </a:spcAft>
             </a:pPr>
             <a:r>
               <a:rPr sz="1600" b="1" i="0">
                 <a:solidFill>
-                  <a:srgbClr val="2E3A80"/>
-                </a:solidFill>
-                <a:latin typeface="Montserrat"/>
-              </a:rPr>
-              <a:t>•  </a:t>
+                  <a:srgbClr val="E8801A"/>
+                </a:solidFill>
+                <a:latin typeface="Montserrat"/>
+              </a:rPr>
+              <a:t>▸  </a:t>
             </a:r>
             <a:r>
               <a:rPr sz="1600" b="0" i="0">
@@ -7366,23 +7741,23 @@
                 </a:solidFill>
                 <a:latin typeface="Montserrat"/>
               </a:rPr>
-              <a:t>Conducto: holgado, con registros</a:t>
+              <a:t>Sus dos bocas, al exterior</a:t>
             </a:r>
           </a:p>
           <a:p>
             <a:pPr>
               <a:spcAft>
-                <a:spcPts val="1000"/>
+                <a:spcPts val="1100"/>
               </a:spcAft>
             </a:pPr>
             <a:r>
               <a:rPr sz="1600" b="1" i="0">
                 <a:solidFill>
-                  <a:srgbClr val="2E3A80"/>
-                </a:solidFill>
-                <a:latin typeface="Montserrat"/>
-              </a:rPr>
-              <a:t>•  </a:t>
+                  <a:srgbClr val="E8801A"/>
+                </a:solidFill>
+                <a:latin typeface="Montserrat"/>
+              </a:rPr>
+              <a:t>▸  </a:t>
             </a:r>
             <a:r>
               <a:rPr sz="1600" b="0" i="0">
@@ -7391,14 +7766,14 @@
                 </a:solidFill>
                 <a:latin typeface="Montserrat"/>
               </a:rPr>
-              <a:t>El conducto no ventila el local</a:t>
-            </a:r>
-          </a:p>
-        </p:txBody>
-      </p:sp>
-      <p:sp>
-        <p:nvSpPr>
-          <p:cNvPr id="8" name="imgph" descr="IMGQ:large pipe duct with maintenance access"/>
+              <a:t>Sella el extremo a local sin ventilar</a:t>
+            </a:r>
+          </a:p>
+        </p:txBody>
+      </p:sp>
+      <p:sp>
+        <p:nvSpPr>
+          <p:cNvPr id="9" name="imgph" descr="IMGQ:pipe vent outlet on exterior wall"/>
           <p:cNvSpPr/>
           <p:nvPr/>
         </p:nvSpPr>
@@ -7444,7 +7819,7 @@
       </p:sp>
       <p:sp>
         <p:nvSpPr>
-          <p:cNvPr id="9" name="TextBox 8"/>
+          <p:cNvPr id="10" name="TextBox 9"/>
           <p:cNvSpPr txBox="1"/>
           <p:nvPr/>
         </p:nvSpPr>
@@ -7484,7 +7859,7 @@
                 </a:solidFill>
                 <a:latin typeface="Montserrat"/>
               </a:rPr>
-              <a:t>large pipe duct with maintenance access</a:t>
+              <a:t>pipe vent outlet on exterior wall</a:t>
             </a:r>
           </a:p>
         </p:txBody>
@@ -7581,7 +7956,7 @@
                 </a:solidFill>
                 <a:latin typeface="Montserrat"/>
               </a:rPr>
-              <a:t>016 / 020</a:t>
+              <a:t>016 / 021</a:t>
             </a:r>
           </a:p>
         </p:txBody>
@@ -7629,7 +8004,7 @@
         <p:spPr>
           <a:xfrm>
             <a:off x="822960" y="457200"/>
-            <a:ext cx="8229600" cy="365760"/>
+            <a:ext cx="10058400" cy="365760"/>
           </a:xfrm>
           <a:prstGeom prst="rect">
             <a:avLst/>
@@ -7643,13 +8018,13 @@
           <a:lstStyle/>
           <a:p>
             <a:r>
-              <a:rPr sz="1200" b="1" i="0">
-                <a:solidFill>
-                  <a:srgbClr val="64748B"/>
-                </a:solidFill>
-                <a:latin typeface="Montserrat"/>
-              </a:rPr>
-              <a:t>APARTADOS 4.5 Y 4.6</a:t>
+              <a:rPr sz="1300" b="1" i="0">
+                <a:solidFill>
+                  <a:srgbClr val="E8801A"/>
+                </a:solidFill>
+                <a:latin typeface="Montserrat"/>
+              </a:rPr>
+              <a:t>APARTADO 4.4 · MATICES</a:t>
             </a:r>
           </a:p>
         </p:txBody>
@@ -7677,26 +8052,70 @@
           <a:lstStyle/>
           <a:p>
             <a:r>
-              <a:rPr sz="2700" b="1" i="0">
+              <a:rPr sz="2800" b="1" i="0">
                 <a:solidFill>
                   <a:srgbClr val="1E2761"/>
                 </a:solidFill>
                 <a:latin typeface="Montserrat"/>
               </a:rPr>
-              <a:t>Enterrada y empotrada: lo justo</a:t>
-            </a:r>
-          </a:p>
-        </p:txBody>
-      </p:sp>
-      <p:sp>
-        <p:nvSpPr>
-          <p:cNvPr id="7" name="TextBox 6"/>
+              <a:t>Vaina y conducto no son iguales</a:t>
+            </a:r>
+          </a:p>
+        </p:txBody>
+      </p:sp>
+      <p:sp>
+        <p:nvSpPr>
+          <p:cNvPr id="7" name="Rounded Rectangle 6"/>
+          <p:cNvSpPr/>
+          <p:nvPr/>
+        </p:nvSpPr>
+        <p:spPr>
+          <a:xfrm>
+            <a:off x="868680" y="1627632"/>
+            <a:ext cx="2011680" cy="73152"/>
+          </a:xfrm>
+          <a:prstGeom prst="roundRect">
+            <a:avLst/>
+          </a:prstGeom>
+          <a:solidFill>
+            <a:srgbClr val="E8801A"/>
+          </a:solidFill>
+          <a:ln>
+            <a:noFill/>
+          </a:ln>
+          <a:effectLst/>
+        </p:spPr>
+        <p:style>
+          <a:lnRef idx="1">
+            <a:schemeClr val="accent1"/>
+          </a:lnRef>
+          <a:fillRef idx="3">
+            <a:schemeClr val="accent1"/>
+          </a:fillRef>
+          <a:effectRef idx="2">
+            <a:schemeClr val="accent1"/>
+          </a:effectRef>
+          <a:fontRef idx="minor">
+            <a:schemeClr val="lt1"/>
+          </a:fontRef>
+        </p:style>
+        <p:txBody>
+          <a:bodyPr rtlCol="0" anchor="ctr"/>
+          <a:lstStyle/>
+          <a:p>
+            <a:pPr algn="ctr"/>
+          </a:p>
+        </p:txBody>
+      </p:sp>
+      <p:sp>
+        <p:nvSpPr>
+          <p:cNvPr id="8" name="TextBox 7"/>
           <p:cNvSpPr txBox="1"/>
           <p:nvPr/>
         </p:nvSpPr>
         <p:spPr>
           <a:xfrm>
-            <a:off x="822960" y="1920240"/>
+            <a:off x="822960" y="1965960"/>
             <a:ext cx="4983480" cy="4206240"/>
           </a:xfrm>
           <a:prstGeom prst="rect">
@@ -7712,17 +8131,17 @@
           <a:p>
             <a:pPr>
               <a:spcAft>
-                <a:spcPts val="1000"/>
+                <a:spcPts val="1100"/>
               </a:spcAft>
             </a:pPr>
             <a:r>
               <a:rPr sz="1600" b="1" i="0">
                 <a:solidFill>
-                  <a:srgbClr val="2E3A80"/>
-                </a:solidFill>
-                <a:latin typeface="Montserrat"/>
-              </a:rPr>
-              <a:t>•  </a:t>
+                  <a:srgbClr val="E8801A"/>
+                </a:solidFill>
+                <a:latin typeface="Montserrat"/>
+              </a:rPr>
+              <a:t>▸  </a:t>
             </a:r>
             <a:r>
               <a:rPr sz="1600" b="0" i="0">
@@ -7731,23 +8150,23 @@
                 </a:solidFill>
                 <a:latin typeface="Montserrat"/>
               </a:rPr>
-              <a:t>Enterrada: por fuera, según UNE 60311</a:t>
+              <a:t>Vaina: ceñida al tubo, sin registros</a:t>
             </a:r>
           </a:p>
           <a:p>
             <a:pPr>
               <a:spcAft>
-                <a:spcPts val="1000"/>
+                <a:spcPts val="1100"/>
               </a:spcAft>
             </a:pPr>
             <a:r>
               <a:rPr sz="1600" b="1" i="0">
                 <a:solidFill>
-                  <a:srgbClr val="2E3A80"/>
-                </a:solidFill>
-                <a:latin typeface="Montserrat"/>
-              </a:rPr>
-              <a:t>•  </a:t>
+                  <a:srgbClr val="E8801A"/>
+                </a:solidFill>
+                <a:latin typeface="Montserrat"/>
+              </a:rPr>
+              <a:t>▸  </a:t>
             </a:r>
             <a:r>
               <a:rPr sz="1600" b="0" i="0">
@@ -7756,23 +8175,23 @@
                 </a:solidFill>
                 <a:latin typeface="Montserrat"/>
               </a:rPr>
-              <a:t>Empotrada: máximo 0,40 m</a:t>
+              <a:t>Conducto: holgado, con registros</a:t>
             </a:r>
           </a:p>
           <a:p>
             <a:pPr>
               <a:spcAft>
-                <a:spcPts val="1000"/>
+                <a:spcPts val="1100"/>
               </a:spcAft>
             </a:pPr>
             <a:r>
               <a:rPr sz="1600" b="1" i="0">
                 <a:solidFill>
-                  <a:srgbClr val="2E3A80"/>
-                </a:solidFill>
-                <a:latin typeface="Montserrat"/>
-              </a:rPr>
-              <a:t>•  </a:t>
+                  <a:srgbClr val="E8801A"/>
+                </a:solidFill>
+                <a:latin typeface="Montserrat"/>
+              </a:rPr>
+              <a:t>▸  </a:t>
             </a:r>
             <a:r>
               <a:rPr sz="1600" b="0" i="0">
@@ -7781,14 +8200,14 @@
                 </a:solidFill>
                 <a:latin typeface="Montserrat"/>
               </a:rPr>
-              <a:t>Sin ninguna unión mecánica dentro</a:t>
-            </a:r>
-          </a:p>
-        </p:txBody>
-      </p:sp>
-      <p:sp>
-        <p:nvSpPr>
-          <p:cNvPr id="8" name="imgph" descr="IMGQ:buried gas pipe in trench excavation"/>
+              <a:t>El conducto no ventila el local</a:t>
+            </a:r>
+          </a:p>
+        </p:txBody>
+      </p:sp>
+      <p:sp>
+        <p:nvSpPr>
+          <p:cNvPr id="9" name="imgph" descr="IMGQ:large pipe duct with maintenance access"/>
           <p:cNvSpPr/>
           <p:nvPr/>
         </p:nvSpPr>
@@ -7834,7 +8253,7 @@
       </p:sp>
       <p:sp>
         <p:nvSpPr>
-          <p:cNvPr id="9" name="TextBox 8"/>
+          <p:cNvPr id="10" name="TextBox 9"/>
           <p:cNvSpPr txBox="1"/>
           <p:nvPr/>
         </p:nvSpPr>
@@ -7874,7 +8293,7 @@
                 </a:solidFill>
                 <a:latin typeface="Montserrat"/>
               </a:rPr>
-              <a:t>buried gas pipe in trench excavation</a:t>
+              <a:t>large pipe duct with maintenance access</a:t>
             </a:r>
           </a:p>
         </p:txBody>
@@ -7971,7 +8390,7 @@
                 </a:solidFill>
                 <a:latin typeface="Montserrat"/>
               </a:rPr>
-              <a:t>017 / 020</a:t>
+              <a:t>017 / 021</a:t>
             </a:r>
           </a:p>
         </p:txBody>
@@ -8019,7 +8438,7 @@
         <p:spPr>
           <a:xfrm>
             <a:off x="822960" y="457200"/>
-            <a:ext cx="8229600" cy="365760"/>
+            <a:ext cx="10058400" cy="365760"/>
           </a:xfrm>
           <a:prstGeom prst="rect">
             <a:avLst/>
@@ -8033,13 +8452,13 @@
           <a:lstStyle/>
           <a:p>
             <a:r>
-              <a:rPr sz="1200" b="1" i="0">
-                <a:solidFill>
-                  <a:srgbClr val="64748B"/>
-                </a:solidFill>
-                <a:latin typeface="Montserrat"/>
-              </a:rPr>
-              <a:t>APARTADO 4.7 · MOP DE 2 A 5 BAR</a:t>
+              <a:rPr sz="1300" b="1" i="0">
+                <a:solidFill>
+                  <a:srgbClr val="E8801A"/>
+                </a:solidFill>
+                <a:latin typeface="Montserrat"/>
+              </a:rPr>
+              <a:t>APARTADOS 4.5 Y 4.6</a:t>
             </a:r>
           </a:p>
         </p:txBody>
@@ -8067,26 +8486,70 @@
           <a:lstStyle/>
           <a:p>
             <a:r>
-              <a:rPr sz="2700" b="1" i="0">
+              <a:rPr sz="2800" b="1" i="0">
                 <a:solidFill>
                   <a:srgbClr val="1E2761"/>
                 </a:solidFill>
                 <a:latin typeface="Montserrat"/>
               </a:rPr>
-              <a:t>A más presión, más al aire libre</a:t>
-            </a:r>
-          </a:p>
-        </p:txBody>
-      </p:sp>
-      <p:sp>
-        <p:nvSpPr>
-          <p:cNvPr id="7" name="TextBox 6"/>
+              <a:t>Enterrada y empotrada: lo justo</a:t>
+            </a:r>
+          </a:p>
+        </p:txBody>
+      </p:sp>
+      <p:sp>
+        <p:nvSpPr>
+          <p:cNvPr id="7" name="Rounded Rectangle 6"/>
+          <p:cNvSpPr/>
+          <p:nvPr/>
+        </p:nvSpPr>
+        <p:spPr>
+          <a:xfrm>
+            <a:off x="868680" y="1627632"/>
+            <a:ext cx="2011680" cy="73152"/>
+          </a:xfrm>
+          <a:prstGeom prst="roundRect">
+            <a:avLst/>
+          </a:prstGeom>
+          <a:solidFill>
+            <a:srgbClr val="E8801A"/>
+          </a:solidFill>
+          <a:ln>
+            <a:noFill/>
+          </a:ln>
+          <a:effectLst/>
+        </p:spPr>
+        <p:style>
+          <a:lnRef idx="1">
+            <a:schemeClr val="accent1"/>
+          </a:lnRef>
+          <a:fillRef idx="3">
+            <a:schemeClr val="accent1"/>
+          </a:fillRef>
+          <a:effectRef idx="2">
+            <a:schemeClr val="accent1"/>
+          </a:effectRef>
+          <a:fontRef idx="minor">
+            <a:schemeClr val="lt1"/>
+          </a:fontRef>
+        </p:style>
+        <p:txBody>
+          <a:bodyPr rtlCol="0" anchor="ctr"/>
+          <a:lstStyle/>
+          <a:p>
+            <a:pPr algn="ctr"/>
+          </a:p>
+        </p:txBody>
+      </p:sp>
+      <p:sp>
+        <p:nvSpPr>
+          <p:cNvPr id="8" name="TextBox 7"/>
           <p:cNvSpPr txBox="1"/>
           <p:nvPr/>
         </p:nvSpPr>
         <p:spPr>
           <a:xfrm>
-            <a:off x="822960" y="1920240"/>
+            <a:off x="822960" y="1965960"/>
             <a:ext cx="4983480" cy="4206240"/>
           </a:xfrm>
           <a:prstGeom prst="rect">
@@ -8102,17 +8565,17 @@
           <a:p>
             <a:pPr>
               <a:spcAft>
-                <a:spcPts val="1000"/>
+                <a:spcPts val="1100"/>
               </a:spcAft>
             </a:pPr>
             <a:r>
               <a:rPr sz="1600" b="1" i="0">
                 <a:solidFill>
-                  <a:srgbClr val="2E3A80"/>
-                </a:solidFill>
-                <a:latin typeface="Montserrat"/>
-              </a:rPr>
-              <a:t>•  </a:t>
+                  <a:srgbClr val="E8801A"/>
+                </a:solidFill>
+                <a:latin typeface="Montserrat"/>
+              </a:rPr>
+              <a:t>▸  </a:t>
             </a:r>
             <a:r>
               <a:rPr sz="1600" b="0" i="0">
@@ -8121,23 +8584,23 @@
                 </a:solidFill>
                 <a:latin typeface="Montserrat"/>
               </a:rPr>
-              <a:t>Por el exterior: fachada, patio, aire libre</a:t>
+              <a:t>Enterrada: por fuera, según UNE 60311</a:t>
             </a:r>
           </a:p>
           <a:p>
             <a:pPr>
               <a:spcAft>
-                <a:spcPts val="1000"/>
+                <a:spcPts val="1100"/>
               </a:spcAft>
             </a:pPr>
             <a:r>
               <a:rPr sz="1600" b="1" i="0">
                 <a:solidFill>
-                  <a:srgbClr val="2E3A80"/>
-                </a:solidFill>
-                <a:latin typeface="Montserrat"/>
-              </a:rPr>
-              <a:t>•  </a:t>
+                  <a:srgbClr val="E8801A"/>
+                </a:solidFill>
+                <a:latin typeface="Montserrat"/>
+              </a:rPr>
+              <a:t>▸  </a:t>
             </a:r>
             <a:r>
               <a:rPr sz="1600" b="0" i="0">
@@ -8146,23 +8609,23 @@
                 </a:solidFill>
                 <a:latin typeface="Montserrat"/>
               </a:rPr>
-              <a:t>Dentro solo si es inevitable</a:t>
+              <a:t>Empotrada: máximo 0,40 m</a:t>
             </a:r>
           </a:p>
           <a:p>
             <a:pPr>
               <a:spcAft>
-                <a:spcPts val="1000"/>
+                <a:spcPts val="1100"/>
               </a:spcAft>
             </a:pPr>
             <a:r>
               <a:rPr sz="1600" b="1" i="0">
                 <a:solidFill>
-                  <a:srgbClr val="2E3A80"/>
-                </a:solidFill>
-                <a:latin typeface="Montserrat"/>
-              </a:rPr>
-              <a:t>•  </a:t>
+                  <a:srgbClr val="E8801A"/>
+                </a:solidFill>
+                <a:latin typeface="Montserrat"/>
+              </a:rPr>
+              <a:t>▸  </a:t>
             </a:r>
             <a:r>
               <a:rPr sz="1600" b="0" i="0">
@@ -8171,14 +8634,14 @@
                 </a:solidFill>
                 <a:latin typeface="Montserrat"/>
               </a:rPr>
-              <a:t>Y entonces, envainado</a:t>
-            </a:r>
-          </a:p>
-        </p:txBody>
-      </p:sp>
-      <p:sp>
-        <p:nvSpPr>
-          <p:cNvPr id="8" name="imgph" descr="IMGQ:gas pipe on building facade exterior"/>
+              <a:t>Sin ninguna unión mecánica dentro</a:t>
+            </a:r>
+          </a:p>
+        </p:txBody>
+      </p:sp>
+      <p:sp>
+        <p:nvSpPr>
+          <p:cNvPr id="9" name="imgph" descr="IMGQ:buried gas pipe in trench excavation"/>
           <p:cNvSpPr/>
           <p:nvPr/>
         </p:nvSpPr>
@@ -8224,7 +8687,7 @@
       </p:sp>
       <p:sp>
         <p:nvSpPr>
-          <p:cNvPr id="9" name="TextBox 8"/>
+          <p:cNvPr id="10" name="TextBox 9"/>
           <p:cNvSpPr txBox="1"/>
           <p:nvPr/>
         </p:nvSpPr>
@@ -8264,7 +8727,7 @@
                 </a:solidFill>
                 <a:latin typeface="Montserrat"/>
               </a:rPr>
-              <a:t>gas pipe on building facade exterior</a:t>
+              <a:t>buried gas pipe in trench excavation</a:t>
             </a:r>
           </a:p>
         </p:txBody>
@@ -8361,7 +8824,7 @@
                 </a:solidFill>
                 <a:latin typeface="Montserrat"/>
               </a:rPr>
-              <a:t>018 / 020</a:t>
+              <a:t>018 / 021</a:t>
             </a:r>
           </a:p>
         </p:txBody>
@@ -8409,7 +8872,7 @@
         <p:spPr>
           <a:xfrm>
             <a:off x="822960" y="457200"/>
-            <a:ext cx="8229600" cy="365760"/>
+            <a:ext cx="10058400" cy="365760"/>
           </a:xfrm>
           <a:prstGeom prst="rect">
             <a:avLst/>
@@ -8423,13 +8886,13 @@
           <a:lstStyle/>
           <a:p>
             <a:r>
-              <a:rPr sz="1200" b="1" i="0">
-                <a:solidFill>
-                  <a:srgbClr val="64748B"/>
-                </a:solidFill>
-                <a:latin typeface="Montserrat"/>
-              </a:rPr>
-              <a:t>APARTADO 4.8 · SELLADOS</a:t>
+              <a:rPr sz="1300" b="1" i="0">
+                <a:solidFill>
+                  <a:srgbClr val="E8801A"/>
+                </a:solidFill>
+                <a:latin typeface="Montserrat"/>
+              </a:rPr>
+              <a:t>APARTADO 4.7 · MOP DE 2 A 5 BAR</a:t>
             </a:r>
           </a:p>
         </p:txBody>
@@ -8457,26 +8920,70 @@
           <a:lstStyle/>
           <a:p>
             <a:r>
-              <a:rPr sz="2700" b="1" i="0">
+              <a:rPr sz="2800" b="1" i="0">
                 <a:solidFill>
                   <a:srgbClr val="1E2761"/>
                 </a:solidFill>
                 <a:latin typeface="Montserrat"/>
               </a:rPr>
-              <a:t>Sellar para que la fuga no viaje</a:t>
-            </a:r>
-          </a:p>
-        </p:txBody>
-      </p:sp>
-      <p:sp>
-        <p:nvSpPr>
-          <p:cNvPr id="7" name="TextBox 6"/>
+              <a:t>A más presión, más al aire libre</a:t>
+            </a:r>
+          </a:p>
+        </p:txBody>
+      </p:sp>
+      <p:sp>
+        <p:nvSpPr>
+          <p:cNvPr id="7" name="Rounded Rectangle 6"/>
+          <p:cNvSpPr/>
+          <p:nvPr/>
+        </p:nvSpPr>
+        <p:spPr>
+          <a:xfrm>
+            <a:off x="868680" y="1627632"/>
+            <a:ext cx="2011680" cy="73152"/>
+          </a:xfrm>
+          <a:prstGeom prst="roundRect">
+            <a:avLst/>
+          </a:prstGeom>
+          <a:solidFill>
+            <a:srgbClr val="E8801A"/>
+          </a:solidFill>
+          <a:ln>
+            <a:noFill/>
+          </a:ln>
+          <a:effectLst/>
+        </p:spPr>
+        <p:style>
+          <a:lnRef idx="1">
+            <a:schemeClr val="accent1"/>
+          </a:lnRef>
+          <a:fillRef idx="3">
+            <a:schemeClr val="accent1"/>
+          </a:fillRef>
+          <a:effectRef idx="2">
+            <a:schemeClr val="accent1"/>
+          </a:effectRef>
+          <a:fontRef idx="minor">
+            <a:schemeClr val="lt1"/>
+          </a:fontRef>
+        </p:style>
+        <p:txBody>
+          <a:bodyPr rtlCol="0" anchor="ctr"/>
+          <a:lstStyle/>
+          <a:p>
+            <a:pPr algn="ctr"/>
+          </a:p>
+        </p:txBody>
+      </p:sp>
+      <p:sp>
+        <p:nvSpPr>
+          <p:cNvPr id="8" name="TextBox 7"/>
           <p:cNvSpPr txBox="1"/>
           <p:nvPr/>
         </p:nvSpPr>
         <p:spPr>
           <a:xfrm>
-            <a:off x="822960" y="1920240"/>
+            <a:off x="822960" y="1965960"/>
             <a:ext cx="4983480" cy="4206240"/>
           </a:xfrm>
           <a:prstGeom prst="rect">
@@ -8492,17 +8999,17 @@
           <a:p>
             <a:pPr>
               <a:spcAft>
-                <a:spcPts val="1000"/>
+                <a:spcPts val="1100"/>
               </a:spcAft>
             </a:pPr>
             <a:r>
               <a:rPr sz="1600" b="1" i="0">
                 <a:solidFill>
-                  <a:srgbClr val="2E3A80"/>
-                </a:solidFill>
-                <a:latin typeface="Montserrat"/>
-              </a:rPr>
-              <a:t>•  </a:t>
+                  <a:srgbClr val="E8801A"/>
+                </a:solidFill>
+                <a:latin typeface="Montserrat"/>
+              </a:rPr>
+              <a:t>▸  </a:t>
             </a:r>
             <a:r>
               <a:rPr sz="1600" b="0" i="0">
@@ -8511,23 +9018,23 @@
                 </a:solidFill>
                 <a:latin typeface="Montserrat"/>
               </a:rPr>
-              <a:t>Sella entrada y salida del armario</a:t>
+              <a:t>Por el exterior: fachada, patio, aire libre</a:t>
             </a:r>
           </a:p>
           <a:p>
             <a:pPr>
               <a:spcAft>
-                <a:spcPts val="1000"/>
+                <a:spcPts val="1100"/>
               </a:spcAft>
             </a:pPr>
             <a:r>
               <a:rPr sz="1600" b="1" i="0">
                 <a:solidFill>
-                  <a:srgbClr val="2E3A80"/>
-                </a:solidFill>
-                <a:latin typeface="Montserrat"/>
-              </a:rPr>
-              <a:t>•  </a:t>
+                  <a:srgbClr val="E8801A"/>
+                </a:solidFill>
+                <a:latin typeface="Montserrat"/>
+              </a:rPr>
+              <a:t>▸  </a:t>
             </a:r>
             <a:r>
               <a:rPr sz="1600" b="0" i="0">
@@ -8536,23 +9043,23 @@
                 </a:solidFill>
                 <a:latin typeface="Montserrat"/>
               </a:rPr>
-              <a:t>Vaina contra recinto y tubo contra vaina</a:t>
+              <a:t>Dentro solo si es inevitable</a:t>
             </a:r>
           </a:p>
           <a:p>
             <a:pPr>
               <a:spcAft>
-                <a:spcPts val="1000"/>
+                <a:spcPts val="1100"/>
               </a:spcAft>
             </a:pPr>
             <a:r>
               <a:rPr sz="1600" b="1" i="0">
                 <a:solidFill>
-                  <a:srgbClr val="2E3A80"/>
-                </a:solidFill>
-                <a:latin typeface="Montserrat"/>
-              </a:rPr>
-              <a:t>•  </a:t>
+                  <a:srgbClr val="E8801A"/>
+                </a:solidFill>
+                <a:latin typeface="Montserrat"/>
+              </a:rPr>
+              <a:t>▸  </a:t>
             </a:r>
             <a:r>
               <a:rPr sz="1600" b="0" i="0">
@@ -8561,14 +9068,14 @@
                 </a:solidFill>
                 <a:latin typeface="Montserrat"/>
               </a:rPr>
-              <a:t>Juntas de elastómero o pasta sellante</a:t>
-            </a:r>
-          </a:p>
-        </p:txBody>
-      </p:sp>
-      <p:sp>
-        <p:nvSpPr>
-          <p:cNvPr id="8" name="imgph" descr="IMGQ:sealant applied around pipe wall penetration"/>
+              <a:t>Y entonces, envainado</a:t>
+            </a:r>
+          </a:p>
+        </p:txBody>
+      </p:sp>
+      <p:sp>
+        <p:nvSpPr>
+          <p:cNvPr id="9" name="imgph" descr="IMGQ:gas pipe on building facade exterior"/>
           <p:cNvSpPr/>
           <p:nvPr/>
         </p:nvSpPr>
@@ -8614,7 +9121,7 @@
       </p:sp>
       <p:sp>
         <p:nvSpPr>
-          <p:cNvPr id="9" name="TextBox 8"/>
+          <p:cNvPr id="10" name="TextBox 9"/>
           <p:cNvSpPr txBox="1"/>
           <p:nvPr/>
         </p:nvSpPr>
@@ -8654,7 +9161,7 @@
                 </a:solidFill>
                 <a:latin typeface="Montserrat"/>
               </a:rPr>
-              <a:t>sealant applied around pipe wall penetration</a:t>
+              <a:t>gas pipe on building facade exterior</a:t>
             </a:r>
           </a:p>
         </p:txBody>
@@ -8751,7 +9258,7 @@
                 </a:solidFill>
                 <a:latin typeface="Montserrat"/>
               </a:rPr>
-              <a:t>019 / 020</a:t>
+              <a:t>019 / 021</a:t>
             </a:r>
           </a:p>
         </p:txBody>
@@ -8799,7 +9306,7 @@
         <p:spPr>
           <a:xfrm>
             <a:off x="822960" y="457200"/>
-            <a:ext cx="8229600" cy="365760"/>
+            <a:ext cx="10058400" cy="365760"/>
           </a:xfrm>
           <a:prstGeom prst="rect">
             <a:avLst/>
@@ -8813,13 +9320,13 @@
           <a:lstStyle/>
           <a:p>
             <a:r>
-              <a:rPr sz="1200" b="1" i="0">
-                <a:solidFill>
-                  <a:srgbClr val="64748B"/>
-                </a:solidFill>
-                <a:latin typeface="Montserrat"/>
-              </a:rPr>
-              <a:t>DOCUMENTACIÓN</a:t>
+              <a:rPr sz="1300" b="1" i="0">
+                <a:solidFill>
+                  <a:srgbClr val="E8801A"/>
+                </a:solidFill>
+                <a:latin typeface="Montserrat"/>
+              </a:rPr>
+              <a:t>APARTADO 4.8 · SELLADOS</a:t>
             </a:r>
           </a:p>
         </p:txBody>
@@ -8847,26 +9354,70 @@
           <a:lstStyle/>
           <a:p>
             <a:r>
-              <a:rPr sz="2700" b="1" i="0">
+              <a:rPr sz="2800" b="1" i="0">
                 <a:solidFill>
                   <a:srgbClr val="1E2761"/>
                 </a:solidFill>
                 <a:latin typeface="Montserrat"/>
               </a:rPr>
-              <a:t>El trazado, en el certificado</a:t>
-            </a:r>
-          </a:p>
-        </p:txBody>
-      </p:sp>
-      <p:sp>
-        <p:nvSpPr>
-          <p:cNvPr id="7" name="TextBox 6"/>
+              <a:t>Sellar para que la fuga no viaje</a:t>
+            </a:r>
+          </a:p>
+        </p:txBody>
+      </p:sp>
+      <p:sp>
+        <p:nvSpPr>
+          <p:cNvPr id="7" name="Rounded Rectangle 6"/>
+          <p:cNvSpPr/>
+          <p:nvPr/>
+        </p:nvSpPr>
+        <p:spPr>
+          <a:xfrm>
+            <a:off x="868680" y="1627632"/>
+            <a:ext cx="2011680" cy="73152"/>
+          </a:xfrm>
+          <a:prstGeom prst="roundRect">
+            <a:avLst/>
+          </a:prstGeom>
+          <a:solidFill>
+            <a:srgbClr val="E8801A"/>
+          </a:solidFill>
+          <a:ln>
+            <a:noFill/>
+          </a:ln>
+          <a:effectLst/>
+        </p:spPr>
+        <p:style>
+          <a:lnRef idx="1">
+            <a:schemeClr val="accent1"/>
+          </a:lnRef>
+          <a:fillRef idx="3">
+            <a:schemeClr val="accent1"/>
+          </a:fillRef>
+          <a:effectRef idx="2">
+            <a:schemeClr val="accent1"/>
+          </a:effectRef>
+          <a:fontRef idx="minor">
+            <a:schemeClr val="lt1"/>
+          </a:fontRef>
+        </p:style>
+        <p:txBody>
+          <a:bodyPr rtlCol="0" anchor="ctr"/>
+          <a:lstStyle/>
+          <a:p>
+            <a:pPr algn="ctr"/>
+          </a:p>
+        </p:txBody>
+      </p:sp>
+      <p:sp>
+        <p:nvSpPr>
+          <p:cNvPr id="8" name="TextBox 7"/>
           <p:cNvSpPr txBox="1"/>
           <p:nvPr/>
         </p:nvSpPr>
         <p:spPr>
           <a:xfrm>
-            <a:off x="822960" y="1920240"/>
+            <a:off x="822960" y="1965960"/>
             <a:ext cx="4983480" cy="4206240"/>
           </a:xfrm>
           <a:prstGeom prst="rect">
@@ -8882,17 +9433,17 @@
           <a:p>
             <a:pPr>
               <a:spcAft>
-                <a:spcPts val="1000"/>
+                <a:spcPts val="1100"/>
               </a:spcAft>
             </a:pPr>
             <a:r>
               <a:rPr sz="1600" b="1" i="0">
                 <a:solidFill>
-                  <a:srgbClr val="2E3A80"/>
-                </a:solidFill>
-                <a:latin typeface="Montserrat"/>
-              </a:rPr>
-              <a:t>•  </a:t>
+                  <a:srgbClr val="E8801A"/>
+                </a:solidFill>
+                <a:latin typeface="Montserrat"/>
+              </a:rPr>
+              <a:t>▸  </a:t>
             </a:r>
             <a:r>
               <a:rPr sz="1600" b="0" i="0">
@@ -8901,23 +9452,23 @@
                 </a:solidFill>
                 <a:latin typeface="Montserrat"/>
               </a:rPr>
-              <a:t>Croquis del trazado en el modelo IRG</a:t>
+              <a:t>Sella entrada y salida del armario</a:t>
             </a:r>
           </a:p>
           <a:p>
             <a:pPr>
               <a:spcAft>
-                <a:spcPts val="1000"/>
+                <a:spcPts val="1100"/>
               </a:spcAft>
             </a:pPr>
             <a:r>
               <a:rPr sz="1600" b="1" i="0">
                 <a:solidFill>
-                  <a:srgbClr val="2E3A80"/>
-                </a:solidFill>
-                <a:latin typeface="Montserrat"/>
-              </a:rPr>
-              <a:t>•  </a:t>
+                  <a:srgbClr val="E8801A"/>
+                </a:solidFill>
+                <a:latin typeface="Montserrat"/>
+              </a:rPr>
+              <a:t>▸  </a:t>
             </a:r>
             <a:r>
               <a:rPr sz="1600" b="0" i="0">
@@ -8926,23 +9477,23 @@
                 </a:solidFill>
                 <a:latin typeface="Montserrat"/>
               </a:rPr>
-              <a:t>Lo que se tapa, se prueba antes</a:t>
+              <a:t>Vaina contra recinto y tubo contra vaina</a:t>
             </a:r>
           </a:p>
           <a:p>
             <a:pPr>
               <a:spcAft>
-                <a:spcPts val="1000"/>
+                <a:spcPts val="1100"/>
               </a:spcAft>
             </a:pPr>
             <a:r>
               <a:rPr sz="1600" b="1" i="0">
                 <a:solidFill>
-                  <a:srgbClr val="2E3A80"/>
-                </a:solidFill>
-                <a:latin typeface="Montserrat"/>
-              </a:rPr>
-              <a:t>•  </a:t>
+                  <a:srgbClr val="E8801A"/>
+                </a:solidFill>
+                <a:latin typeface="Montserrat"/>
+              </a:rPr>
+              <a:t>▸  </a:t>
             </a:r>
             <a:r>
               <a:rPr sz="1600" b="0" i="0">
@@ -8951,14 +9502,14 @@
                 </a:solidFill>
                 <a:latin typeface="Montserrat"/>
               </a:rPr>
-              <a:t>Firma la empresa instaladora habilitada</a:t>
-            </a:r>
-          </a:p>
-        </p:txBody>
-      </p:sp>
-      <p:sp>
-        <p:nvSpPr>
-          <p:cNvPr id="8" name="imgph" descr="IMGQ:installer with tablet inspecting gas pipes"/>
+              <a:t>Juntas de elastómero o pasta sellante</a:t>
+            </a:r>
+          </a:p>
+        </p:txBody>
+      </p:sp>
+      <p:sp>
+        <p:nvSpPr>
+          <p:cNvPr id="9" name="imgph" descr="IMGQ:sealant applied around pipe wall penetration"/>
           <p:cNvSpPr/>
           <p:nvPr/>
         </p:nvSpPr>
@@ -9004,7 +9555,7 @@
       </p:sp>
       <p:sp>
         <p:nvSpPr>
-          <p:cNvPr id="9" name="TextBox 8"/>
+          <p:cNvPr id="10" name="TextBox 9"/>
           <p:cNvSpPr txBox="1"/>
           <p:nvPr/>
         </p:nvSpPr>
@@ -9044,7 +9595,7 @@
                 </a:solidFill>
                 <a:latin typeface="Montserrat"/>
               </a:rPr>
-              <a:t>installer with tablet inspecting gas pipes</a:t>
+              <a:t>sealant applied around pipe wall penetration</a:t>
             </a:r>
           </a:p>
         </p:txBody>
@@ -9141,7 +9692,7 @@
                 </a:solidFill>
                 <a:latin typeface="Montserrat"/>
               </a:rPr>
-              <a:t>002 / 020</a:t>
+              <a:t>002 / 021</a:t>
             </a:r>
           </a:p>
         </p:txBody>
@@ -9205,7 +9756,7 @@
             <a:r>
               <a:rPr sz="2700" b="1" i="0">
                 <a:solidFill>
-                  <a:srgbClr val="1E2761"/>
+                  <a:srgbClr val="E8801A"/>
                 </a:solidFill>
                 <a:latin typeface="Montserrat"/>
               </a:rPr>
@@ -9217,6 +9768,50 @@
       <p:sp>
         <p:nvSpPr>
           <p:cNvPr id="6" name="Rounded Rectangle 5"/>
+          <p:cNvSpPr/>
+          <p:nvPr/>
+        </p:nvSpPr>
+        <p:spPr>
+          <a:xfrm>
+            <a:off x="868680" y="1234440"/>
+            <a:ext cx="1463040" cy="73152"/>
+          </a:xfrm>
+          <a:prstGeom prst="roundRect">
+            <a:avLst/>
+          </a:prstGeom>
+          <a:solidFill>
+            <a:srgbClr val="1E2761"/>
+          </a:solidFill>
+          <a:ln>
+            <a:noFill/>
+          </a:ln>
+          <a:effectLst/>
+        </p:spPr>
+        <p:style>
+          <a:lnRef idx="1">
+            <a:schemeClr val="accent1"/>
+          </a:lnRef>
+          <a:fillRef idx="3">
+            <a:schemeClr val="accent1"/>
+          </a:fillRef>
+          <a:effectRef idx="2">
+            <a:schemeClr val="accent1"/>
+          </a:effectRef>
+          <a:fontRef idx="minor">
+            <a:schemeClr val="lt1"/>
+          </a:fontRef>
+        </p:style>
+        <p:txBody>
+          <a:bodyPr rtlCol="0" anchor="ctr"/>
+          <a:lstStyle/>
+          <a:p>
+            <a:pPr algn="ctr"/>
+          </a:p>
+        </p:txBody>
+      </p:sp>
+      <p:sp>
+        <p:nvSpPr>
+          <p:cNvPr id="7" name="Rounded Rectangle 6"/>
           <p:cNvSpPr/>
           <p:nvPr/>
         </p:nvSpPr>
@@ -9262,7 +9857,7 @@
       </p:sp>
       <p:sp>
         <p:nvSpPr>
-          <p:cNvPr id="7" name="TextBox 6"/>
+          <p:cNvPr id="8" name="TextBox 7"/>
           <p:cNvSpPr txBox="1"/>
           <p:nvPr/>
         </p:nvSpPr>
@@ -9297,7 +9892,7 @@
       </p:sp>
       <p:sp>
         <p:nvSpPr>
-          <p:cNvPr id="8" name="TextBox 7"/>
+          <p:cNvPr id="9" name="TextBox 8"/>
           <p:cNvSpPr txBox="1"/>
           <p:nvPr/>
         </p:nvSpPr>
@@ -9332,7 +9927,7 @@
       </p:sp>
       <p:sp>
         <p:nvSpPr>
-          <p:cNvPr id="9" name="Rounded Rectangle 8"/>
+          <p:cNvPr id="10" name="Rounded Rectangle 9"/>
           <p:cNvSpPr/>
           <p:nvPr/>
         </p:nvSpPr>
@@ -9378,7 +9973,7 @@
       </p:sp>
       <p:sp>
         <p:nvSpPr>
-          <p:cNvPr id="10" name="TextBox 9"/>
+          <p:cNvPr id="11" name="TextBox 10"/>
           <p:cNvSpPr txBox="1"/>
           <p:nvPr/>
         </p:nvSpPr>
@@ -9413,7 +10008,7 @@
       </p:sp>
       <p:sp>
         <p:nvSpPr>
-          <p:cNvPr id="11" name="TextBox 10"/>
+          <p:cNvPr id="12" name="TextBox 11"/>
           <p:cNvSpPr txBox="1"/>
           <p:nvPr/>
         </p:nvSpPr>
@@ -9448,7 +10043,7 @@
       </p:sp>
       <p:sp>
         <p:nvSpPr>
-          <p:cNvPr id="12" name="Rounded Rectangle 11"/>
+          <p:cNvPr id="13" name="Rounded Rectangle 12"/>
           <p:cNvSpPr/>
           <p:nvPr/>
         </p:nvSpPr>
@@ -9494,7 +10089,7 @@
       </p:sp>
       <p:sp>
         <p:nvSpPr>
-          <p:cNvPr id="13" name="TextBox 12"/>
+          <p:cNvPr id="14" name="TextBox 13"/>
           <p:cNvSpPr txBox="1"/>
           <p:nvPr/>
         </p:nvSpPr>
@@ -9529,7 +10124,7 @@
       </p:sp>
       <p:sp>
         <p:nvSpPr>
-          <p:cNvPr id="14" name="TextBox 13"/>
+          <p:cNvPr id="15" name="TextBox 14"/>
           <p:cNvSpPr txBox="1"/>
           <p:nvPr/>
         </p:nvSpPr>
@@ -9595,6 +10190,440 @@
             <a:avLst/>
           </a:prstGeom>
           <a:solidFill>
+            <a:srgbClr val="FFFFFF"/>
+          </a:solidFill>
+          <a:ln>
+            <a:noFill/>
+          </a:ln>
+          <a:effectLst/>
+        </p:spPr>
+        <p:style>
+          <a:lnRef idx="1">
+            <a:schemeClr val="accent1"/>
+          </a:lnRef>
+          <a:fillRef idx="3">
+            <a:schemeClr val="accent1"/>
+          </a:fillRef>
+          <a:effectRef idx="2">
+            <a:schemeClr val="accent1"/>
+          </a:effectRef>
+          <a:fontRef idx="minor">
+            <a:schemeClr val="lt1"/>
+          </a:fontRef>
+        </p:style>
+        <p:txBody>
+          <a:bodyPr rtlCol="0" anchor="ctr"/>
+          <a:lstStyle/>
+          <a:p>
+            <a:pPr algn="ctr"/>
+          </a:p>
+        </p:txBody>
+      </p:sp>
+      <p:sp>
+        <p:nvSpPr>
+          <p:cNvPr id="3" name="TextBox 2"/>
+          <p:cNvSpPr txBox="1"/>
+          <p:nvPr/>
+        </p:nvSpPr>
+        <p:spPr>
+          <a:xfrm>
+            <a:off x="10607040" y="320040"/>
+            <a:ext cx="1371600" cy="365760"/>
+          </a:xfrm>
+          <a:prstGeom prst="rect">
+            <a:avLst/>
+          </a:prstGeom>
+          <a:noFill/>
+        </p:spPr>
+        <p:txBody>
+          <a:bodyPr wrap="square">
+            <a:spAutoFit/>
+          </a:bodyPr>
+          <a:lstStyle/>
+          <a:p>
+            <a:pPr algn="r"/>
+            <a:r>
+              <a:rPr sz="1000" b="1" i="0">
+                <a:solidFill>
+                  <a:srgbClr val="64748B"/>
+                </a:solidFill>
+                <a:latin typeface="Montserrat"/>
+              </a:rPr>
+              <a:t>020 / 021</a:t>
+            </a:r>
+          </a:p>
+        </p:txBody>
+      </p:sp>
+      <p:sp>
+        <p:nvSpPr>
+          <p:cNvPr id="4" name="TextBox 3"/>
+          <p:cNvSpPr txBox="1"/>
+          <p:nvPr/>
+        </p:nvSpPr>
+        <p:spPr>
+          <a:xfrm>
+            <a:off x="457200" y="6419088"/>
+            <a:ext cx="8229600" cy="365760"/>
+          </a:xfrm>
+          <a:prstGeom prst="rect">
+            <a:avLst/>
+          </a:prstGeom>
+          <a:noFill/>
+        </p:spPr>
+        <p:txBody>
+          <a:bodyPr wrap="square">
+            <a:spAutoFit/>
+          </a:bodyPr>
+          <a:lstStyle/>
+          <a:p>
+            <a:r>
+              <a:rPr sz="900" b="0" i="0">
+                <a:solidFill>
+                  <a:srgbClr val="64748B"/>
+                </a:solidFill>
+                <a:latin typeface="Montserrat"/>
+              </a:rPr>
+              <a:t>Curso Gas B · Tema 11 · UNE 60670-4 · Diseño y construcción</a:t>
+            </a:r>
+          </a:p>
+        </p:txBody>
+      </p:sp>
+      <p:sp>
+        <p:nvSpPr>
+          <p:cNvPr id="5" name="TextBox 4"/>
+          <p:cNvSpPr txBox="1"/>
+          <p:nvPr/>
+        </p:nvSpPr>
+        <p:spPr>
+          <a:xfrm>
+            <a:off x="822960" y="457200"/>
+            <a:ext cx="10058400" cy="365760"/>
+          </a:xfrm>
+          <a:prstGeom prst="rect">
+            <a:avLst/>
+          </a:prstGeom>
+          <a:noFill/>
+        </p:spPr>
+        <p:txBody>
+          <a:bodyPr wrap="square">
+            <a:spAutoFit/>
+          </a:bodyPr>
+          <a:lstStyle/>
+          <a:p>
+            <a:r>
+              <a:rPr sz="1300" b="1" i="0">
+                <a:solidFill>
+                  <a:srgbClr val="E8801A"/>
+                </a:solidFill>
+                <a:latin typeface="Montserrat"/>
+              </a:rPr>
+              <a:t>DOCUMENTACIÓN</a:t>
+            </a:r>
+          </a:p>
+        </p:txBody>
+      </p:sp>
+      <p:sp>
+        <p:nvSpPr>
+          <p:cNvPr id="6" name="TextBox 5"/>
+          <p:cNvSpPr txBox="1"/>
+          <p:nvPr/>
+        </p:nvSpPr>
+        <p:spPr>
+          <a:xfrm>
+            <a:off x="822960" y="868680"/>
+            <a:ext cx="10515600" cy="914400"/>
+          </a:xfrm>
+          <a:prstGeom prst="rect">
+            <a:avLst/>
+          </a:prstGeom>
+          <a:noFill/>
+        </p:spPr>
+        <p:txBody>
+          <a:bodyPr wrap="square">
+            <a:spAutoFit/>
+          </a:bodyPr>
+          <a:lstStyle/>
+          <a:p>
+            <a:r>
+              <a:rPr sz="2800" b="1" i="0">
+                <a:solidFill>
+                  <a:srgbClr val="1E2761"/>
+                </a:solidFill>
+                <a:latin typeface="Montserrat"/>
+              </a:rPr>
+              <a:t>El trazado, en el certificado</a:t>
+            </a:r>
+          </a:p>
+        </p:txBody>
+      </p:sp>
+      <p:sp>
+        <p:nvSpPr>
+          <p:cNvPr id="7" name="Rounded Rectangle 6"/>
+          <p:cNvSpPr/>
+          <p:nvPr/>
+        </p:nvSpPr>
+        <p:spPr>
+          <a:xfrm>
+            <a:off x="868680" y="1627632"/>
+            <a:ext cx="2011680" cy="73152"/>
+          </a:xfrm>
+          <a:prstGeom prst="roundRect">
+            <a:avLst/>
+          </a:prstGeom>
+          <a:solidFill>
+            <a:srgbClr val="E8801A"/>
+          </a:solidFill>
+          <a:ln>
+            <a:noFill/>
+          </a:ln>
+          <a:effectLst/>
+        </p:spPr>
+        <p:style>
+          <a:lnRef idx="1">
+            <a:schemeClr val="accent1"/>
+          </a:lnRef>
+          <a:fillRef idx="3">
+            <a:schemeClr val="accent1"/>
+          </a:fillRef>
+          <a:effectRef idx="2">
+            <a:schemeClr val="accent1"/>
+          </a:effectRef>
+          <a:fontRef idx="minor">
+            <a:schemeClr val="lt1"/>
+          </a:fontRef>
+        </p:style>
+        <p:txBody>
+          <a:bodyPr rtlCol="0" anchor="ctr"/>
+          <a:lstStyle/>
+          <a:p>
+            <a:pPr algn="ctr"/>
+          </a:p>
+        </p:txBody>
+      </p:sp>
+      <p:sp>
+        <p:nvSpPr>
+          <p:cNvPr id="8" name="TextBox 7"/>
+          <p:cNvSpPr txBox="1"/>
+          <p:nvPr/>
+        </p:nvSpPr>
+        <p:spPr>
+          <a:xfrm>
+            <a:off x="822960" y="1965960"/>
+            <a:ext cx="4983480" cy="4206240"/>
+          </a:xfrm>
+          <a:prstGeom prst="rect">
+            <a:avLst/>
+          </a:prstGeom>
+          <a:noFill/>
+        </p:spPr>
+        <p:txBody>
+          <a:bodyPr wrap="square">
+            <a:spAutoFit/>
+          </a:bodyPr>
+          <a:lstStyle/>
+          <a:p>
+            <a:pPr>
+              <a:spcAft>
+                <a:spcPts val="1100"/>
+              </a:spcAft>
+            </a:pPr>
+            <a:r>
+              <a:rPr sz="1600" b="1" i="0">
+                <a:solidFill>
+                  <a:srgbClr val="E8801A"/>
+                </a:solidFill>
+                <a:latin typeface="Montserrat"/>
+              </a:rPr>
+              <a:t>▸  </a:t>
+            </a:r>
+            <a:r>
+              <a:rPr sz="1600" b="0" i="0">
+                <a:solidFill>
+                  <a:srgbClr val="1B2330"/>
+                </a:solidFill>
+                <a:latin typeface="Montserrat"/>
+              </a:rPr>
+              <a:t>Croquis del trazado en el modelo IRG</a:t>
+            </a:r>
+          </a:p>
+          <a:p>
+            <a:pPr>
+              <a:spcAft>
+                <a:spcPts val="1100"/>
+              </a:spcAft>
+            </a:pPr>
+            <a:r>
+              <a:rPr sz="1600" b="1" i="0">
+                <a:solidFill>
+                  <a:srgbClr val="E8801A"/>
+                </a:solidFill>
+                <a:latin typeface="Montserrat"/>
+              </a:rPr>
+              <a:t>▸  </a:t>
+            </a:r>
+            <a:r>
+              <a:rPr sz="1600" b="0" i="0">
+                <a:solidFill>
+                  <a:srgbClr val="1B2330"/>
+                </a:solidFill>
+                <a:latin typeface="Montserrat"/>
+              </a:rPr>
+              <a:t>Lo que se tapa, se prueba antes</a:t>
+            </a:r>
+          </a:p>
+          <a:p>
+            <a:pPr>
+              <a:spcAft>
+                <a:spcPts val="1100"/>
+              </a:spcAft>
+            </a:pPr>
+            <a:r>
+              <a:rPr sz="1600" b="1" i="0">
+                <a:solidFill>
+                  <a:srgbClr val="E8801A"/>
+                </a:solidFill>
+                <a:latin typeface="Montserrat"/>
+              </a:rPr>
+              <a:t>▸  </a:t>
+            </a:r>
+            <a:r>
+              <a:rPr sz="1600" b="0" i="0">
+                <a:solidFill>
+                  <a:srgbClr val="1B2330"/>
+                </a:solidFill>
+                <a:latin typeface="Montserrat"/>
+              </a:rPr>
+              <a:t>Firma la empresa instaladora habilitada</a:t>
+            </a:r>
+          </a:p>
+        </p:txBody>
+      </p:sp>
+      <p:sp>
+        <p:nvSpPr>
+          <p:cNvPr id="9" name="imgph" descr="IMGQ:installer with tablet inspecting gas pipes"/>
+          <p:cNvSpPr/>
+          <p:nvPr/>
+        </p:nvSpPr>
+        <p:spPr>
+          <a:xfrm>
+            <a:off x="5806440" y="1051560"/>
+            <a:ext cx="5298947" cy="4629150"/>
+          </a:xfrm>
+          <a:prstGeom prst="roundRect">
+            <a:avLst/>
+          </a:prstGeom>
+          <a:solidFill>
+            <a:srgbClr val="F3F6FB"/>
+          </a:solidFill>
+          <a:ln w="12700">
+            <a:solidFill>
+              <a:srgbClr val="C7D2E6"/>
+            </a:solidFill>
+          </a:ln>
+          <a:effectLst/>
+        </p:spPr>
+        <p:style>
+          <a:lnRef idx="1">
+            <a:schemeClr val="accent1"/>
+          </a:lnRef>
+          <a:fillRef idx="3">
+            <a:schemeClr val="accent1"/>
+          </a:fillRef>
+          <a:effectRef idx="2">
+            <a:schemeClr val="accent1"/>
+          </a:effectRef>
+          <a:fontRef idx="minor">
+            <a:schemeClr val="lt1"/>
+          </a:fontRef>
+        </p:style>
+        <p:txBody>
+          <a:bodyPr rtlCol="0" anchor="ctr"/>
+          <a:lstStyle/>
+          <a:p>
+            <a:pPr algn="ctr"/>
+          </a:p>
+        </p:txBody>
+      </p:sp>
+      <p:sp>
+        <p:nvSpPr>
+          <p:cNvPr id="10" name="TextBox 9"/>
+          <p:cNvSpPr txBox="1"/>
+          <p:nvPr/>
+        </p:nvSpPr>
+        <p:spPr>
+          <a:xfrm>
+            <a:off x="6080760" y="2726055"/>
+            <a:ext cx="4750307" cy="1280160"/>
+          </a:xfrm>
+          <a:prstGeom prst="rect">
+            <a:avLst/>
+          </a:prstGeom>
+          <a:noFill/>
+        </p:spPr>
+        <p:txBody>
+          <a:bodyPr wrap="square">
+            <a:spAutoFit/>
+          </a:bodyPr>
+          <a:lstStyle/>
+          <a:p>
+            <a:pPr algn="ctr"/>
+            <a:r>
+              <a:rPr sz="1400" b="1" i="0">
+                <a:solidFill>
+                  <a:srgbClr val="64748B"/>
+                </a:solidFill>
+                <a:latin typeface="Montserrat"/>
+              </a:rPr>
+              <a:t>IMAGEN REALISTA</a:t>
+            </a:r>
+          </a:p>
+          <a:p>
+            <a:pPr algn="ctr"/>
+            <a:r>
+              <a:rPr sz="1100" b="0" i="1">
+                <a:solidFill>
+                  <a:srgbClr val="64748B"/>
+                </a:solidFill>
+                <a:latin typeface="Montserrat"/>
+              </a:rPr>
+              <a:t>installer with tablet inspecting gas pipes</a:t>
+            </a:r>
+          </a:p>
+        </p:txBody>
+      </p:sp>
+    </p:spTree>
+  </p:cSld>
+  <p:clrMapOvr>
+    <a:masterClrMapping/>
+  </p:clrMapOvr>
+</p:sld>
+</file>
+
+<file path=ppt/slides/slide21.xml><?xml version="1.0" encoding="utf-8"?>
+<p:sld xmlns:a="http://schemas.openxmlformats.org/drawingml/2006/main" xmlns:p="http://schemas.openxmlformats.org/presentationml/2006/main" xmlns:r="http://schemas.openxmlformats.org/officeDocument/2006/relationships">
+  <p:cSld>
+    <p:spTree>
+      <p:nvGrpSpPr>
+        <p:cNvPr id="1" name=""/>
+        <p:cNvGrpSpPr/>
+        <p:nvPr/>
+      </p:nvGrpSpPr>
+      <p:grpSpPr/>
+      <p:sp>
+        <p:nvSpPr>
+          <p:cNvPr id="2" name="Rectangle 1"/>
+          <p:cNvSpPr/>
+          <p:nvPr/>
+        </p:nvSpPr>
+        <p:spPr>
+          <a:xfrm>
+            <a:off x="0" y="0"/>
+            <a:ext cx="12191695" cy="6858000"/>
+          </a:xfrm>
+          <a:prstGeom prst="rect">
+            <a:avLst/>
+          </a:prstGeom>
+          <a:solidFill>
             <a:srgbClr val="1E2761"/>
           </a:solidFill>
           <a:ln>
@@ -9649,7 +10678,7 @@
             <a:r>
               <a:rPr sz="1400" b="1" i="0">
                 <a:solidFill>
-                  <a:srgbClr val="CADCFC"/>
+                  <a:srgbClr val="F4A24C"/>
                 </a:solidFill>
                 <a:latin typeface="Montserrat"/>
               </a:rPr>
@@ -9660,13 +10689,57 @@
       </p:sp>
       <p:sp>
         <p:nvSpPr>
-          <p:cNvPr id="4" name="TextBox 3"/>
+          <p:cNvPr id="4" name="Rounded Rectangle 3"/>
+          <p:cNvSpPr/>
+          <p:nvPr/>
+        </p:nvSpPr>
+        <p:spPr>
+          <a:xfrm>
+            <a:off x="868680" y="1051560"/>
+            <a:ext cx="1463040" cy="82296"/>
+          </a:xfrm>
+          <a:prstGeom prst="roundRect">
+            <a:avLst/>
+          </a:prstGeom>
+          <a:solidFill>
+            <a:srgbClr val="E8801A"/>
+          </a:solidFill>
+          <a:ln>
+            <a:noFill/>
+          </a:ln>
+          <a:effectLst/>
+        </p:spPr>
+        <p:style>
+          <a:lnRef idx="1">
+            <a:schemeClr val="accent1"/>
+          </a:lnRef>
+          <a:fillRef idx="3">
+            <a:schemeClr val="accent1"/>
+          </a:fillRef>
+          <a:effectRef idx="2">
+            <a:schemeClr val="accent1"/>
+          </a:effectRef>
+          <a:fontRef idx="minor">
+            <a:schemeClr val="lt1"/>
+          </a:fontRef>
+        </p:style>
+        <p:txBody>
+          <a:bodyPr rtlCol="0" anchor="ctr"/>
+          <a:lstStyle/>
+          <a:p>
+            <a:pPr algn="ctr"/>
+          </a:p>
+        </p:txBody>
+      </p:sp>
+      <p:sp>
+        <p:nvSpPr>
+          <p:cNvPr id="5" name="TextBox 4"/>
           <p:cNvSpPr txBox="1"/>
           <p:nvPr/>
         </p:nvSpPr>
         <p:spPr>
           <a:xfrm>
-            <a:off x="822960" y="1143000"/>
+            <a:off x="822960" y="1234440"/>
             <a:ext cx="10515600" cy="1097280"/>
           </a:xfrm>
           <a:prstGeom prst="rect">
@@ -9694,14 +10767,14 @@
       </p:sp>
       <p:sp>
         <p:nvSpPr>
-          <p:cNvPr id="5" name="TextBox 4"/>
+          <p:cNvPr id="6" name="TextBox 5"/>
           <p:cNvSpPr txBox="1"/>
           <p:nvPr/>
         </p:nvSpPr>
         <p:spPr>
           <a:xfrm>
-            <a:off x="822960" y="2514600"/>
-            <a:ext cx="10515600" cy="2834640"/>
+            <a:off x="822960" y="2606040"/>
+            <a:ext cx="10515600" cy="2743200"/>
           </a:xfrm>
           <a:prstGeom prst="rect">
             <a:avLst/>
@@ -9722,7 +10795,7 @@
             <a:r>
               <a:rPr sz="2000" b="1" i="0">
                 <a:solidFill>
-                  <a:srgbClr val="CADCFC"/>
+                  <a:srgbClr val="F4A24C"/>
                 </a:solidFill>
                 <a:latin typeface="Montserrat"/>
               </a:rPr>
@@ -9747,7 +10820,7 @@
             <a:r>
               <a:rPr sz="2000" b="1" i="0">
                 <a:solidFill>
-                  <a:srgbClr val="CADCFC"/>
+                  <a:srgbClr val="F4A24C"/>
                 </a:solidFill>
                 <a:latin typeface="Montserrat"/>
               </a:rPr>
@@ -9772,7 +10845,7 @@
             <a:r>
               <a:rPr sz="2000" b="1" i="0">
                 <a:solidFill>
-                  <a:srgbClr val="CADCFC"/>
+                  <a:srgbClr val="F4A24C"/>
                 </a:solidFill>
                 <a:latin typeface="Montserrat"/>
               </a:rPr>
@@ -9797,7 +10870,7 @@
             <a:r>
               <a:rPr sz="2000" b="1" i="0">
                 <a:solidFill>
-                  <a:srgbClr val="CADCFC"/>
+                  <a:srgbClr val="F4A24C"/>
                 </a:solidFill>
                 <a:latin typeface="Montserrat"/>
               </a:rPr>
@@ -9817,20 +10890,20 @@
       </p:sp>
       <p:sp>
         <p:nvSpPr>
-          <p:cNvPr id="6" name="Rounded Rectangle 5"/>
+          <p:cNvPr id="7" name="Rounded Rectangle 6"/>
           <p:cNvSpPr/>
           <p:nvPr/>
         </p:nvSpPr>
         <p:spPr>
           <a:xfrm>
             <a:off x="822960" y="5532120"/>
-            <a:ext cx="10515600" cy="777240"/>
+            <a:ext cx="10515600" cy="822960"/>
           </a:xfrm>
           <a:prstGeom prst="roundRect">
             <a:avLst/>
           </a:prstGeom>
           <a:solidFill>
-            <a:srgbClr val="2E3A80"/>
+            <a:srgbClr val="E8801A"/>
           </a:solidFill>
           <a:ln>
             <a:noFill/>
@@ -9861,13 +10934,13 @@
       </p:sp>
       <p:sp>
         <p:nvSpPr>
-          <p:cNvPr id="7" name="TextBox 6"/>
+          <p:cNvPr id="8" name="TextBox 7"/>
           <p:cNvSpPr txBox="1"/>
           <p:nvPr/>
         </p:nvSpPr>
         <p:spPr>
           <a:xfrm>
-            <a:off x="1051560" y="5605272"/>
+            <a:off x="1051560" y="5623560"/>
             <a:ext cx="10058400" cy="640080"/>
           </a:xfrm>
           <a:prstGeom prst="rect">
@@ -9884,7 +10957,7 @@
             <a:r>
               <a:rPr sz="1500" b="1" i="1">
                 <a:solidFill>
-                  <a:srgbClr val="CADCFC"/>
+                  <a:srgbClr val="1E2761"/>
                 </a:solidFill>
                 <a:latin typeface="Montserrat"/>
               </a:rPr>
@@ -9985,7 +11058,7 @@
                 </a:solidFill>
                 <a:latin typeface="Montserrat"/>
               </a:rPr>
-              <a:t>003 / 020</a:t>
+              <a:t>003 / 021</a:t>
             </a:r>
           </a:p>
         </p:txBody>
@@ -10032,7 +11105,7 @@
         </p:nvSpPr>
         <p:spPr>
           <a:xfrm>
-            <a:off x="822960" y="457200"/>
+            <a:off x="822960" y="502920"/>
             <a:ext cx="8229600" cy="365760"/>
           </a:xfrm>
           <a:prstGeom prst="rect">
@@ -10047,13 +11120,13 @@
           <a:lstStyle/>
           <a:p>
             <a:r>
-              <a:rPr sz="1200" b="1" i="0">
-                <a:solidFill>
-                  <a:srgbClr val="64748B"/>
-                </a:solidFill>
-                <a:latin typeface="Montserrat"/>
-              </a:rPr>
-              <a:t>APARTADO 4.1 · CLASIFICACIÓN</a:t>
+              <a:rPr sz="1300" b="1" i="0">
+                <a:solidFill>
+                  <a:srgbClr val="E8801A"/>
+                </a:solidFill>
+                <a:latin typeface="Montserrat"/>
+              </a:rPr>
+              <a:t>PARTES DE ESTE VÍDEO</a:t>
             </a:r>
           </a:p>
         </p:txBody>
@@ -10066,7 +11139,7 @@
         </p:nvSpPr>
         <p:spPr>
           <a:xfrm>
-            <a:off x="822960" y="868680"/>
+            <a:off x="822960" y="914400"/>
             <a:ext cx="10515600" cy="914400"/>
           </a:xfrm>
           <a:prstGeom prst="rect">
@@ -10087,155 +11160,30 @@
                 </a:solidFill>
                 <a:latin typeface="Montserrat"/>
               </a:rPr>
-              <a:t>Cuatro formas de llevar el tubo</a:t>
-            </a:r>
-          </a:p>
-        </p:txBody>
-      </p:sp>
-      <p:sp>
-        <p:nvSpPr>
-          <p:cNvPr id="7" name="TextBox 6"/>
-          <p:cNvSpPr txBox="1"/>
-          <p:nvPr/>
-        </p:nvSpPr>
-        <p:spPr>
-          <a:xfrm>
-            <a:off x="822960" y="1920240"/>
-            <a:ext cx="4983480" cy="4206240"/>
-          </a:xfrm>
-          <a:prstGeom prst="rect">
-            <a:avLst/>
-          </a:prstGeom>
-          <a:noFill/>
-        </p:spPr>
-        <p:txBody>
-          <a:bodyPr wrap="square">
-            <a:spAutoFit/>
-          </a:bodyPr>
-          <a:lstStyle/>
-          <a:p>
-            <a:pPr>
-              <a:spcAft>
-                <a:spcPts val="1000"/>
-              </a:spcAft>
-            </a:pPr>
-            <a:r>
-              <a:rPr sz="1600" b="1" i="0">
-                <a:solidFill>
-                  <a:srgbClr val="2E3A80"/>
-                </a:solidFill>
-                <a:latin typeface="Montserrat"/>
-              </a:rPr>
-              <a:t>•  </a:t>
-            </a:r>
-            <a:r>
-              <a:rPr sz="1600" b="0" i="0">
-                <a:solidFill>
-                  <a:srgbClr val="1B2330"/>
-                </a:solidFill>
-                <a:latin typeface="Montserrat"/>
-              </a:rPr>
-              <a:t>Vista: visible en todo el recorrido</a:t>
-            </a:r>
-          </a:p>
-          <a:p>
-            <a:pPr>
-              <a:spcAft>
-                <a:spcPts val="1000"/>
-              </a:spcAft>
-            </a:pPr>
-            <a:r>
-              <a:rPr sz="1600" b="1" i="0">
-                <a:solidFill>
-                  <a:srgbClr val="2E3A80"/>
-                </a:solidFill>
-                <a:latin typeface="Montserrat"/>
-              </a:rPr>
-              <a:t>•  </a:t>
-            </a:r>
-            <a:r>
-              <a:rPr sz="1600" b="0" i="0">
-                <a:solidFill>
-                  <a:srgbClr val="1B2330"/>
-                </a:solidFill>
-                <a:latin typeface="Montserrat"/>
-              </a:rPr>
-              <a:t>Envainada: dentro de vaina o conducto</a:t>
-            </a:r>
-          </a:p>
-          <a:p>
-            <a:pPr>
-              <a:spcAft>
-                <a:spcPts val="1000"/>
-              </a:spcAft>
-            </a:pPr>
-            <a:r>
-              <a:rPr sz="1600" b="1" i="0">
-                <a:solidFill>
-                  <a:srgbClr val="2E3A80"/>
-                </a:solidFill>
-                <a:latin typeface="Montserrat"/>
-              </a:rPr>
-              <a:t>•  </a:t>
-            </a:r>
-            <a:r>
-              <a:rPr sz="1600" b="0" i="0">
-                <a:solidFill>
-                  <a:srgbClr val="1B2330"/>
-                </a:solidFill>
-                <a:latin typeface="Montserrat"/>
-              </a:rPr>
-              <a:t>Enterrada: en el subsuelo, por fuera</a:t>
-            </a:r>
-          </a:p>
-          <a:p>
-            <a:pPr>
-              <a:spcAft>
-                <a:spcPts val="1000"/>
-              </a:spcAft>
-            </a:pPr>
-            <a:r>
-              <a:rPr sz="1600" b="1" i="0">
-                <a:solidFill>
-                  <a:srgbClr val="2E3A80"/>
-                </a:solidFill>
-                <a:latin typeface="Montserrat"/>
-              </a:rPr>
-              <a:t>•  </a:t>
-            </a:r>
-            <a:r>
-              <a:rPr sz="1600" b="0" i="0">
-                <a:solidFill>
-                  <a:srgbClr val="1B2330"/>
-                </a:solidFill>
-                <a:latin typeface="Montserrat"/>
-              </a:rPr>
-              <a:t>Empotrada: en la pared, sin vaina</a:t>
-            </a:r>
-          </a:p>
-        </p:txBody>
-      </p:sp>
-      <p:sp>
-        <p:nvSpPr>
-          <p:cNvPr id="8" name="imgph" descr="IMGQ:copper gas pipe exposed on wall"/>
+              <a:t>En este vídeo</a:t>
+            </a:r>
+          </a:p>
+        </p:txBody>
+      </p:sp>
+      <p:sp>
+        <p:nvSpPr>
+          <p:cNvPr id="7" name="Rounded Rectangle 6"/>
           <p:cNvSpPr/>
           <p:nvPr/>
         </p:nvSpPr>
         <p:spPr>
           <a:xfrm>
-            <a:off x="5806440" y="1051560"/>
-            <a:ext cx="5298947" cy="4629150"/>
+            <a:off x="868680" y="1673352"/>
+            <a:ext cx="2011680" cy="73152"/>
           </a:xfrm>
           <a:prstGeom prst="roundRect">
             <a:avLst/>
           </a:prstGeom>
           <a:solidFill>
-            <a:srgbClr val="F3F6FB"/>
+            <a:srgbClr val="E8801A"/>
           </a:solidFill>
-          <a:ln w="12700">
-            <a:solidFill>
-              <a:srgbClr val="C7D2E6"/>
-            </a:solidFill>
+          <a:ln>
+            <a:noFill/>
           </a:ln>
           <a:effectLst/>
         </p:spPr>
@@ -10263,14 +11211,14 @@
       </p:sp>
       <p:sp>
         <p:nvSpPr>
-          <p:cNvPr id="9" name="TextBox 8"/>
+          <p:cNvPr id="8" name="TextBox 7"/>
           <p:cNvSpPr txBox="1"/>
           <p:nvPr/>
         </p:nvSpPr>
         <p:spPr>
           <a:xfrm>
-            <a:off x="6080760" y="2726055"/>
-            <a:ext cx="4750307" cy="1280160"/>
+            <a:off x="822960" y="2103120"/>
+            <a:ext cx="10515600" cy="4023360"/>
           </a:xfrm>
           <a:prstGeom prst="rect">
             <a:avLst/>
@@ -10283,27 +11231,228 @@
           </a:bodyPr>
           <a:lstStyle/>
           <a:p>
-            <a:pPr algn="ctr"/>
-            <a:r>
-              <a:rPr sz="1400" b="1" i="0">
-                <a:solidFill>
-                  <a:srgbClr val="64748B"/>
-                </a:solidFill>
-                <a:latin typeface="Montserrat"/>
-              </a:rPr>
-              <a:t>IMAGEN REALISTA</a:t>
-            </a:r>
-          </a:p>
-          <a:p>
-            <a:pPr algn="ctr"/>
-            <a:r>
-              <a:rPr sz="1100" b="0" i="1">
-                <a:solidFill>
-                  <a:srgbClr val="64748B"/>
-                </a:solidFill>
-                <a:latin typeface="Montserrat"/>
-              </a:rPr>
-              <a:t>copper gas pipe exposed on wall</a:t>
+            <a:pPr>
+              <a:spcAft>
+                <a:spcPts val="900"/>
+              </a:spcAft>
+            </a:pPr>
+            <a:r>
+              <a:rPr sz="1800" b="1" i="0">
+                <a:solidFill>
+                  <a:srgbClr val="E8801A"/>
+                </a:solidFill>
+                <a:latin typeface="Montserrat"/>
+              </a:rPr>
+              <a:t>01   </a:t>
+            </a:r>
+            <a:r>
+              <a:rPr sz="1700" b="0" i="0">
+                <a:solidFill>
+                  <a:srgbClr val="1B2330"/>
+                </a:solidFill>
+                <a:latin typeface="Montserrat"/>
+              </a:rPr>
+              <a:t>Apartado 4.1</a:t>
+            </a:r>
+          </a:p>
+          <a:p>
+            <a:pPr>
+              <a:spcAft>
+                <a:spcPts val="900"/>
+              </a:spcAft>
+            </a:pPr>
+            <a:r>
+              <a:rPr sz="1800" b="1" i="0">
+                <a:solidFill>
+                  <a:srgbClr val="E8801A"/>
+                </a:solidFill>
+                <a:latin typeface="Montserrat"/>
+              </a:rPr>
+              <a:t>02   </a:t>
+            </a:r>
+            <a:r>
+              <a:rPr sz="1700" b="0" i="0">
+                <a:solidFill>
+                  <a:srgbClr val="1B2330"/>
+                </a:solidFill>
+                <a:latin typeface="Montserrat"/>
+              </a:rPr>
+              <a:t>Apartado 4.2</a:t>
+            </a:r>
+          </a:p>
+          <a:p>
+            <a:pPr>
+              <a:spcAft>
+                <a:spcPts val="900"/>
+              </a:spcAft>
+            </a:pPr>
+            <a:r>
+              <a:rPr sz="1800" b="1" i="0">
+                <a:solidFill>
+                  <a:srgbClr val="E8801A"/>
+                </a:solidFill>
+                <a:latin typeface="Montserrat"/>
+              </a:rPr>
+              <a:t>03   </a:t>
+            </a:r>
+            <a:r>
+              <a:rPr sz="1700" b="0" i="0">
+                <a:solidFill>
+                  <a:srgbClr val="1B2330"/>
+                </a:solidFill>
+                <a:latin typeface="Montserrat"/>
+              </a:rPr>
+              <a:t>Apartado 4.3</a:t>
+            </a:r>
+          </a:p>
+          <a:p>
+            <a:pPr>
+              <a:spcAft>
+                <a:spcPts val="900"/>
+              </a:spcAft>
+            </a:pPr>
+            <a:r>
+              <a:rPr sz="1800" b="1" i="0">
+                <a:solidFill>
+                  <a:srgbClr val="E8801A"/>
+                </a:solidFill>
+                <a:latin typeface="Montserrat"/>
+              </a:rPr>
+              <a:t>04   </a:t>
+            </a:r>
+            <a:r>
+              <a:rPr sz="1700" b="0" i="0">
+                <a:solidFill>
+                  <a:srgbClr val="1B2330"/>
+                </a:solidFill>
+                <a:latin typeface="Montserrat"/>
+              </a:rPr>
+              <a:t>Apartado 4.4</a:t>
+            </a:r>
+          </a:p>
+          <a:p>
+            <a:pPr>
+              <a:spcAft>
+                <a:spcPts val="900"/>
+              </a:spcAft>
+            </a:pPr>
+            <a:r>
+              <a:rPr sz="1800" b="1" i="0">
+                <a:solidFill>
+                  <a:srgbClr val="E8801A"/>
+                </a:solidFill>
+                <a:latin typeface="Montserrat"/>
+              </a:rPr>
+              <a:t>05   </a:t>
+            </a:r>
+            <a:r>
+              <a:rPr sz="1700" b="0" i="0">
+                <a:solidFill>
+                  <a:srgbClr val="1B2330"/>
+                </a:solidFill>
+                <a:latin typeface="Montserrat"/>
+              </a:rPr>
+              <a:t>Apartado 4.4.1.2</a:t>
+            </a:r>
+          </a:p>
+          <a:p>
+            <a:pPr>
+              <a:spcAft>
+                <a:spcPts val="900"/>
+              </a:spcAft>
+            </a:pPr>
+            <a:r>
+              <a:rPr sz="1800" b="1" i="0">
+                <a:solidFill>
+                  <a:srgbClr val="E8801A"/>
+                </a:solidFill>
+                <a:latin typeface="Montserrat"/>
+              </a:rPr>
+              <a:t>06   </a:t>
+            </a:r>
+            <a:r>
+              <a:rPr sz="1700" b="0" i="0">
+                <a:solidFill>
+                  <a:srgbClr val="1B2330"/>
+                </a:solidFill>
+                <a:latin typeface="Montserrat"/>
+              </a:rPr>
+              <a:t>Apartado 4.4.2</a:t>
+            </a:r>
+          </a:p>
+          <a:p>
+            <a:pPr>
+              <a:spcAft>
+                <a:spcPts val="900"/>
+              </a:spcAft>
+            </a:pPr>
+            <a:r>
+              <a:rPr sz="1800" b="1" i="0">
+                <a:solidFill>
+                  <a:srgbClr val="E8801A"/>
+                </a:solidFill>
+                <a:latin typeface="Montserrat"/>
+              </a:rPr>
+              <a:t>07   </a:t>
+            </a:r>
+            <a:r>
+              <a:rPr sz="1700" b="0" i="0">
+                <a:solidFill>
+                  <a:srgbClr val="1B2330"/>
+                </a:solidFill>
+                <a:latin typeface="Montserrat"/>
+              </a:rPr>
+              <a:t>Apartado 4.4.3</a:t>
+            </a:r>
+          </a:p>
+          <a:p>
+            <a:pPr>
+              <a:spcAft>
+                <a:spcPts val="900"/>
+              </a:spcAft>
+            </a:pPr>
+            <a:r>
+              <a:rPr sz="1800" b="1" i="0">
+                <a:solidFill>
+                  <a:srgbClr val="E8801A"/>
+                </a:solidFill>
+                <a:latin typeface="Montserrat"/>
+              </a:rPr>
+              <a:t>08   </a:t>
+            </a:r>
+            <a:r>
+              <a:rPr sz="1700" b="0" i="0">
+                <a:solidFill>
+                  <a:srgbClr val="1B2330"/>
+                </a:solidFill>
+                <a:latin typeface="Montserrat"/>
+              </a:rPr>
+              <a:t>Apartados 4.5 y 4.6</a:t>
+            </a:r>
+          </a:p>
+          <a:p>
+            <a:pPr>
+              <a:spcAft>
+                <a:spcPts val="900"/>
+              </a:spcAft>
+            </a:pPr>
+            <a:r>
+              <a:rPr sz="1800" b="1" i="0">
+                <a:solidFill>
+                  <a:srgbClr val="E8801A"/>
+                </a:solidFill>
+                <a:latin typeface="Montserrat"/>
+              </a:rPr>
+              <a:t>09   </a:t>
+            </a:r>
+            <a:r>
+              <a:rPr sz="1700" b="0" i="0">
+                <a:solidFill>
+                  <a:srgbClr val="1B2330"/>
+                </a:solidFill>
+                <a:latin typeface="Montserrat"/>
+              </a:rPr>
+              <a:t>Apartado 4.7</a:t>
             </a:r>
           </a:p>
         </p:txBody>
@@ -10400,7 +11549,7 @@
                 </a:solidFill>
                 <a:latin typeface="Montserrat"/>
               </a:rPr>
-              <a:t>004 / 020</a:t>
+              <a:t>004 / 021</a:t>
             </a:r>
           </a:p>
         </p:txBody>
@@ -10448,7 +11597,7 @@
         <p:spPr>
           <a:xfrm>
             <a:off x="822960" y="457200"/>
-            <a:ext cx="8229600" cy="365760"/>
+            <a:ext cx="10058400" cy="365760"/>
           </a:xfrm>
           <a:prstGeom prst="rect">
             <a:avLst/>
@@ -10462,13 +11611,13 @@
           <a:lstStyle/>
           <a:p>
             <a:r>
-              <a:rPr sz="1200" b="1" i="0">
-                <a:solidFill>
-                  <a:srgbClr val="64748B"/>
-                </a:solidFill>
-                <a:latin typeface="Montserrat"/>
-              </a:rPr>
-              <a:t>APARTADO 4.2 · GENERALIDADES</a:t>
+              <a:rPr sz="1300" b="1" i="0">
+                <a:solidFill>
+                  <a:srgbClr val="E8801A"/>
+                </a:solidFill>
+                <a:latin typeface="Montserrat"/>
+              </a:rPr>
+              <a:t>APARTADO 4.1 · CLASIFICACIÓN</a:t>
             </a:r>
           </a:p>
         </p:txBody>
@@ -10496,26 +11645,70 @@
           <a:lstStyle/>
           <a:p>
             <a:r>
-              <a:rPr sz="2700" b="1" i="0">
+              <a:rPr sz="2800" b="1" i="0">
                 <a:solidFill>
                   <a:srgbClr val="1E2761"/>
                 </a:solidFill>
                 <a:latin typeface="Montserrat"/>
               </a:rPr>
-              <a:t>Regla de oro: reparar sin picar</a:t>
-            </a:r>
-          </a:p>
-        </p:txBody>
-      </p:sp>
-      <p:sp>
-        <p:nvSpPr>
-          <p:cNvPr id="7" name="TextBox 6"/>
+              <a:t>Cuatro formas de llevar el tubo</a:t>
+            </a:r>
+          </a:p>
+        </p:txBody>
+      </p:sp>
+      <p:sp>
+        <p:nvSpPr>
+          <p:cNvPr id="7" name="Rounded Rectangle 6"/>
+          <p:cNvSpPr/>
+          <p:nvPr/>
+        </p:nvSpPr>
+        <p:spPr>
+          <a:xfrm>
+            <a:off x="868680" y="1627632"/>
+            <a:ext cx="2011680" cy="73152"/>
+          </a:xfrm>
+          <a:prstGeom prst="roundRect">
+            <a:avLst/>
+          </a:prstGeom>
+          <a:solidFill>
+            <a:srgbClr val="E8801A"/>
+          </a:solidFill>
+          <a:ln>
+            <a:noFill/>
+          </a:ln>
+          <a:effectLst/>
+        </p:spPr>
+        <p:style>
+          <a:lnRef idx="1">
+            <a:schemeClr val="accent1"/>
+          </a:lnRef>
+          <a:fillRef idx="3">
+            <a:schemeClr val="accent1"/>
+          </a:fillRef>
+          <a:effectRef idx="2">
+            <a:schemeClr val="accent1"/>
+          </a:effectRef>
+          <a:fontRef idx="minor">
+            <a:schemeClr val="lt1"/>
+          </a:fontRef>
+        </p:style>
+        <p:txBody>
+          <a:bodyPr rtlCol="0" anchor="ctr"/>
+          <a:lstStyle/>
+          <a:p>
+            <a:pPr algn="ctr"/>
+          </a:p>
+        </p:txBody>
+      </p:sp>
+      <p:sp>
+        <p:nvSpPr>
+          <p:cNvPr id="8" name="TextBox 7"/>
           <p:cNvSpPr txBox="1"/>
           <p:nvPr/>
         </p:nvSpPr>
         <p:spPr>
           <a:xfrm>
-            <a:off x="822960" y="1920240"/>
+            <a:off x="822960" y="1965960"/>
             <a:ext cx="4983480" cy="4206240"/>
           </a:xfrm>
           <a:prstGeom prst="rect">
@@ -10531,17 +11724,17 @@
           <a:p>
             <a:pPr>
               <a:spcAft>
-                <a:spcPts val="1000"/>
+                <a:spcPts val="1100"/>
               </a:spcAft>
             </a:pPr>
             <a:r>
               <a:rPr sz="1600" b="1" i="0">
                 <a:solidFill>
-                  <a:srgbClr val="2E3A80"/>
-                </a:solidFill>
-                <a:latin typeface="Montserrat"/>
-              </a:rPr>
-              <a:t>•  </a:t>
+                  <a:srgbClr val="E8801A"/>
+                </a:solidFill>
+                <a:latin typeface="Montserrat"/>
+              </a:rPr>
+              <a:t>▸  </a:t>
             </a:r>
             <a:r>
               <a:rPr sz="1600" b="0" i="0">
@@ -10550,23 +11743,23 @@
                 </a:solidFill>
                 <a:latin typeface="Montserrat"/>
               </a:rPr>
-              <a:t>Vista o envainada siempre que se pueda</a:t>
+              <a:t>Vista: visible en todo el recorrido</a:t>
             </a:r>
           </a:p>
           <a:p>
             <a:pPr>
               <a:spcAft>
-                <a:spcPts val="1000"/>
+                <a:spcPts val="1100"/>
               </a:spcAft>
             </a:pPr>
             <a:r>
               <a:rPr sz="1600" b="1" i="0">
                 <a:solidFill>
-                  <a:srgbClr val="2E3A80"/>
-                </a:solidFill>
-                <a:latin typeface="Montserrat"/>
-              </a:rPr>
-              <a:t>•  </a:t>
+                  <a:srgbClr val="E8801A"/>
+                </a:solidFill>
+                <a:latin typeface="Montserrat"/>
+              </a:rPr>
+              <a:t>▸  </a:t>
             </a:r>
             <a:r>
               <a:rPr sz="1600" b="0" i="0">
@@ -10575,23 +11768,23 @@
                 </a:solidFill>
                 <a:latin typeface="Montserrat"/>
               </a:rPr>
-              <a:t>La común, por zonas comunitarias</a:t>
+              <a:t>Envainada: dentro de vaina o conducto</a:t>
             </a:r>
           </a:p>
           <a:p>
             <a:pPr>
               <a:spcAft>
-                <a:spcPts val="1000"/>
+                <a:spcPts val="1100"/>
               </a:spcAft>
             </a:pPr>
             <a:r>
               <a:rPr sz="1600" b="1" i="0">
                 <a:solidFill>
-                  <a:srgbClr val="2E3A80"/>
-                </a:solidFill>
-                <a:latin typeface="Montserrat"/>
-              </a:rPr>
-              <a:t>•  </a:t>
+                  <a:srgbClr val="E8801A"/>
+                </a:solidFill>
+                <a:latin typeface="Montserrat"/>
+              </a:rPr>
+              <a:t>▸  </a:t>
             </a:r>
             <a:r>
               <a:rPr sz="1600" b="0" i="0">
@@ -10600,14 +11793,39 @@
                 </a:solidFill>
                 <a:latin typeface="Montserrat"/>
               </a:rPr>
-              <a:t>Atravesar muros: con pasamuros</a:t>
-            </a:r>
-          </a:p>
-        </p:txBody>
-      </p:sp>
-      <p:sp>
-        <p:nvSpPr>
-          <p:cNvPr id="8" name="imgph" descr="IMGQ:gas pipe passing through wall sleeve"/>
+              <a:t>Enterrada: en el subsuelo, por fuera</a:t>
+            </a:r>
+          </a:p>
+          <a:p>
+            <a:pPr>
+              <a:spcAft>
+                <a:spcPts val="1100"/>
+              </a:spcAft>
+            </a:pPr>
+            <a:r>
+              <a:rPr sz="1600" b="1" i="0">
+                <a:solidFill>
+                  <a:srgbClr val="E8801A"/>
+                </a:solidFill>
+                <a:latin typeface="Montserrat"/>
+              </a:rPr>
+              <a:t>▸  </a:t>
+            </a:r>
+            <a:r>
+              <a:rPr sz="1600" b="0" i="0">
+                <a:solidFill>
+                  <a:srgbClr val="1B2330"/>
+                </a:solidFill>
+                <a:latin typeface="Montserrat"/>
+              </a:rPr>
+              <a:t>Empotrada: en la pared, sin vaina</a:t>
+            </a:r>
+          </a:p>
+        </p:txBody>
+      </p:sp>
+      <p:sp>
+        <p:nvSpPr>
+          <p:cNvPr id="9" name="imgph" descr="IMGQ:copper gas pipe exposed on wall"/>
           <p:cNvSpPr/>
           <p:nvPr/>
         </p:nvSpPr>
@@ -10653,7 +11871,7 @@
       </p:sp>
       <p:sp>
         <p:nvSpPr>
-          <p:cNvPr id="9" name="TextBox 8"/>
+          <p:cNvPr id="10" name="TextBox 9"/>
           <p:cNvSpPr txBox="1"/>
           <p:nvPr/>
         </p:nvSpPr>
@@ -10693,7 +11911,7 @@
                 </a:solidFill>
                 <a:latin typeface="Montserrat"/>
               </a:rPr>
-              <a:t>gas pipe passing through wall sleeve</a:t>
+              <a:t>copper gas pipe exposed on wall</a:t>
             </a:r>
           </a:p>
         </p:txBody>
@@ -10790,7 +12008,7 @@
                 </a:solidFill>
                 <a:latin typeface="Montserrat"/>
               </a:rPr>
-              <a:t>005 / 020</a:t>
+              <a:t>005 / 021</a:t>
             </a:r>
           </a:p>
         </p:txBody>
@@ -10838,7 +12056,7 @@
         <p:spPr>
           <a:xfrm>
             <a:off x="822960" y="457200"/>
-            <a:ext cx="8229600" cy="365760"/>
+            <a:ext cx="10058400" cy="365760"/>
           </a:xfrm>
           <a:prstGeom prst="rect">
             <a:avLst/>
@@ -10852,13 +12070,13 @@
           <a:lstStyle/>
           <a:p>
             <a:r>
-              <a:rPr sz="1200" b="1" i="0">
-                <a:solidFill>
-                  <a:srgbClr val="64748B"/>
-                </a:solidFill>
-                <a:latin typeface="Montserrat"/>
-              </a:rPr>
-              <a:t>APARTADO 4.2 · PROHIBICIONES</a:t>
+              <a:rPr sz="1300" b="1" i="0">
+                <a:solidFill>
+                  <a:srgbClr val="E8801A"/>
+                </a:solidFill>
+                <a:latin typeface="Montserrat"/>
+              </a:rPr>
+              <a:t>APARTADO 4.2 · GENERALIDADES</a:t>
             </a:r>
           </a:p>
         </p:txBody>
@@ -10886,26 +12104,70 @@
           <a:lstStyle/>
           <a:p>
             <a:r>
-              <a:rPr sz="2700" b="1" i="0">
+              <a:rPr sz="2800" b="1" i="0">
                 <a:solidFill>
                   <a:srgbClr val="1E2761"/>
                 </a:solidFill>
                 <a:latin typeface="Montserrat"/>
               </a:rPr>
-              <a:t>La lista negra: por aquí no</a:t>
-            </a:r>
-          </a:p>
-        </p:txBody>
-      </p:sp>
-      <p:sp>
-        <p:nvSpPr>
-          <p:cNvPr id="7" name="TextBox 6"/>
+              <a:t>Regla de oro: reparar sin picar</a:t>
+            </a:r>
+          </a:p>
+        </p:txBody>
+      </p:sp>
+      <p:sp>
+        <p:nvSpPr>
+          <p:cNvPr id="7" name="Rounded Rectangle 6"/>
+          <p:cNvSpPr/>
+          <p:nvPr/>
+        </p:nvSpPr>
+        <p:spPr>
+          <a:xfrm>
+            <a:off x="868680" y="1627632"/>
+            <a:ext cx="2011680" cy="73152"/>
+          </a:xfrm>
+          <a:prstGeom prst="roundRect">
+            <a:avLst/>
+          </a:prstGeom>
+          <a:solidFill>
+            <a:srgbClr val="E8801A"/>
+          </a:solidFill>
+          <a:ln>
+            <a:noFill/>
+          </a:ln>
+          <a:effectLst/>
+        </p:spPr>
+        <p:style>
+          <a:lnRef idx="1">
+            <a:schemeClr val="accent1"/>
+          </a:lnRef>
+          <a:fillRef idx="3">
+            <a:schemeClr val="accent1"/>
+          </a:fillRef>
+          <a:effectRef idx="2">
+            <a:schemeClr val="accent1"/>
+          </a:effectRef>
+          <a:fontRef idx="minor">
+            <a:schemeClr val="lt1"/>
+          </a:fontRef>
+        </p:style>
+        <p:txBody>
+          <a:bodyPr rtlCol="0" anchor="ctr"/>
+          <a:lstStyle/>
+          <a:p>
+            <a:pPr algn="ctr"/>
+          </a:p>
+        </p:txBody>
+      </p:sp>
+      <p:sp>
+        <p:nvSpPr>
+          <p:cNvPr id="8" name="TextBox 7"/>
           <p:cNvSpPr txBox="1"/>
           <p:nvPr/>
         </p:nvSpPr>
         <p:spPr>
           <a:xfrm>
-            <a:off x="822960" y="1920240"/>
+            <a:off x="822960" y="1965960"/>
             <a:ext cx="4983480" cy="4206240"/>
           </a:xfrm>
           <a:prstGeom prst="rect">
@@ -10921,17 +12183,17 @@
           <a:p>
             <a:pPr>
               <a:spcAft>
-                <a:spcPts val="1000"/>
+                <a:spcPts val="1100"/>
               </a:spcAft>
             </a:pPr>
             <a:r>
               <a:rPr sz="1600" b="1" i="0">
                 <a:solidFill>
-                  <a:srgbClr val="2E3A80"/>
-                </a:solidFill>
-                <a:latin typeface="Montserrat"/>
-              </a:rPr>
-              <a:t>•  </a:t>
+                  <a:srgbClr val="E8801A"/>
+                </a:solidFill>
+                <a:latin typeface="Montserrat"/>
+              </a:rPr>
+              <a:t>▸  </a:t>
             </a:r>
             <a:r>
               <a:rPr sz="1600" b="0" i="0">
@@ -10940,23 +12202,23 @@
                 </a:solidFill>
                 <a:latin typeface="Montserrat"/>
               </a:rPr>
-              <a:t>Ascensores y montacargas</a:t>
+              <a:t>Vista o envainada siempre que se pueda</a:t>
             </a:r>
           </a:p>
           <a:p>
             <a:pPr>
               <a:spcAft>
-                <a:spcPts val="1000"/>
+                <a:spcPts val="1100"/>
               </a:spcAft>
             </a:pPr>
             <a:r>
               <a:rPr sz="1600" b="1" i="0">
                 <a:solidFill>
-                  <a:srgbClr val="2E3A80"/>
-                </a:solidFill>
-                <a:latin typeface="Montserrat"/>
-              </a:rPr>
-              <a:t>•  </a:t>
+                  <a:srgbClr val="E8801A"/>
+                </a:solidFill>
+                <a:latin typeface="Montserrat"/>
+              </a:rPr>
+              <a:t>▸  </a:t>
             </a:r>
             <a:r>
               <a:rPr sz="1600" b="0" i="0">
@@ -10965,23 +12227,23 @@
                 </a:solidFill>
                 <a:latin typeface="Montserrat"/>
               </a:rPr>
-              <a:t>Transformadores eléctricos de potencia</a:t>
+              <a:t>La común, por zonas comunitarias</a:t>
             </a:r>
           </a:p>
           <a:p>
             <a:pPr>
               <a:spcAft>
-                <a:spcPts val="1000"/>
+                <a:spcPts val="1100"/>
               </a:spcAft>
             </a:pPr>
             <a:r>
               <a:rPr sz="1600" b="1" i="0">
                 <a:solidFill>
-                  <a:srgbClr val="2E3A80"/>
-                </a:solidFill>
-                <a:latin typeface="Montserrat"/>
-              </a:rPr>
-              <a:t>•  </a:t>
+                  <a:srgbClr val="E8801A"/>
+                </a:solidFill>
+                <a:latin typeface="Montserrat"/>
+              </a:rPr>
+              <a:t>▸  </a:t>
             </a:r>
             <a:r>
               <a:rPr sz="1600" b="0" i="0">
@@ -10990,39 +12252,14 @@
                 </a:solidFill>
                 <a:latin typeface="Montserrat"/>
               </a:rPr>
-              <a:t>Chimeneas, basuras y ventilaciones</a:t>
-            </a:r>
-          </a:p>
-          <a:p>
-            <a:pPr>
-              <a:spcAft>
-                <a:spcPts val="1000"/>
-              </a:spcAft>
-            </a:pPr>
-            <a:r>
-              <a:rPr sz="1600" b="1" i="0">
-                <a:solidFill>
-                  <a:srgbClr val="2E3A80"/>
-                </a:solidFill>
-                <a:latin typeface="Montserrat"/>
-              </a:rPr>
-              <a:t>•  </a:t>
-            </a:r>
-            <a:r>
-              <a:rPr sz="1600" b="0" i="0">
-                <a:solidFill>
-                  <a:srgbClr val="1B2330"/>
-                </a:solidFill>
-                <a:latin typeface="Montserrat"/>
-              </a:rPr>
-              <a:t>Nunca dentro de los forjados</a:t>
-            </a:r>
-          </a:p>
-        </p:txBody>
-      </p:sp>
-      <p:sp>
-        <p:nvSpPr>
-          <p:cNvPr id="8" name="imgph" descr="IMGQ:elevator shaft building interior"/>
+              <a:t>Atravesar muros: con pasamuros</a:t>
+            </a:r>
+          </a:p>
+        </p:txBody>
+      </p:sp>
+      <p:sp>
+        <p:nvSpPr>
+          <p:cNvPr id="9" name="imgph" descr="IMGQ:gas pipe passing through wall sleeve"/>
           <p:cNvSpPr/>
           <p:nvPr/>
         </p:nvSpPr>
@@ -11068,7 +12305,7 @@
       </p:sp>
       <p:sp>
         <p:nvSpPr>
-          <p:cNvPr id="9" name="TextBox 8"/>
+          <p:cNvPr id="10" name="TextBox 9"/>
           <p:cNvSpPr txBox="1"/>
           <p:nvPr/>
         </p:nvSpPr>
@@ -11108,7 +12345,7 @@
                 </a:solidFill>
                 <a:latin typeface="Montserrat"/>
               </a:rPr>
-              <a:t>elevator shaft building interior</a:t>
+              <a:t>gas pipe passing through wall sleeve</a:t>
             </a:r>
           </a:p>
         </p:txBody>
@@ -11205,7 +12442,7 @@
                 </a:solidFill>
                 <a:latin typeface="Montserrat"/>
               </a:rPr>
-              <a:t>006 / 020</a:t>
+              <a:t>006 / 021</a:t>
             </a:r>
           </a:p>
         </p:txBody>
@@ -11253,7 +12490,7 @@
         <p:spPr>
           <a:xfrm>
             <a:off x="822960" y="457200"/>
-            <a:ext cx="8229600" cy="365760"/>
+            <a:ext cx="10058400" cy="365760"/>
           </a:xfrm>
           <a:prstGeom prst="rect">
             <a:avLst/>
@@ -11267,13 +12504,13 @@
           <a:lstStyle/>
           <a:p>
             <a:r>
-              <a:rPr sz="1200" b="1" i="0">
-                <a:solidFill>
-                  <a:srgbClr val="64748B"/>
-                </a:solidFill>
-                <a:latin typeface="Montserrat"/>
-              </a:rPr>
-              <a:t>APARTADO 4.2 · EXCEPCIÓN</a:t>
+              <a:rPr sz="1300" b="1" i="0">
+                <a:solidFill>
+                  <a:srgbClr val="E8801A"/>
+                </a:solidFill>
+                <a:latin typeface="Montserrat"/>
+              </a:rPr>
+              <a:t>APARTADO 4.2 · PROHIBICIONES</a:t>
             </a:r>
           </a:p>
         </p:txBody>
@@ -11301,26 +12538,70 @@
           <a:lstStyle/>
           <a:p>
             <a:r>
-              <a:rPr sz="2700" b="1" i="0">
+              <a:rPr sz="2800" b="1" i="0">
                 <a:solidFill>
                   <a:srgbClr val="1E2761"/>
                 </a:solidFill>
                 <a:latin typeface="Montserrat"/>
               </a:rPr>
-              <a:t>El gasoil, clase C, sí pasa</a:t>
-            </a:r>
-          </a:p>
-        </p:txBody>
-      </p:sp>
-      <p:sp>
-        <p:nvSpPr>
-          <p:cNvPr id="7" name="TextBox 6"/>
+              <a:t>La lista negra: por aquí no</a:t>
+            </a:r>
+          </a:p>
+        </p:txBody>
+      </p:sp>
+      <p:sp>
+        <p:nvSpPr>
+          <p:cNvPr id="7" name="Rounded Rectangle 6"/>
+          <p:cNvSpPr/>
+          <p:nvPr/>
+        </p:nvSpPr>
+        <p:spPr>
+          <a:xfrm>
+            <a:off x="868680" y="1627632"/>
+            <a:ext cx="2011680" cy="73152"/>
+          </a:xfrm>
+          <a:prstGeom prst="roundRect">
+            <a:avLst/>
+          </a:prstGeom>
+          <a:solidFill>
+            <a:srgbClr val="E8801A"/>
+          </a:solidFill>
+          <a:ln>
+            <a:noFill/>
+          </a:ln>
+          <a:effectLst/>
+        </p:spPr>
+        <p:style>
+          <a:lnRef idx="1">
+            <a:schemeClr val="accent1"/>
+          </a:lnRef>
+          <a:fillRef idx="3">
+            <a:schemeClr val="accent1"/>
+          </a:fillRef>
+          <a:effectRef idx="2">
+            <a:schemeClr val="accent1"/>
+          </a:effectRef>
+          <a:fontRef idx="minor">
+            <a:schemeClr val="lt1"/>
+          </a:fontRef>
+        </p:style>
+        <p:txBody>
+          <a:bodyPr rtlCol="0" anchor="ctr"/>
+          <a:lstStyle/>
+          <a:p>
+            <a:pPr algn="ctr"/>
+          </a:p>
+        </p:txBody>
+      </p:sp>
+      <p:sp>
+        <p:nvSpPr>
+          <p:cNvPr id="8" name="TextBox 7"/>
           <p:cNvSpPr txBox="1"/>
           <p:nvPr/>
         </p:nvSpPr>
         <p:spPr>
           <a:xfrm>
-            <a:off x="822960" y="1920240"/>
+            <a:off x="822960" y="1965960"/>
             <a:ext cx="4983480" cy="4206240"/>
           </a:xfrm>
           <a:prstGeom prst="rect">
@@ -11336,17 +12617,17 @@
           <a:p>
             <a:pPr>
               <a:spcAft>
-                <a:spcPts val="1000"/>
+                <a:spcPts val="1100"/>
               </a:spcAft>
             </a:pPr>
             <a:r>
               <a:rPr sz="1600" b="1" i="0">
                 <a:solidFill>
-                  <a:srgbClr val="2E3A80"/>
-                </a:solidFill>
-                <a:latin typeface="Montserrat"/>
-              </a:rPr>
-              <a:t>•  </a:t>
+                  <a:srgbClr val="E8801A"/>
+                </a:solidFill>
+                <a:latin typeface="Montserrat"/>
+              </a:rPr>
+              <a:t>▸  </a:t>
             </a:r>
             <a:r>
               <a:rPr sz="1600" b="0" i="0">
@@ -11355,23 +12636,23 @@
                 </a:solidFill>
                 <a:latin typeface="Montserrat"/>
               </a:rPr>
-              <a:t>Clase C: se inflama a 55 °C o más</a:t>
+              <a:t>Ascensores y montacargas</a:t>
             </a:r>
           </a:p>
           <a:p>
             <a:pPr>
               <a:spcAft>
-                <a:spcPts val="1000"/>
+                <a:spcPts val="1100"/>
               </a:spcAft>
             </a:pPr>
             <a:r>
               <a:rPr sz="1600" b="1" i="0">
                 <a:solidFill>
-                  <a:srgbClr val="2E3A80"/>
-                </a:solidFill>
-                <a:latin typeface="Montserrat"/>
-              </a:rPr>
-              <a:t>•  </a:t>
+                  <a:srgbClr val="E8801A"/>
+                </a:solidFill>
+                <a:latin typeface="Montserrat"/>
+              </a:rPr>
+              <a:t>▸  </a:t>
             </a:r>
             <a:r>
               <a:rPr sz="1600" b="0" i="0">
@@ -11380,23 +12661,23 @@
                 </a:solidFill>
                 <a:latin typeface="Montserrat"/>
               </a:rPr>
-              <a:t>Solo depósitos de hasta 1000 l</a:t>
+              <a:t>Transformadores eléctricos de potencia</a:t>
             </a:r>
           </a:p>
           <a:p>
             <a:pPr>
               <a:spcAft>
-                <a:spcPts val="1000"/>
+                <a:spcPts val="1100"/>
               </a:spcAft>
             </a:pPr>
             <a:r>
               <a:rPr sz="1600" b="1" i="0">
                 <a:solidFill>
-                  <a:srgbClr val="2E3A80"/>
-                </a:solidFill>
-                <a:latin typeface="Montserrat"/>
-              </a:rPr>
-              <a:t>•  </a:t>
+                  <a:srgbClr val="E8801A"/>
+                </a:solidFill>
+                <a:latin typeface="Montserrat"/>
+              </a:rPr>
+              <a:t>▸  </a:t>
             </a:r>
             <a:r>
               <a:rPr sz="1600" b="0" i="0">
@@ -11405,14 +12686,39 @@
                 </a:solidFill>
                 <a:latin typeface="Montserrat"/>
               </a:rPr>
-              <a:t>Cumpliendo distancias y ventilación</a:t>
-            </a:r>
-          </a:p>
-        </p:txBody>
-      </p:sp>
-      <p:sp>
-        <p:nvSpPr>
-          <p:cNvPr id="8" name="imgph" descr="IMGQ:diesel heating oil tank in basement"/>
+              <a:t>Chimeneas, basuras y ventilaciones</a:t>
+            </a:r>
+          </a:p>
+          <a:p>
+            <a:pPr>
+              <a:spcAft>
+                <a:spcPts val="1100"/>
+              </a:spcAft>
+            </a:pPr>
+            <a:r>
+              <a:rPr sz="1600" b="1" i="0">
+                <a:solidFill>
+                  <a:srgbClr val="E8801A"/>
+                </a:solidFill>
+                <a:latin typeface="Montserrat"/>
+              </a:rPr>
+              <a:t>▸  </a:t>
+            </a:r>
+            <a:r>
+              <a:rPr sz="1600" b="0" i="0">
+                <a:solidFill>
+                  <a:srgbClr val="1B2330"/>
+                </a:solidFill>
+                <a:latin typeface="Montserrat"/>
+              </a:rPr>
+              <a:t>Nunca dentro de los forjados</a:t>
+            </a:r>
+          </a:p>
+        </p:txBody>
+      </p:sp>
+      <p:sp>
+        <p:nvSpPr>
+          <p:cNvPr id="9" name="imgph" descr="IMGQ:elevator shaft building interior"/>
           <p:cNvSpPr/>
           <p:nvPr/>
         </p:nvSpPr>
@@ -11458,7 +12764,7 @@
       </p:sp>
       <p:sp>
         <p:nvSpPr>
-          <p:cNvPr id="9" name="TextBox 8"/>
+          <p:cNvPr id="10" name="TextBox 9"/>
           <p:cNvSpPr txBox="1"/>
           <p:nvPr/>
         </p:nvSpPr>
@@ -11498,7 +12804,7 @@
                 </a:solidFill>
                 <a:latin typeface="Montserrat"/>
               </a:rPr>
-              <a:t>diesel heating oil tank in basement</a:t>
+              <a:t>elevator shaft building interior</a:t>
             </a:r>
           </a:p>
         </p:txBody>
@@ -11595,7 +12901,7 @@
                 </a:solidFill>
                 <a:latin typeface="Montserrat"/>
               </a:rPr>
-              <a:t>007 / 020</a:t>
+              <a:t>007 / 021</a:t>
             </a:r>
           </a:p>
         </p:txBody>
@@ -11643,7 +12949,7 @@
         <p:spPr>
           <a:xfrm>
             <a:off x="822960" y="457200"/>
-            <a:ext cx="8229600" cy="365760"/>
+            <a:ext cx="10058400" cy="365760"/>
           </a:xfrm>
           <a:prstGeom prst="rect">
             <a:avLst/>
@@ -11657,13 +12963,13 @@
           <a:lstStyle/>
           <a:p>
             <a:r>
-              <a:rPr sz="1200" b="1" i="0">
-                <a:solidFill>
-                  <a:srgbClr val="64748B"/>
-                </a:solidFill>
-                <a:latin typeface="Montserrat"/>
-              </a:rPr>
-              <a:t>APARTADO 4.3 · TUBERÍAS VISTAS</a:t>
+              <a:rPr sz="1300" b="1" i="0">
+                <a:solidFill>
+                  <a:srgbClr val="E8801A"/>
+                </a:solidFill>
+                <a:latin typeface="Montserrat"/>
+              </a:rPr>
+              <a:t>APARTADO 4.2 · EXCEPCIÓN</a:t>
             </a:r>
           </a:p>
         </p:txBody>
@@ -11691,26 +12997,70 @@
           <a:lstStyle/>
           <a:p>
             <a:r>
-              <a:rPr sz="2700" b="1" i="0">
+              <a:rPr sz="2800" b="1" i="0">
                 <a:solidFill>
                   <a:srgbClr val="1E2761"/>
                 </a:solidFill>
                 <a:latin typeface="Montserrat"/>
               </a:rPr>
-              <a:t>Bien sujeta, sin apoyarse en nada</a:t>
-            </a:r>
-          </a:p>
-        </p:txBody>
-      </p:sp>
-      <p:sp>
-        <p:nvSpPr>
-          <p:cNvPr id="7" name="TextBox 6"/>
+              <a:t>El gasoil, clase C, sí pasa</a:t>
+            </a:r>
+          </a:p>
+        </p:txBody>
+      </p:sp>
+      <p:sp>
+        <p:nvSpPr>
+          <p:cNvPr id="7" name="Rounded Rectangle 6"/>
+          <p:cNvSpPr/>
+          <p:nvPr/>
+        </p:nvSpPr>
+        <p:spPr>
+          <a:xfrm>
+            <a:off x="868680" y="1627632"/>
+            <a:ext cx="2011680" cy="73152"/>
+          </a:xfrm>
+          <a:prstGeom prst="roundRect">
+            <a:avLst/>
+          </a:prstGeom>
+          <a:solidFill>
+            <a:srgbClr val="E8801A"/>
+          </a:solidFill>
+          <a:ln>
+            <a:noFill/>
+          </a:ln>
+          <a:effectLst/>
+        </p:spPr>
+        <p:style>
+          <a:lnRef idx="1">
+            <a:schemeClr val="accent1"/>
+          </a:lnRef>
+          <a:fillRef idx="3">
+            <a:schemeClr val="accent1"/>
+          </a:fillRef>
+          <a:effectRef idx="2">
+            <a:schemeClr val="accent1"/>
+          </a:effectRef>
+          <a:fontRef idx="minor">
+            <a:schemeClr val="lt1"/>
+          </a:fontRef>
+        </p:style>
+        <p:txBody>
+          <a:bodyPr rtlCol="0" anchor="ctr"/>
+          <a:lstStyle/>
+          <a:p>
+            <a:pPr algn="ctr"/>
+          </a:p>
+        </p:txBody>
+      </p:sp>
+      <p:sp>
+        <p:nvSpPr>
+          <p:cNvPr id="8" name="TextBox 7"/>
           <p:cNvSpPr txBox="1"/>
           <p:nvPr/>
         </p:nvSpPr>
         <p:spPr>
           <a:xfrm>
-            <a:off x="822960" y="1920240"/>
+            <a:off x="822960" y="1965960"/>
             <a:ext cx="4983480" cy="4206240"/>
           </a:xfrm>
           <a:prstGeom prst="rect">
@@ -11726,17 +13076,17 @@
           <a:p>
             <a:pPr>
               <a:spcAft>
-                <a:spcPts val="1000"/>
+                <a:spcPts val="1100"/>
               </a:spcAft>
             </a:pPr>
             <a:r>
               <a:rPr sz="1600" b="1" i="0">
                 <a:solidFill>
-                  <a:srgbClr val="2E3A80"/>
-                </a:solidFill>
-                <a:latin typeface="Montserrat"/>
-              </a:rPr>
-              <a:t>•  </a:t>
+                  <a:srgbClr val="E8801A"/>
+                </a:solidFill>
+                <a:latin typeface="Montserrat"/>
+              </a:rPr>
+              <a:t>▸  </a:t>
             </a:r>
             <a:r>
               <a:rPr sz="1600" b="0" i="0">
@@ -11745,23 +13095,23 @@
                 </a:solidFill>
                 <a:latin typeface="Montserrat"/>
               </a:rPr>
-              <a:t>Soportes desmontables y aislados</a:t>
+              <a:t>Clase C: se inflama a 55 °C o más</a:t>
             </a:r>
           </a:p>
           <a:p>
             <a:pPr>
               <a:spcAft>
-                <a:spcPts val="1000"/>
+                <a:spcPts val="1100"/>
               </a:spcAft>
             </a:pPr>
             <a:r>
               <a:rPr sz="1600" b="1" i="0">
                 <a:solidFill>
-                  <a:srgbClr val="2E3A80"/>
-                </a:solidFill>
-                <a:latin typeface="Montserrat"/>
-              </a:rPr>
-              <a:t>•  </a:t>
+                  <a:srgbClr val="E8801A"/>
+                </a:solidFill>
+                <a:latin typeface="Montserrat"/>
+              </a:rPr>
+              <a:t>▸  </a:t>
             </a:r>
             <a:r>
               <a:rPr sz="1600" b="0" i="0">
@@ -11770,23 +13120,23 @@
                 </a:solidFill>
                 <a:latin typeface="Montserrat"/>
               </a:rPr>
-              <a:t>Que permitan la dilatación</a:t>
+              <a:t>Solo depósitos de hasta 1000 l</a:t>
             </a:r>
           </a:p>
           <a:p>
             <a:pPr>
               <a:spcAft>
-                <a:spcPts val="1000"/>
+                <a:spcPts val="1100"/>
               </a:spcAft>
             </a:pPr>
             <a:r>
               <a:rPr sz="1600" b="1" i="0">
                 <a:solidFill>
-                  <a:srgbClr val="2E3A80"/>
-                </a:solidFill>
-                <a:latin typeface="Montserrat"/>
-              </a:rPr>
-              <a:t>•  </a:t>
+                  <a:srgbClr val="E8801A"/>
+                </a:solidFill>
+                <a:latin typeface="Montserrat"/>
+              </a:rPr>
+              <a:t>▸  </a:t>
             </a:r>
             <a:r>
               <a:rPr sz="1600" b="0" i="0">
@@ -11795,14 +13145,14 @@
                 </a:solidFill>
                 <a:latin typeface="Montserrat"/>
               </a:rPr>
-              <a:t>Más grueso el tubo, más separación</a:t>
-            </a:r>
-          </a:p>
-        </p:txBody>
-      </p:sp>
-      <p:sp>
-        <p:nvSpPr>
-          <p:cNvPr id="8" name="imgph" descr="IMGQ:metal pipe clamp bracket on wall"/>
+              <a:t>Cumpliendo distancias y ventilación</a:t>
+            </a:r>
+          </a:p>
+        </p:txBody>
+      </p:sp>
+      <p:sp>
+        <p:nvSpPr>
+          <p:cNvPr id="9" name="imgph" descr="IMGQ:diesel heating oil tank in basement"/>
           <p:cNvSpPr/>
           <p:nvPr/>
         </p:nvSpPr>
@@ -11848,7 +13198,7 @@
       </p:sp>
       <p:sp>
         <p:nvSpPr>
-          <p:cNvPr id="9" name="TextBox 8"/>
+          <p:cNvPr id="10" name="TextBox 9"/>
           <p:cNvSpPr txBox="1"/>
           <p:nvPr/>
         </p:nvSpPr>
@@ -11888,7 +13238,7 @@
                 </a:solidFill>
                 <a:latin typeface="Montserrat"/>
               </a:rPr>
-              <a:t>metal pipe clamp bracket on wall</a:t>
+              <a:t>diesel heating oil tank in basement</a:t>
             </a:r>
           </a:p>
         </p:txBody>
@@ -11985,7 +13335,7 @@
                 </a:solidFill>
                 <a:latin typeface="Montserrat"/>
               </a:rPr>
-              <a:t>008 / 020</a:t>
+              <a:t>008 / 021</a:t>
             </a:r>
           </a:p>
         </p:txBody>
@@ -12033,7 +13383,7 @@
         <p:spPr>
           <a:xfrm>
             <a:off x="822960" y="457200"/>
-            <a:ext cx="8229600" cy="365760"/>
+            <a:ext cx="10058400" cy="365760"/>
           </a:xfrm>
           <a:prstGeom prst="rect">
             <a:avLst/>
@@ -12047,13 +13397,13 @@
           <a:lstStyle/>
           <a:p>
             <a:r>
-              <a:rPr sz="1200" b="1" i="0">
-                <a:solidFill>
-                  <a:srgbClr val="64748B"/>
-                </a:solidFill>
-                <a:latin typeface="Montserrat"/>
-              </a:rPr>
-              <a:t>APARTADO 4.3 · DISTANCIAS</a:t>
+              <a:rPr sz="1300" b="1" i="0">
+                <a:solidFill>
+                  <a:srgbClr val="E8801A"/>
+                </a:solidFill>
+                <a:latin typeface="Montserrat"/>
+              </a:rPr>
+              <a:t>APARTADO 4.3 · TUBERÍAS VISTAS</a:t>
             </a:r>
           </a:p>
         </p:txBody>
@@ -12081,26 +13431,70 @@
           <a:lstStyle/>
           <a:p>
             <a:r>
-              <a:rPr sz="2700" b="1" i="0">
+              <a:rPr sz="2800" b="1" i="0">
                 <a:solidFill>
                   <a:srgbClr val="1E2761"/>
                 </a:solidFill>
                 <a:latin typeface="Montserrat"/>
               </a:rPr>
-              <a:t>El 3 y el 3: tres centímetros</a:t>
-            </a:r>
-          </a:p>
-        </p:txBody>
-      </p:sp>
-      <p:sp>
-        <p:nvSpPr>
-          <p:cNvPr id="7" name="TextBox 6"/>
+              <a:t>Bien sujeta, sin apoyarse en nada</a:t>
+            </a:r>
+          </a:p>
+        </p:txBody>
+      </p:sp>
+      <p:sp>
+        <p:nvSpPr>
+          <p:cNvPr id="7" name="Rounded Rectangle 6"/>
+          <p:cNvSpPr/>
+          <p:nvPr/>
+        </p:nvSpPr>
+        <p:spPr>
+          <a:xfrm>
+            <a:off x="868680" y="1627632"/>
+            <a:ext cx="2011680" cy="73152"/>
+          </a:xfrm>
+          <a:prstGeom prst="roundRect">
+            <a:avLst/>
+          </a:prstGeom>
+          <a:solidFill>
+            <a:srgbClr val="E8801A"/>
+          </a:solidFill>
+          <a:ln>
+            <a:noFill/>
+          </a:ln>
+          <a:effectLst/>
+        </p:spPr>
+        <p:style>
+          <a:lnRef idx="1">
+            <a:schemeClr val="accent1"/>
+          </a:lnRef>
+          <a:fillRef idx="3">
+            <a:schemeClr val="accent1"/>
+          </a:fillRef>
+          <a:effectRef idx="2">
+            <a:schemeClr val="accent1"/>
+          </a:effectRef>
+          <a:fontRef idx="minor">
+            <a:schemeClr val="lt1"/>
+          </a:fontRef>
+        </p:style>
+        <p:txBody>
+          <a:bodyPr rtlCol="0" anchor="ctr"/>
+          <a:lstStyle/>
+          <a:p>
+            <a:pPr algn="ctr"/>
+          </a:p>
+        </p:txBody>
+      </p:sp>
+      <p:sp>
+        <p:nvSpPr>
+          <p:cNvPr id="8" name="TextBox 7"/>
           <p:cNvSpPr txBox="1"/>
           <p:nvPr/>
         </p:nvSpPr>
         <p:spPr>
           <a:xfrm>
-            <a:off x="822960" y="1920240"/>
+            <a:off x="822960" y="1965960"/>
             <a:ext cx="4983480" cy="4206240"/>
           </a:xfrm>
           <a:prstGeom prst="rect">
@@ -12116,17 +13510,17 @@
           <a:p>
             <a:pPr>
               <a:spcAft>
-                <a:spcPts val="1000"/>
+                <a:spcPts val="1100"/>
               </a:spcAft>
             </a:pPr>
             <a:r>
               <a:rPr sz="1600" b="1" i="0">
                 <a:solidFill>
-                  <a:srgbClr val="2E3A80"/>
-                </a:solidFill>
-                <a:latin typeface="Montserrat"/>
-              </a:rPr>
-              <a:t>•  </a:t>
+                  <a:srgbClr val="E8801A"/>
+                </a:solidFill>
+                <a:latin typeface="Montserrat"/>
+              </a:rPr>
+              <a:t>▸  </a:t>
             </a:r>
             <a:r>
               <a:rPr sz="1600" b="0" i="0">
@@ -12135,23 +13529,23 @@
                 </a:solidFill>
                 <a:latin typeface="Montserrat"/>
               </a:rPr>
-              <a:t>3 cm a cualquier otro servicio</a:t>
+              <a:t>Soportes desmontables y aislados</a:t>
             </a:r>
           </a:p>
           <a:p>
             <a:pPr>
               <a:spcAft>
-                <a:spcPts val="1000"/>
+                <a:spcPts val="1100"/>
               </a:spcAft>
             </a:pPr>
             <a:r>
               <a:rPr sz="1600" b="1" i="0">
                 <a:solidFill>
-                  <a:srgbClr val="2E3A80"/>
-                </a:solidFill>
-                <a:latin typeface="Montserrat"/>
-              </a:rPr>
-              <a:t>•  </a:t>
+                  <a:srgbClr val="E8801A"/>
+                </a:solidFill>
+                <a:latin typeface="Montserrat"/>
+              </a:rPr>
+              <a:t>▸  </a:t>
             </a:r>
             <a:r>
               <a:rPr sz="1600" b="0" i="0">
@@ -12160,23 +13554,23 @@
                 </a:solidFill>
                 <a:latin typeface="Montserrat"/>
               </a:rPr>
-              <a:t>3 cm al suelo</a:t>
+              <a:t>Que permitan la dilatación</a:t>
             </a:r>
           </a:p>
           <a:p>
             <a:pPr>
               <a:spcAft>
-                <a:spcPts val="1000"/>
+                <a:spcPts val="1100"/>
               </a:spcAft>
             </a:pPr>
             <a:r>
               <a:rPr sz="1600" b="1" i="0">
                 <a:solidFill>
-                  <a:srgbClr val="2E3A80"/>
-                </a:solidFill>
-                <a:latin typeface="Montserrat"/>
-              </a:rPr>
-              <a:t>•  </a:t>
+                  <a:srgbClr val="E8801A"/>
+                </a:solidFill>
+                <a:latin typeface="Montserrat"/>
+              </a:rPr>
+              <a:t>▸  </a:t>
             </a:r>
             <a:r>
               <a:rPr sz="1600" b="0" i="0">
@@ -12185,14 +13579,14 @@
                 </a:solidFill>
                 <a:latin typeface="Montserrat"/>
               </a:rPr>
-              <a:t>El tubo de gas nunca toca nada</a:t>
-            </a:r>
-          </a:p>
-        </p:txBody>
-      </p:sp>
-      <p:sp>
-        <p:nvSpPr>
-          <p:cNvPr id="8" name="imgph" descr="IMGQ:gas pipe next to electrical conduit on wall"/>
+              <a:t>Más grueso el tubo, más separación</a:t>
+            </a:r>
+          </a:p>
+        </p:txBody>
+      </p:sp>
+      <p:sp>
+        <p:nvSpPr>
+          <p:cNvPr id="9" name="imgph" descr="IMGQ:metal pipe clamp bracket on wall"/>
           <p:cNvSpPr/>
           <p:nvPr/>
         </p:nvSpPr>
@@ -12238,7 +13632,7 @@
       </p:sp>
       <p:sp>
         <p:nvSpPr>
-          <p:cNvPr id="9" name="TextBox 8"/>
+          <p:cNvPr id="10" name="TextBox 9"/>
           <p:cNvSpPr txBox="1"/>
           <p:nvPr/>
         </p:nvSpPr>
@@ -12278,7 +13672,7 @@
                 </a:solidFill>
                 <a:latin typeface="Montserrat"/>
               </a:rPr>
-              <a:t>gas pipe next to electrical conduit on wall</a:t>
+              <a:t>metal pipe clamp bracket on wall</a:t>
             </a:r>
           </a:p>
         </p:txBody>
@@ -12375,7 +13769,7 @@
                 </a:solidFill>
                 <a:latin typeface="Montserrat"/>
               </a:rPr>
-              <a:t>009 / 020</a:t>
+              <a:t>009 / 021</a:t>
             </a:r>
           </a:p>
         </p:txBody>
@@ -12423,7 +13817,7 @@
         <p:spPr>
           <a:xfrm>
             <a:off x="822960" y="457200"/>
-            <a:ext cx="8229600" cy="365760"/>
+            <a:ext cx="10058400" cy="365760"/>
           </a:xfrm>
           <a:prstGeom prst="rect">
             <a:avLst/>
@@ -12437,13 +13831,13 @@
           <a:lstStyle/>
           <a:p>
             <a:r>
-              <a:rPr sz="1200" b="1" i="0">
-                <a:solidFill>
-                  <a:srgbClr val="64748B"/>
-                </a:solidFill>
-                <a:latin typeface="Montserrat"/>
-              </a:rPr>
-              <a:t>APARTADO 4.3 · EXCEPCIÓN DE LOS 3 CM</a:t>
+              <a:rPr sz="1300" b="1" i="0">
+                <a:solidFill>
+                  <a:srgbClr val="E8801A"/>
+                </a:solidFill>
+                <a:latin typeface="Montserrat"/>
+              </a:rPr>
+              <a:t>APARTADO 4.3 · DISTANCIAS</a:t>
             </a:r>
           </a:p>
         </p:txBody>
@@ -12471,26 +13865,70 @@
           <a:lstStyle/>
           <a:p>
             <a:r>
-              <a:rPr sz="2700" b="1" i="0">
+              <a:rPr sz="2800" b="1" i="0">
                 <a:solidFill>
                   <a:srgbClr val="1E2761"/>
                 </a:solidFill>
                 <a:latin typeface="Montserrat"/>
               </a:rPr>
-              <a:t>Si no llegas, aísla el tubo</a:t>
-            </a:r>
-          </a:p>
-        </p:txBody>
-      </p:sp>
-      <p:sp>
-        <p:nvSpPr>
-          <p:cNvPr id="7" name="TextBox 6"/>
+              <a:t>El 3 y el 3: tres centímetros</a:t>
+            </a:r>
+          </a:p>
+        </p:txBody>
+      </p:sp>
+      <p:sp>
+        <p:nvSpPr>
+          <p:cNvPr id="7" name="Rounded Rectangle 6"/>
+          <p:cNvSpPr/>
+          <p:nvPr/>
+        </p:nvSpPr>
+        <p:spPr>
+          <a:xfrm>
+            <a:off x="868680" y="1627632"/>
+            <a:ext cx="2011680" cy="73152"/>
+          </a:xfrm>
+          <a:prstGeom prst="roundRect">
+            <a:avLst/>
+          </a:prstGeom>
+          <a:solidFill>
+            <a:srgbClr val="E8801A"/>
+          </a:solidFill>
+          <a:ln>
+            <a:noFill/>
+          </a:ln>
+          <a:effectLst/>
+        </p:spPr>
+        <p:style>
+          <a:lnRef idx="1">
+            <a:schemeClr val="accent1"/>
+          </a:lnRef>
+          <a:fillRef idx="3">
+            <a:schemeClr val="accent1"/>
+          </a:fillRef>
+          <a:effectRef idx="2">
+            <a:schemeClr val="accent1"/>
+          </a:effectRef>
+          <a:fontRef idx="minor">
+            <a:schemeClr val="lt1"/>
+          </a:fontRef>
+        </p:style>
+        <p:txBody>
+          <a:bodyPr rtlCol="0" anchor="ctr"/>
+          <a:lstStyle/>
+          <a:p>
+            <a:pPr algn="ctr"/>
+          </a:p>
+        </p:txBody>
+      </p:sp>
+      <p:sp>
+        <p:nvSpPr>
+          <p:cNvPr id="8" name="TextBox 7"/>
           <p:cNvSpPr txBox="1"/>
           <p:nvPr/>
         </p:nvSpPr>
         <p:spPr>
           <a:xfrm>
-            <a:off x="822960" y="1920240"/>
+            <a:off x="822960" y="1965960"/>
             <a:ext cx="4983480" cy="4206240"/>
           </a:xfrm>
           <a:prstGeom prst="rect">
@@ -12506,17 +13944,17 @@
           <a:p>
             <a:pPr>
               <a:spcAft>
-                <a:spcPts val="1000"/>
+                <a:spcPts val="1100"/>
               </a:spcAft>
             </a:pPr>
             <a:r>
               <a:rPr sz="1600" b="1" i="0">
                 <a:solidFill>
-                  <a:srgbClr val="2E3A80"/>
-                </a:solidFill>
-                <a:latin typeface="Montserrat"/>
-              </a:rPr>
-              <a:t>•  </a:t>
+                  <a:srgbClr val="E8801A"/>
+                </a:solidFill>
+                <a:latin typeface="Montserrat"/>
+              </a:rPr>
+              <a:t>▸  </a:t>
             </a:r>
             <a:r>
               <a:rPr sz="1600" b="0" i="0">
@@ -12525,23 +13963,23 @@
                 </a:solidFill>
                 <a:latin typeface="Montserrat"/>
               </a:rPr>
-              <a:t>Coquilla, caña de PVC o cinta</a:t>
+              <a:t>3 cm a cualquier otro servicio</a:t>
             </a:r>
           </a:p>
           <a:p>
             <a:pPr>
               <a:spcAft>
-                <a:spcPts val="1000"/>
+                <a:spcPts val="1100"/>
               </a:spcAft>
             </a:pPr>
             <a:r>
               <a:rPr sz="1600" b="1" i="0">
                 <a:solidFill>
-                  <a:srgbClr val="2E3A80"/>
-                </a:solidFill>
-                <a:latin typeface="Montserrat"/>
-              </a:rPr>
-              <a:t>•  </a:t>
+                  <a:srgbClr val="E8801A"/>
+                </a:solidFill>
+                <a:latin typeface="Montserrat"/>
+              </a:rPr>
+              <a:t>▸  </a:t>
             </a:r>
             <a:r>
               <a:rPr sz="1600" b="0" i="0">
@@ -12550,23 +13988,23 @@
                 </a:solidFill>
                 <a:latin typeface="Montserrat"/>
               </a:rPr>
-              <a:t>Aislamiento mínimo de 400 voltios</a:t>
+              <a:t>3 cm al suelo</a:t>
             </a:r>
           </a:p>
           <a:p>
             <a:pPr>
               <a:spcAft>
-                <a:spcPts val="1000"/>
+                <a:spcPts val="1100"/>
               </a:spcAft>
             </a:pPr>
             <a:r>
               <a:rPr sz="1600" b="1" i="0">
                 <a:solidFill>
-                  <a:srgbClr val="2E3A80"/>
-                </a:solidFill>
-                <a:latin typeface="Montserrat"/>
-              </a:rPr>
-              <a:t>•  </a:t>
+                  <a:srgbClr val="E8801A"/>
+                </a:solidFill>
+                <a:latin typeface="Montserrat"/>
+              </a:rPr>
+              <a:t>▸  </a:t>
             </a:r>
             <a:r>
               <a:rPr sz="1600" b="0" i="0">
@@ -12575,14 +14013,14 @@
                 </a:solidFill>
                 <a:latin typeface="Montserrat"/>
               </a:rPr>
-              <a:t>Aguantar de −15 a +80 °C</a:t>
-            </a:r>
-          </a:p>
-        </p:txBody>
-      </p:sp>
-      <p:sp>
-        <p:nvSpPr>
-          <p:cNvPr id="8" name="imgph" descr="IMGQ:foam pipe insulation sleeve"/>
+              <a:t>El tubo de gas nunca toca nada</a:t>
+            </a:r>
+          </a:p>
+        </p:txBody>
+      </p:sp>
+      <p:sp>
+        <p:nvSpPr>
+          <p:cNvPr id="9" name="imgph" descr="IMGQ:gas pipe next to electrical conduit on wall"/>
           <p:cNvSpPr/>
           <p:nvPr/>
         </p:nvSpPr>
@@ -12628,7 +14066,7 @@
       </p:sp>
       <p:sp>
         <p:nvSpPr>
-          <p:cNvPr id="9" name="TextBox 8"/>
+          <p:cNvPr id="10" name="TextBox 9"/>
           <p:cNvSpPr txBox="1"/>
           <p:nvPr/>
         </p:nvSpPr>
@@ -12668,7 +14106,7 @@
                 </a:solidFill>
                 <a:latin typeface="Montserrat"/>
               </a:rPr>
-              <a:t>foam pipe insulation sleeve</a:t>
+              <a:t>gas pipe next to electrical conduit on wall</a:t>
             </a:r>
           </a:p>
         </p:txBody>

--- a/Curso Gas B/11 - UNE 60670 - Diseno y construccion/11 - UNE 60670 - Diseno y construccion - Vídeo 2.pptx
+++ b/Curso Gas B/11 - UNE 60670 - Diseno y construccion/11 - UNE 60670 - Diseno y construccion - Vídeo 2.pptx
@@ -1654,12 +1654,12 @@
           <a:lstStyle/>
           <a:p>
             <a:r>
-              <a:t>N1: El empotrado es la excepción y está muy tasado. ¿Cuánto tubo como máximo puedes empotrar en el caso normal?</a:t>
-            </a:r>
-          </a:p>
-          <a:p>
-            <a:r>
-              <a:t>N2: Piensa que empotrar es solo para rodear un obstáculo o llegar a un cajetín. Hay una cifra pequeña que la marca, y otra mayor que es solo para un caso especial.</a:t>
+              <a:t>N1: El empotrado es la excepción y está muy tasado. Escucha la pregunta. ¿Cuál es la longitud máxima de empotramiento de una tubería de gas, en el caso general? Estas son las opciones. Opción A, cero coma veinte metros, o sea veinte centímetros. Opción B, cero coma cuarenta metros, cuarenta centímetros. Opción C, un metro. Opción D, dos metros y medio. Tómate un momento.</a:t>
+            </a:r>
+          </a:p>
+          <a:p>
+            <a:r>
+              <a:t>N2: Una pista: empotrar es solo para rodear un obstáculo o llegar a un cajetín. Hay una cifra pequeña que marca el caso normal, y otra mayor que es solo para un caso especial.</a:t>
             </a:r>
           </a:p>
         </p:txBody>
@@ -1729,12 +1729,12 @@
           <a:lstStyle/>
           <a:p>
             <a:r>
-              <a:t>N1: ¿Por qué cuarenta centímetros?</a:t>
-            </a:r>
-          </a:p>
-          <a:p>
-            <a:r>
-              <a:t>N2: Porque la norma solo deja empotrar lo justo, para esquivar un obstáculo o conectar con un cajetín, y pone el tope en cuarenta centímetros. El dos coma cinco es la trampa: esa longitud mayor solo vale cuando el tubo va hacia un conjunto de regulación o de contadores, no en el caso general. El truco para no fallar: caso normal, cuarenta centímetros; hacia regulación o contadores, hasta dos metros y medio. Y dentro del empotrado, ninguna unión mecánica escondida.</a:t>
+              <a:t>N2: La respuesta correcta es la opción B: cero coma cuarenta metros, es decir, cuarenta centímetros. ¿Por qué? Porque la norma solo deja empotrar lo justo, para esquivar un obstáculo o conectar con un cajetín, y pone el tope en cuarenta centímetros. La opción D, los dos metros y medio, es la trampa: esa longitud mayor solo vale cuando el tubo va hacia un conjunto de regulación o de contadores, no en el caso general.</a:t>
+            </a:r>
+          </a:p>
+          <a:p>
+            <a:r>
+              <a:t>N1: El truco para no fallar: caso normal, cuarenta centímetros; hacia regulación o contadores, hasta dos metros y medio. Y dentro del empotrado, ninguna unión mecánica escondida.</a:t>
             </a:r>
           </a:p>
         </p:txBody>
@@ -2405,12 +2405,12 @@
           <a:lstStyle/>
           <a:p>
             <a:r>
-              <a:t>N1: De la lista negra de prohibiciones, hay una excepción. ¿Por dónde de estos cuatro sitios sí puede pasar el gas?</a:t>
-            </a:r>
-          </a:p>
-          <a:p>
-            <a:r>
-              <a:t>N2: Acuérdate del truco: por donde suba fuego, humo, basura o electricidad gorda, el gas no pasa. Solo uno de estos cuatro es una excepción tolerada.</a:t>
+              <a:t>N1: A ver esta, que tiene truco. Escúchala entera. ¿Por cuál de estos lugares sí puede discurrir una tubería de gas? Te leo las cuatro opciones. Opción A, por el hueco de un ascensor. Opción B, por un local con un transformador eléctrico de potencia. Opción C, por un local con un depósito de gasoil, de clase C, de ochocientos litros. Opción D, por dentro de un forjado de la vivienda. Párala y elige.</a:t>
+            </a:r>
+          </a:p>
+          <a:p>
+            <a:r>
+              <a:t>N2: Una pista: acuérdate del truco, por donde suba fuego, humo, basura o electricidad gorda, el gas no pasa. Solo uno de estos cuatro es una excepción tolerada.</a:t>
             </a:r>
           </a:p>
         </p:txBody>
@@ -2480,12 +2480,12 @@
           <a:lstStyle/>
           <a:p>
             <a:r>
-              <a:t>N1: ¿Por qué el del gasoil?</a:t>
-            </a:r>
-          </a:p>
-          <a:p>
-            <a:r>
-              <a:t>N2: Porque el gasoil es un combustible de clase C, se inflama a cincuenta y cinco grados o más, así que cuesta mucho prenderlo y es menos peligroso que la gasolina. Por eso la norma deja pasar el gas por un local con un depósito de gasoil pequeño, de hasta mil litros, cumpliendo distancias y ventilación. El truco para no fallar: ascensor, transformador y forjado son noes rotundos; la única puerta abierta es la clase C en depósito pequeño.</a:t>
+              <a:t>N2: La respuesta correcta es la opción C: por un local con un depósito de gasoil de clase C de ochocientos litros. ¿Por qué? Porque el gasoil es un combustible de clase C, se inflama a cincuenta y cinco grados o más, así que cuesta mucho prenderlo y es menos peligroso que la gasolina; por eso la norma deja pasar el gas por un local con un depósito de gasoil pequeño, de hasta mil litros, cumpliendo distancias y ventilación. El truco para no fallar: ascensor, transformador y forjado son noes rotundos; la única puerta abierta es la clase C en depósito pequeño.</a:t>
+            </a:r>
+          </a:p>
+          <a:p>
+            <a:r>
+              <a:t>N1: Ochocientos litros están por debajo de los mil que permite la norma, así que la opción C entra. Las otras tres son de la lista negra.</a:t>
             </a:r>
           </a:p>
         </p:txBody>
